--- a/20260905/pde5_harness/sample_run/report/docs/talk_16x9.pptx
+++ b/20260905/pde5_harness/sample_run/report/docs/talk_16x9.pptx
@@ -514,7 +514,12 @@
           <a:lstStyle/>
           <a:p>
             <a:r>
-              <a:t>12분 발표. 결론을 3번 슬라이드에서 먼저 말하고, 나머지는 그 근거를 쌓는 구성입니다.</a:t>
+              <a:t>12분. 배분: 2번 45초 · 3번 45초 · 4번 70초 · 5번 60초 · 6번 70초 · 7·8번 각 60초 · 9번 70초 · 10번 70초 · 11번 75초 · 12번 60초 · 13번 35초.</a:t>
+            </a:r>
+          </a:p>
+          <a:p>
+            <a:r>
+              <a:t>구성: 문제 → 사전 합격선 → 답 → 설계 → (자세 갈래 6-8) → (상관 갈래 9-11) → 정리.</a:t>
             </a:r>
           </a:p>
         </p:txBody>
@@ -584,7 +589,12 @@
           <a:lstStyle/>
           <a:p>
             <a:r>
-              <a:t>near 대역만 유의하고 보정 후에도 살아남습니다. 그런데 그 대역의 약함 칸이 전수라 민감도 분석이 안 되고, AUC 신뢰구간이 기준 0.7을 포함합니다. 가설로만 남깁니다.</a:t>
+              <a:t>near 대역, 즉 실데나필과 닮은 화합물들만 유의합니다. 보정 후에도 살아남고 교란 통제하면 오히려 강해집니다. 그런데 세 가지 때문에 무게를 실을 수 없습니다. AUC 신뢰구간이 기준 0.7을 포함하고, 그 대역의 약함 칸이 전수라서 빼면 유의하지 않고, 그 칸 역가가 어세이 바닥값에 몰려 있습니다. 게다가 그 대역조차 자세가 25%만 기준 안에 있습니다.</a:t>
+            </a:r>
+          </a:p>
+          <a:p>
+            <a:r>
+              <a:t>[다음으로] 여기까지가 이번 데이터입니다. 남은 질문이 하나 있습니다.</a:t>
             </a:r>
           </a:p>
         </p:txBody>
@@ -654,7 +664,12 @@
           <a:lstStyle/>
           <a:p>
             <a:r>
-              <a:t>이게 이 연구에서 가장 큰 제약입니다. 신호 없음이라는 진술이 대부분 틀린 자세에 매긴 점수에 대한 것이라는 뜻입니다.</a:t>
+              <a:t>여기서 주제가 바뀝니다. 앞은 자세와 상관 이야기였고, 이건 우리 자신에 대한 이야기입니다. 같은 하네스가 n=30에서 -0.538을 냈었습니다. 이 판본 초안은 그게 골격 교란 때문이라고 적었습니다. 그런데 옛 데이터에 같은 통제를 적용해 보니 1.2%만 줄었습니다. 설계 재현도, 프로토콜 재도킹도 원인이 아니었습니다. 원인은 그 화합물 집합 자체이고, 어떤 성질 때문인지는 특정하지 못했습니다.</a:t>
+            </a:r>
+          </a:p>
+          <a:p>
+            <a:r>
+              <a:t>[다음으로] 정리하겠습니다.</a:t>
             </a:r>
           </a:p>
         </p:txBody>
@@ -724,7 +739,12 @@
           <a:lstStyle/>
           <a:p>
             <a:r>
-              <a:t>실무 지침 셋으로 마무리합니다.</a:t>
+              <a:t>앞에서 말씀드린 결과는 반복하지 않겠습니다. 남은 것과 가져가실 것만 말씀드립니다. 배제한 것과 배제하지 못한 것을 구분해서 적었습니다.</a:t>
+            </a:r>
+          </a:p>
+          <a:p>
+            <a:r>
+              <a:t>[다음으로] 마지막으로 이 연구가 자기 자신에 대해 알아낸 것을 말씀드리겠습니다.</a:t>
             </a:r>
           </a:p>
         </p:txBody>
@@ -794,7 +814,7 @@
           <a:lstStyle/>
           <a:p>
             <a:r>
-              <a:t>질문 대비: (1) 왜 PDE5A 인가 — 결정 구조와 활성 데이터가 모두 풍부해서. (2) 다른 표적에서도 같은가 — 검정하지 않았고 그것이 가장 큰 한계. (3) 물을 넣으면 달라지나 — 배제하지 못한 후보이며 다음 실험.</a:t>
+              <a:t>질문 대비: (1) 왜 PDE5A 인가 — 결정 구조와 활성 데이터가 모두 풍부해서. (2) 다른 표적에서도 같은가 — 검정하지 않았고 그것이 가장 큰 한계. 표적 하나, 구조 하나입니다. (3) 물을 넣으면 달라지나 — 배제하지 못한 후보이며 다음 실험. (4) 자세가 81% 틀렸는데 상관을 논할 수 있나 — 그래서 6번에서 미리 상한을 걸었고, 결론도 그 안에서만 말했습니다.</a:t>
             </a:r>
           </a:p>
         </p:txBody>
@@ -864,7 +884,12 @@
           <a:lstStyle/>
           <a:p>
             <a:r>
-              <a:t>표적 구조는 대개 holo 입니다. 그 리간드를 닮은 화합물은 점수도 좋고 실제로도 강력합니다. 두 경로가 같은 방향이라 상관은 나오는데, 그게 채점 능력인지 골격 닮음인지 구분이 안 됩니다.</a:t>
+              <a:t>표적 좌표는 대개 어떤 리간드가 결합한 채로 풀린 holo 구조입니다. 그 리간드를 닮은 화합물은 두 경로로 유리해집니다. 포켓이 그 리간드에 맞춰 유도적합돼 있으니 기하학적으로 잘 맞고, 같은 계열을 최적화한 산물이니 실제로도 강력합니다. 방향이 같으니 상관은 나옵니다. 그런데 그게 채점 능력인지 골격 닮음인지 구분이 안 됩니다.</a:t>
+            </a:r>
+          </a:p>
+          <a:p>
+            <a:r>
+              <a:t>[다음으로] 그래서 우리는 먼저 무엇을 성공으로 볼지부터 정했습니다.</a:t>
             </a:r>
           </a:p>
         </p:txBody>
@@ -934,7 +959,12 @@
           <a:lstStyle/>
           <a:p>
             <a:r>
-              <a:t>여기서 결론을 먼저 말합니다. 뒤는 전부 이 숫자를 어떻게 얻었고 무엇을 배제했는지입니다.</a:t>
+              <a:t>숫자를 보여드리기 전에 합격선을 먼저 말씀드립니다. 뒤에 나오는 판정은 전부 이 표 대비입니다. 목적 4는 원래 계획에 없었는데, 재도킹 대조가 실패하면서 추가됐습니다.</a:t>
+            </a:r>
+          </a:p>
+          <a:p>
+            <a:r>
+              <a:t>[다음으로] 결과부터 말씀드리면, 넷 중 하나도 넘지 못했습니다.</a:t>
             </a:r>
           </a:p>
         </p:txBody>
@@ -1004,7 +1034,12 @@
           <a:lstStyle/>
           <a:p>
             <a:r>
-              <a:t>ChEMBL 전수를 받아 화합물당 중앙값으로 집계하고, 역가 3구간과 실데나필 Tanimoto 3구간의 격자에서 균등 추출했습니다. 교란 상관이 0.281에서 0.175로 떨어집니다.</a:t>
+              <a:t>전체 순위상관이 -0.079, p는 0.32입니다. Q²는 -0.018로 기준 0.3에, AUC는 0.574로 기준 0.7에 미달합니다. 중요한 건 아래 문장입니다 — 이건 귀무를 채택한 게 아닙니다. 신뢰구간 상한이 +0.08이니 약한 관계까지 배제하지는 못합니다.</a:t>
+            </a:r>
+          </a:p>
+          <a:p>
+            <a:r>
+              <a:t>[다음으로] 이 숫자가 나온 설계를 보시겠습니다.</a:t>
             </a:r>
           </a:p>
         </p:txBody>
@@ -1074,7 +1109,12 @@
           <a:lstStyle/>
           <a:p>
             <a:r>
-              <a:t>C1은 상위 모드 중 최선, C2는 점수 1위 자세입니다. 합쳐서 하나로 보고하면 탐색 실패인지 채점 실패인지 알 수 없습니다.</a:t>
+              <a:t>ChEMBL 전수를 받아 화합물당 중앙값으로 집계하고, 역가 3구간과 실데나필 Tanimoto 3구간의 격자에서 균등 추출했습니다. 교란 상관이 0.281에서 0.175로 떨어집니다. 완전한 직교화는 화학적으로 불가능합니다 — 실데나필과 매우 닮았는데 약한 화합물이 드물어서 오른쪽 아래 두 칸이 얇습니다.</a:t>
+            </a:r>
+          </a:p>
+          <a:p>
+            <a:r>
+              <a:t>[다음으로] 그런데 이 결과를 해석하기 전에 확인할 게 있었습니다. 재도킹 대조입니다.</a:t>
             </a:r>
           </a:p>
         </p:txBody>
@@ -1144,7 +1184,12 @@
           <a:lstStyle/>
           <a:p>
             <a:r>
-              <a:t>깊이 4에서 128까지. C1은 통과율 0에서 100%로 고쳐지는데 C2는 전 구간 0%이고 최고 점수는 아예 변하지 않습니다. 탐색은 얕은 깊이에서 이미 전역 최소를 찾았고 그 최소가 틀린 자리에 있습니다.</a:t>
+              <a:t>C1은 상위 모드 중 최선, C2는 점수 1위 자세입니다. 합쳐 하나로 보고하면 탐색 실패인지 채점 실패인지 알 수 없습니다. 공결정 리간드에서 C2가 실패했는데, 이건 한 건짜리 일화가 아닙니다. 163개 전체로 재면 중앙값 4.50 Å, 2 Å 기준을 넘는 게 19%뿐입니다. 즉 앞으로 보실 상관은 대부분 틀린 자세에 매긴 점수에 대한 것입니다. 이게 이 연구에서 가장 큰 제약입니다.</a:t>
+            </a:r>
+          </a:p>
+          <a:p>
+            <a:r>
+              <a:t>[다음으로] 그럼 왜 채점이 실패했나. 후보를 하나씩 지워 보겠습니다.</a:t>
             </a:r>
           </a:p>
         </p:txBody>
@@ -1214,7 +1259,12 @@
           <a:lstStyle/>
           <a:p>
             <a:r>
-              <a:t>수용체는 pH 7.4인데 리간드는 중성이라는 비대칭이 있었습니다. 맞춰도 점수가 그대로입니다. 이유는 기본 Vina 함수에 정전기 항이 없기 때문입니다.</a:t>
+              <a:t>깊이 4에서 128까지, 시드 3개. C1은 통과율 0에서 100%로 완전히 고쳐지는데 C2는 전 구간 0%이고 최고 점수는 아예 변하지 않습니다. 해석하면 — 탐색은 가장 얕은 깊이에서 이미 전역 최소를 찾았고, 그 최소가 결정 자세에서 8.4 Å 떨어진 자리에 있습니다. 탐색으로는 고칠 수 없다는 뜻입니다.</a:t>
+            </a:r>
+          </a:p>
+          <a:p>
+            <a:r>
+              <a:t>[다음으로] 두 번째 후보는 프로토네이션이었습니다.</a:t>
             </a:r>
           </a:p>
         </p:txBody>
@@ -1284,7 +1334,12 @@
           <a:lstStyle/>
           <a:p>
             <a:r>
-              <a:t>초안은 골격 교란 때문이라고 적었는데, 옛 데이터에 같은 통제를 적용하니 1.2%만 줄었습니다. 설계 재현도, 프로토콜 재도킹도 원인이 아니었습니다. 남은 것은 화합물 집합 자체입니다.</a:t>
+              <a:t>수용체는 pH 7.4로 프로토네이션했는데 리간드는 중성 그대로였습니다. 실데나필의 피페라진은 생리적 pH에서 양성자화되니 이 비대칭이 원인일 수 있었습니다. 2×2로 맞춰 봤더니 네 조건 점수가 전부 -9.60으로 같습니다. 이유까지 확인했습니다 — 기본 Vina 함수에 정전기 항이 없습니다. 타이핑은 실제로 바뀌었는데 그 질소가 결합 거리 밖이라 수소결합 항이 안 움직였습니다.</a:t>
+            </a:r>
+          </a:p>
+          <a:p>
+            <a:r>
+              <a:t>[다음으로] 자세 갈래는 여기까지입니다. 이제 본 결과인 상관으로 갑니다.</a:t>
             </a:r>
           </a:p>
         </p:txBody>
@@ -1354,7 +1409,12 @@
           <a:lstStyle/>
           <a:p>
             <a:r>
-              <a:t>골격과 크기를 각각·동시에 통제했습니다. far와 mid 대역은 0 근처이고 near만 유의합니다.</a:t>
+              <a:t>골격과 크기를 각각, 그리고 동시에 통제했습니다. 원상관 -0.079가 통제 후에도 -0.088에서 -0.105 사이로 거의 그대로입니다. 유사도 대역으로 쪼개도 far와 mid는 0 근처입니다. 막대는 95% 신뢰구간이고 전부 0을 포함합니다.</a:t>
+            </a:r>
+          </a:p>
+          <a:p>
+            <a:r>
+              <a:t>[다음으로] 딱 한 대역만 다릅니다.</a:t>
             </a:r>
           </a:p>
         </p:txBody>
@@ -4725,7 +4785,7 @@
         </p:nvSpPr>
         <p:spPr>
           <a:xfrm>
-            <a:off x="576000" y="2016000"/>
+            <a:off x="576000" y="1440000"/>
             <a:ext cx="3680400" cy="792000"/>
           </a:xfrm>
           <a:prstGeom prst="rect">
@@ -4745,7 +4805,7 @@
               </a:spcAft>
             </a:pPr>
             <a:r>
-              <a:rPr sz="4800" b="1">
+              <a:rPr sz="4400" b="1">
                 <a:solidFill>
                   <a:srgbClr val="009E73"/>
                 </a:solidFill>
@@ -4764,7 +4824,7 @@
         </p:nvSpPr>
         <p:spPr>
           <a:xfrm>
-            <a:off x="576000" y="2736000"/>
+            <a:off x="576000" y="2160000"/>
             <a:ext cx="3680400" cy="360000"/>
           </a:xfrm>
           <a:prstGeom prst="rect">
@@ -4790,7 +4850,7 @@
                 </a:solidFill>
                 <a:latin typeface="Pretendard"/>
               </a:rPr>
-              <a:t>near 대역 ρ  (p = 0.00365)</a:t>
+              <a:t>near 대역 ρ   (p = 0.00365)</a:t>
             </a:r>
           </a:p>
         </p:txBody>
@@ -4803,7 +4863,7 @@
         </p:nvSpPr>
         <p:spPr>
           <a:xfrm>
-            <a:off x="4256400" y="2016000"/>
+            <a:off x="4256400" y="1440000"/>
             <a:ext cx="3680400" cy="792000"/>
           </a:xfrm>
           <a:prstGeom prst="rect">
@@ -4823,7 +4883,7 @@
               </a:spcAft>
             </a:pPr>
             <a:r>
-              <a:rPr sz="4800" b="1">
+              <a:rPr sz="4400" b="1">
                 <a:solidFill>
                   <a:srgbClr val="D55E00"/>
                 </a:solidFill>
@@ -4842,7 +4902,7 @@
         </p:nvSpPr>
         <p:spPr>
           <a:xfrm>
-            <a:off x="4256400" y="2736000"/>
+            <a:off x="4256400" y="2160000"/>
             <a:ext cx="3680400" cy="360000"/>
           </a:xfrm>
           <a:prstGeom prst="rect">
@@ -4868,7 +4928,7 @@
                 </a:solidFill>
                 <a:latin typeface="Pretendard"/>
               </a:rPr>
-              <a:t>AUC  95% CI [0.64, 0.95]</a:t>
+              <a:t>AUC   95% CI [0.64, 0.95]</a:t>
             </a:r>
           </a:p>
         </p:txBody>
@@ -4881,7 +4941,7 @@
         </p:nvSpPr>
         <p:spPr>
           <a:xfrm>
-            <a:off x="7936800" y="2016000"/>
+            <a:off x="7936800" y="1440000"/>
             <a:ext cx="3680400" cy="792000"/>
           </a:xfrm>
           <a:prstGeom prst="rect">
@@ -4901,7 +4961,7 @@
               </a:spcAft>
             </a:pPr>
             <a:r>
-              <a:rPr sz="4800" b="1">
+              <a:rPr sz="4400" b="1">
                 <a:solidFill>
                   <a:srgbClr val="D55E00"/>
                 </a:solidFill>
@@ -4920,7 +4980,7 @@
         </p:nvSpPr>
         <p:spPr>
           <a:xfrm>
-            <a:off x="7936800" y="2736000"/>
+            <a:off x="7936800" y="2160000"/>
             <a:ext cx="3680400" cy="360000"/>
           </a:xfrm>
           <a:prstGeom prst="rect">
@@ -4959,8 +5019,8 @@
         </p:nvSpPr>
         <p:spPr>
           <a:xfrm>
-            <a:off x="864000" y="3888000"/>
-            <a:ext cx="10465200" cy="1440000"/>
+            <a:off x="792000" y="2808000"/>
+            <a:ext cx="10609200" cy="1224000"/>
           </a:xfrm>
           <a:prstGeom prst="roundRect">
             <a:avLst/>
@@ -5005,8 +5065,8 @@
         </p:nvSpPr>
         <p:spPr>
           <a:xfrm>
-            <a:off x="1080000" y="4104000"/>
-            <a:ext cx="10033200" cy="1080000"/>
+            <a:off x="1008000" y="2952000"/>
+            <a:ext cx="10177200" cy="1008000"/>
           </a:xfrm>
           <a:prstGeom prst="rect">
             <a:avLst/>
@@ -5025,7 +5085,7 @@
               </a:spcAft>
             </a:pPr>
             <a:r>
-              <a:rPr sz="2000" b="1">
+              <a:rPr sz="1900" b="1">
                 <a:solidFill>
                   <a:srgbClr val="D55E00"/>
                 </a:solidFill>
@@ -5048,6 +5108,123 @@
                 <a:latin typeface="Pretendard"/>
               </a:rPr>
               <a:t>(a) AUC 신뢰구간이 사전 기준 0.7 을 포함한다   (b) 전수(census)인 약함 칸을 빼면 유의하지 않다   (c) 그 칸의 역가가 어세이 바닥값에 몰려 있다</a:t>
+            </a:r>
+          </a:p>
+        </p:txBody>
+      </p:sp>
+      <p:sp>
+        <p:nvSpPr>
+          <p:cNvPr id="14" name="Rounded Rectangle 13"/>
+          <p:cNvSpPr/>
+          <p:nvPr/>
+        </p:nvSpPr>
+        <p:spPr>
+          <a:xfrm>
+            <a:off x="792000" y="4248000"/>
+            <a:ext cx="10609200" cy="1440000"/>
+          </a:xfrm>
+          <a:prstGeom prst="roundRect">
+            <a:avLst/>
+          </a:prstGeom>
+          <a:solidFill>
+            <a:srgbClr val="F3F5F7"/>
+          </a:solidFill>
+          <a:ln w="17780">
+            <a:solidFill>
+              <a:srgbClr val="0B2A4A"/>
+            </a:solidFill>
+          </a:ln>
+          <a:effectLst/>
+        </p:spPr>
+        <p:style>
+          <a:lnRef idx="1">
+            <a:schemeClr val="accent1"/>
+          </a:lnRef>
+          <a:fillRef idx="3">
+            <a:schemeClr val="accent1"/>
+          </a:fillRef>
+          <a:effectRef idx="2">
+            <a:schemeClr val="accent1"/>
+          </a:effectRef>
+          <a:fontRef idx="minor">
+            <a:schemeClr val="lt1"/>
+          </a:fontRef>
+        </p:style>
+        <p:txBody>
+          <a:bodyPr rtlCol="0" anchor="ctr"/>
+          <a:lstStyle/>
+          <a:p>
+            <a:pPr algn="ctr"/>
+          </a:p>
+        </p:txBody>
+      </p:sp>
+      <p:sp>
+        <p:nvSpPr>
+          <p:cNvPr id="15" name="TextBox 14"/>
+          <p:cNvSpPr txBox="1"/>
+          <p:nvPr/>
+        </p:nvSpPr>
+        <p:spPr>
+          <a:xfrm>
+            <a:off x="1008000" y="4392000"/>
+            <a:ext cx="10177200" cy="1224000"/>
+          </a:xfrm>
+          <a:prstGeom prst="rect">
+            <a:avLst/>
+          </a:prstGeom>
+          <a:noFill/>
+        </p:spPr>
+        <p:txBody>
+          <a:bodyPr wrap="square" anchor="t" lIns="36000" rIns="36000" tIns="0" bIns="0">
+            <a:spAutoFit/>
+          </a:bodyPr>
+          <a:lstStyle/>
+          <a:p>
+            <a:pPr algn="l">
+              <a:spcAft>
+                <a:spcPts val="300"/>
+              </a:spcAft>
+            </a:pPr>
+            <a:r>
+              <a:rPr sz="1700" b="1">
+                <a:solidFill>
+                  <a:srgbClr val="0B2A4A"/>
+                </a:solidFill>
+                <a:latin typeface="Pretendard"/>
+              </a:rPr>
+              <a:t>그리고 대역별 자세 타당도가 해석을 다시 제한한다</a:t>
+            </a:r>
+          </a:p>
+          <a:p>
+            <a:pPr algn="l">
+              <a:spcAft>
+                <a:spcPts val="300"/>
+              </a:spcAft>
+            </a:pPr>
+            <a:r>
+              <a:rPr sz="1600" b="0">
+                <a:solidFill>
+                  <a:srgbClr val="1A1A1A"/>
+                </a:solidFill>
+                <a:latin typeface="Pretendard"/>
+              </a:rPr>
+              <a:t>far 1.8%   ·   mid 31.4%   ·   near 25.0% 만 2 Å 기준 안에 있다</a:t>
+            </a:r>
+          </a:p>
+          <a:p>
+            <a:pPr algn="l">
+              <a:spcAft>
+                <a:spcPts val="300"/>
+              </a:spcAft>
+            </a:pPr>
+            <a:r>
+              <a:rPr sz="1400" b="0">
+                <a:solidFill>
+                  <a:srgbClr val="5A636B"/>
+                </a:solidFill>
+                <a:latin typeface="Pretendard"/>
+              </a:rPr>
+              <a:t>이 지표는 “자세가 맞는가” 가 아니라 “공유 부분구조가 공결정 리간드 위에 겹치는가” 를 잰다. 골격이 다른 far 대역에서는 해석이 특히 약하다.</a:t>
             </a:r>
           </a:p>
         </p:txBody>
@@ -5148,7 +5325,7 @@
                 </a:solidFill>
                 <a:latin typeface="Pretendard"/>
               </a:rPr>
-              <a:t>해석의 상한</a:t>
+              <a:t>별개 질문 — 비재현</a:t>
             </a:r>
           </a:p>
         </p:txBody>
@@ -5187,7 +5364,7 @@
                 </a:solidFill>
                 <a:latin typeface="Pretendard"/>
               </a:rPr>
-              <a:t>우리가 점수를 매긴 자세의 81%는 결정 자세 틀 밖에 있다</a:t>
+              <a:t>다른 질문 — n=30 의 −0.538 은 어디서 왔나 (우리 초안의 답도 틀렸다)</a:t>
             </a:r>
           </a:p>
         </p:txBody>
@@ -5233,14 +5410,704 @@
       </p:sp>
       <p:sp>
         <p:nvSpPr>
-          <p:cNvPr id="6" name="TextBox 5"/>
-          <p:cNvSpPr txBox="1"/>
-          <p:nvPr/>
-        </p:nvSpPr>
-        <p:spPr>
-          <a:xfrm>
-            <a:off x="432000" y="2016000"/>
-            <a:ext cx="2832300" cy="792000"/>
+          <p:cNvPr id="6" name="Rectangle 5"/>
+          <p:cNvSpPr/>
+          <p:nvPr/>
+        </p:nvSpPr>
+        <p:spPr>
+          <a:xfrm>
+            <a:off x="720000" y="1368000"/>
+            <a:ext cx="10753200" cy="612000"/>
+          </a:xfrm>
+          <a:prstGeom prst="rect">
+            <a:avLst/>
+          </a:prstGeom>
+          <a:solidFill>
+            <a:srgbClr val="F3F5F7"/>
+          </a:solidFill>
+          <a:ln>
+            <a:noFill/>
+          </a:ln>
+          <a:effectLst/>
+        </p:spPr>
+        <p:style>
+          <a:lnRef idx="1">
+            <a:schemeClr val="accent1"/>
+          </a:lnRef>
+          <a:fillRef idx="3">
+            <a:schemeClr val="accent1"/>
+          </a:fillRef>
+          <a:effectRef idx="2">
+            <a:schemeClr val="accent1"/>
+          </a:effectRef>
+          <a:fontRef idx="minor">
+            <a:schemeClr val="lt1"/>
+          </a:fontRef>
+        </p:style>
+        <p:txBody>
+          <a:bodyPr rtlCol="0" anchor="ctr"/>
+          <a:lstStyle/>
+          <a:p>
+            <a:pPr algn="ctr"/>
+          </a:p>
+        </p:txBody>
+      </p:sp>
+      <p:sp>
+        <p:nvSpPr>
+          <p:cNvPr id="7" name="TextBox 6"/>
+          <p:cNvSpPr txBox="1"/>
+          <p:nvPr/>
+        </p:nvSpPr>
+        <p:spPr>
+          <a:xfrm>
+            <a:off x="900000" y="1440000"/>
+            <a:ext cx="4680000" cy="468000"/>
+          </a:xfrm>
+          <a:prstGeom prst="rect">
+            <a:avLst/>
+          </a:prstGeom>
+          <a:noFill/>
+        </p:spPr>
+        <p:txBody>
+          <a:bodyPr wrap="square" anchor="ctr" lIns="36000" rIns="36000" tIns="0" bIns="0">
+            <a:spAutoFit/>
+          </a:bodyPr>
+          <a:lstStyle/>
+          <a:p>
+            <a:pPr algn="l">
+              <a:spcAft>
+                <a:spcPts val="0"/>
+              </a:spcAft>
+            </a:pPr>
+            <a:r>
+              <a:rPr sz="1600" b="0">
+                <a:solidFill>
+                  <a:srgbClr val="1A1A1A"/>
+                </a:solidFill>
+                <a:latin typeface="Pretendard"/>
+              </a:rPr>
+              <a:t>① 옛 데이터에 골격 통제</a:t>
+            </a:r>
+          </a:p>
+        </p:txBody>
+      </p:sp>
+      <p:sp>
+        <p:nvSpPr>
+          <p:cNvPr id="8" name="TextBox 7"/>
+          <p:cNvSpPr txBox="1"/>
+          <p:nvPr/>
+        </p:nvSpPr>
+        <p:spPr>
+          <a:xfrm>
+            <a:off x="5688000" y="1440000"/>
+            <a:ext cx="2952000" cy="468000"/>
+          </a:xfrm>
+          <a:prstGeom prst="rect">
+            <a:avLst/>
+          </a:prstGeom>
+          <a:noFill/>
+        </p:spPr>
+        <p:txBody>
+          <a:bodyPr wrap="square" anchor="ctr" lIns="36000" rIns="36000" tIns="0" bIns="0">
+            <a:spAutoFit/>
+          </a:bodyPr>
+          <a:lstStyle/>
+          <a:p>
+            <a:pPr algn="ctr">
+              <a:spcAft>
+                <a:spcPts val="0"/>
+              </a:spcAft>
+            </a:pPr>
+            <a:r>
+              <a:rPr sz="1800" b="1">
+                <a:solidFill>
+                  <a:srgbClr val="D55E00"/>
+                </a:solidFill>
+                <a:latin typeface="Pretendard"/>
+              </a:rPr>
+              <a:t>-0.538 → -0.532</a:t>
+            </a:r>
+          </a:p>
+        </p:txBody>
+      </p:sp>
+      <p:sp>
+        <p:nvSpPr>
+          <p:cNvPr id="9" name="TextBox 8"/>
+          <p:cNvSpPr txBox="1"/>
+          <p:nvPr/>
+        </p:nvSpPr>
+        <p:spPr>
+          <a:xfrm>
+            <a:off x="8784000" y="1440000"/>
+            <a:ext cx="2664000" cy="468000"/>
+          </a:xfrm>
+          <a:prstGeom prst="rect">
+            <a:avLst/>
+          </a:prstGeom>
+          <a:noFill/>
+        </p:spPr>
+        <p:txBody>
+          <a:bodyPr wrap="square" anchor="ctr" lIns="36000" rIns="36000" tIns="0" bIns="0">
+            <a:spAutoFit/>
+          </a:bodyPr>
+          <a:lstStyle/>
+          <a:p>
+            <a:pPr algn="r">
+              <a:spcAft>
+                <a:spcPts val="0"/>
+              </a:spcAft>
+            </a:pPr>
+            <a:r>
+              <a:rPr sz="1500" b="0">
+                <a:solidFill>
+                  <a:srgbClr val="5A636B"/>
+                </a:solidFill>
+                <a:latin typeface="Pretendard"/>
+              </a:rPr>
+              <a:t>감쇠 1.2%</a:t>
+            </a:r>
+          </a:p>
+        </p:txBody>
+      </p:sp>
+      <p:sp>
+        <p:nvSpPr>
+          <p:cNvPr id="10" name="Rectangle 9"/>
+          <p:cNvSpPr/>
+          <p:nvPr/>
+        </p:nvSpPr>
+        <p:spPr>
+          <a:xfrm>
+            <a:off x="720000" y="2052000"/>
+            <a:ext cx="10753200" cy="612000"/>
+          </a:xfrm>
+          <a:prstGeom prst="rect">
+            <a:avLst/>
+          </a:prstGeom>
+          <a:solidFill>
+            <a:srgbClr val="FFFFFF"/>
+          </a:solidFill>
+          <a:ln>
+            <a:noFill/>
+          </a:ln>
+          <a:effectLst/>
+        </p:spPr>
+        <p:style>
+          <a:lnRef idx="1">
+            <a:schemeClr val="accent1"/>
+          </a:lnRef>
+          <a:fillRef idx="3">
+            <a:schemeClr val="accent1"/>
+          </a:fillRef>
+          <a:effectRef idx="2">
+            <a:schemeClr val="accent1"/>
+          </a:effectRef>
+          <a:fontRef idx="minor">
+            <a:schemeClr val="lt1"/>
+          </a:fontRef>
+        </p:style>
+        <p:txBody>
+          <a:bodyPr rtlCol="0" anchor="ctr"/>
+          <a:lstStyle/>
+          <a:p>
+            <a:pPr algn="ctr"/>
+          </a:p>
+        </p:txBody>
+      </p:sp>
+      <p:sp>
+        <p:nvSpPr>
+          <p:cNvPr id="11" name="TextBox 10"/>
+          <p:cNvSpPr txBox="1"/>
+          <p:nvPr/>
+        </p:nvSpPr>
+        <p:spPr>
+          <a:xfrm>
+            <a:off x="900000" y="2124000"/>
+            <a:ext cx="4680000" cy="468000"/>
+          </a:xfrm>
+          <a:prstGeom prst="rect">
+            <a:avLst/>
+          </a:prstGeom>
+          <a:noFill/>
+        </p:spPr>
+        <p:txBody>
+          <a:bodyPr wrap="square" anchor="ctr" lIns="36000" rIns="36000" tIns="0" bIns="0">
+            <a:spAutoFit/>
+          </a:bodyPr>
+          <a:lstStyle/>
+          <a:p>
+            <a:pPr algn="l">
+              <a:spcAft>
+                <a:spcPts val="0"/>
+              </a:spcAft>
+            </a:pPr>
+            <a:r>
+              <a:rPr sz="1600" b="0">
+                <a:solidFill>
+                  <a:srgbClr val="1A1A1A"/>
+                </a:solidFill>
+                <a:latin typeface="Pretendard"/>
+              </a:rPr>
+              <a:t>② 옛 데이터의 점수 vs Tanimoto</a:t>
+            </a:r>
+          </a:p>
+        </p:txBody>
+      </p:sp>
+      <p:sp>
+        <p:nvSpPr>
+          <p:cNvPr id="12" name="TextBox 11"/>
+          <p:cNvSpPr txBox="1"/>
+          <p:nvPr/>
+        </p:nvSpPr>
+        <p:spPr>
+          <a:xfrm>
+            <a:off x="5688000" y="2124000"/>
+            <a:ext cx="2952000" cy="468000"/>
+          </a:xfrm>
+          <a:prstGeom prst="rect">
+            <a:avLst/>
+          </a:prstGeom>
+          <a:noFill/>
+        </p:spPr>
+        <p:txBody>
+          <a:bodyPr wrap="square" anchor="ctr" lIns="36000" rIns="36000" tIns="0" bIns="0">
+            <a:spAutoFit/>
+          </a:bodyPr>
+          <a:lstStyle/>
+          <a:p>
+            <a:pPr algn="ctr">
+              <a:spcAft>
+                <a:spcPts val="0"/>
+              </a:spcAft>
+            </a:pPr>
+            <a:r>
+              <a:rPr sz="1800" b="1">
+                <a:solidFill>
+                  <a:srgbClr val="D55E00"/>
+                </a:solidFill>
+                <a:latin typeface="Pretendard"/>
+              </a:rPr>
+              <a:t>-0.131</a:t>
+            </a:r>
+          </a:p>
+        </p:txBody>
+      </p:sp>
+      <p:sp>
+        <p:nvSpPr>
+          <p:cNvPr id="13" name="TextBox 12"/>
+          <p:cNvSpPr txBox="1"/>
+          <p:nvPr/>
+        </p:nvSpPr>
+        <p:spPr>
+          <a:xfrm>
+            <a:off x="8784000" y="2124000"/>
+            <a:ext cx="2664000" cy="468000"/>
+          </a:xfrm>
+          <a:prstGeom prst="rect">
+            <a:avLst/>
+          </a:prstGeom>
+          <a:noFill/>
+        </p:spPr>
+        <p:txBody>
+          <a:bodyPr wrap="square" anchor="ctr" lIns="36000" rIns="36000" tIns="0" bIns="0">
+            <a:spAutoFit/>
+          </a:bodyPr>
+          <a:lstStyle/>
+          <a:p>
+            <a:pPr algn="r">
+              <a:spcAft>
+                <a:spcPts val="0"/>
+              </a:spcAft>
+            </a:pPr>
+            <a:r>
+              <a:rPr sz="1500" b="0">
+                <a:solidFill>
+                  <a:srgbClr val="5A636B"/>
+                </a:solidFill>
+                <a:latin typeface="Pretendard"/>
+              </a:rPr>
+              <a:t>p = 0.48923</a:t>
+            </a:r>
+          </a:p>
+        </p:txBody>
+      </p:sp>
+      <p:sp>
+        <p:nvSpPr>
+          <p:cNvPr id="14" name="Rectangle 13"/>
+          <p:cNvSpPr/>
+          <p:nvPr/>
+        </p:nvSpPr>
+        <p:spPr>
+          <a:xfrm>
+            <a:off x="720000" y="2736000"/>
+            <a:ext cx="10753200" cy="612000"/>
+          </a:xfrm>
+          <a:prstGeom prst="rect">
+            <a:avLst/>
+          </a:prstGeom>
+          <a:solidFill>
+            <a:srgbClr val="F3F5F7"/>
+          </a:solidFill>
+          <a:ln>
+            <a:noFill/>
+          </a:ln>
+          <a:effectLst/>
+        </p:spPr>
+        <p:style>
+          <a:lnRef idx="1">
+            <a:schemeClr val="accent1"/>
+          </a:lnRef>
+          <a:fillRef idx="3">
+            <a:schemeClr val="accent1"/>
+          </a:fillRef>
+          <a:effectRef idx="2">
+            <a:schemeClr val="accent1"/>
+          </a:effectRef>
+          <a:fontRef idx="minor">
+            <a:schemeClr val="lt1"/>
+          </a:fontRef>
+        </p:style>
+        <p:txBody>
+          <a:bodyPr rtlCol="0" anchor="ctr"/>
+          <a:lstStyle/>
+          <a:p>
+            <a:pPr algn="ctr"/>
+          </a:p>
+        </p:txBody>
+      </p:sp>
+      <p:sp>
+        <p:nvSpPr>
+          <p:cNvPr id="15" name="TextBox 14"/>
+          <p:cNvSpPr txBox="1"/>
+          <p:nvPr/>
+        </p:nvSpPr>
+        <p:spPr>
+          <a:xfrm>
+            <a:off x="900000" y="2808000"/>
+            <a:ext cx="4680000" cy="468000"/>
+          </a:xfrm>
+          <a:prstGeom prst="rect">
+            <a:avLst/>
+          </a:prstGeom>
+          <a:noFill/>
+        </p:spPr>
+        <p:txBody>
+          <a:bodyPr wrap="square" anchor="ctr" lIns="36000" rIns="36000" tIns="0" bIns="0">
+            <a:spAutoFit/>
+          </a:bodyPr>
+          <a:lstStyle/>
+          <a:p>
+            <a:pPr algn="l">
+              <a:spcAft>
+                <a:spcPts val="0"/>
+              </a:spcAft>
+            </a:pPr>
+            <a:r>
+              <a:rPr sz="1600" b="0">
+                <a:solidFill>
+                  <a:srgbClr val="1A1A1A"/>
+                </a:solidFill>
+                <a:latin typeface="Pretendard"/>
+              </a:rPr>
+              <a:t>③ 옛 설계를 새 데이터에 재현</a:t>
+            </a:r>
+          </a:p>
+        </p:txBody>
+      </p:sp>
+      <p:sp>
+        <p:nvSpPr>
+          <p:cNvPr id="16" name="TextBox 15"/>
+          <p:cNvSpPr txBox="1"/>
+          <p:nvPr/>
+        </p:nvSpPr>
+        <p:spPr>
+          <a:xfrm>
+            <a:off x="5688000" y="2808000"/>
+            <a:ext cx="2952000" cy="468000"/>
+          </a:xfrm>
+          <a:prstGeom prst="rect">
+            <a:avLst/>
+          </a:prstGeom>
+          <a:noFill/>
+        </p:spPr>
+        <p:txBody>
+          <a:bodyPr wrap="square" anchor="ctr" lIns="36000" rIns="36000" tIns="0" bIns="0">
+            <a:spAutoFit/>
+          </a:bodyPr>
+          <a:lstStyle/>
+          <a:p>
+            <a:pPr algn="ctr">
+              <a:spcAft>
+                <a:spcPts val="0"/>
+              </a:spcAft>
+            </a:pPr>
+            <a:r>
+              <a:rPr sz="1800" b="1">
+                <a:solidFill>
+                  <a:srgbClr val="D55E00"/>
+                </a:solidFill>
+                <a:latin typeface="Pretendard"/>
+              </a:rPr>
+              <a:t>중앙값 -0.148</a:t>
+            </a:r>
+          </a:p>
+        </p:txBody>
+      </p:sp>
+      <p:sp>
+        <p:nvSpPr>
+          <p:cNvPr id="17" name="TextBox 16"/>
+          <p:cNvSpPr txBox="1"/>
+          <p:nvPr/>
+        </p:nvSpPr>
+        <p:spPr>
+          <a:xfrm>
+            <a:off x="8784000" y="2808000"/>
+            <a:ext cx="2664000" cy="468000"/>
+          </a:xfrm>
+          <a:prstGeom prst="rect">
+            <a:avLst/>
+          </a:prstGeom>
+          <a:noFill/>
+        </p:spPr>
+        <p:txBody>
+          <a:bodyPr wrap="square" anchor="ctr" lIns="36000" rIns="36000" tIns="0" bIns="0">
+            <a:spAutoFit/>
+          </a:bodyPr>
+          <a:lstStyle/>
+          <a:p>
+            <a:pPr algn="r">
+              <a:spcAft>
+                <a:spcPts val="0"/>
+              </a:spcAft>
+            </a:pPr>
+            <a:r>
+              <a:rPr sz="1500" b="0">
+                <a:solidFill>
+                  <a:srgbClr val="5A636B"/>
+                </a:solidFill>
+                <a:latin typeface="Pretendard"/>
+              </a:rPr>
+              <a:t>−0.4 미만 4.7%</a:t>
+            </a:r>
+          </a:p>
+        </p:txBody>
+      </p:sp>
+      <p:sp>
+        <p:nvSpPr>
+          <p:cNvPr id="18" name="Rectangle 17"/>
+          <p:cNvSpPr/>
+          <p:nvPr/>
+        </p:nvSpPr>
+        <p:spPr>
+          <a:xfrm>
+            <a:off x="720000" y="3420000"/>
+            <a:ext cx="10753200" cy="612000"/>
+          </a:xfrm>
+          <a:prstGeom prst="rect">
+            <a:avLst/>
+          </a:prstGeom>
+          <a:solidFill>
+            <a:srgbClr val="FFFFFF"/>
+          </a:solidFill>
+          <a:ln>
+            <a:noFill/>
+          </a:ln>
+          <a:effectLst/>
+        </p:spPr>
+        <p:style>
+          <a:lnRef idx="1">
+            <a:schemeClr val="accent1"/>
+          </a:lnRef>
+          <a:fillRef idx="3">
+            <a:schemeClr val="accent1"/>
+          </a:fillRef>
+          <a:effectRef idx="2">
+            <a:schemeClr val="accent1"/>
+          </a:effectRef>
+          <a:fontRef idx="minor">
+            <a:schemeClr val="lt1"/>
+          </a:fontRef>
+        </p:style>
+        <p:txBody>
+          <a:bodyPr rtlCol="0" anchor="ctr"/>
+          <a:lstStyle/>
+          <a:p>
+            <a:pPr algn="ctr"/>
+          </a:p>
+        </p:txBody>
+      </p:sp>
+      <p:sp>
+        <p:nvSpPr>
+          <p:cNvPr id="19" name="TextBox 18"/>
+          <p:cNvSpPr txBox="1"/>
+          <p:nvPr/>
+        </p:nvSpPr>
+        <p:spPr>
+          <a:xfrm>
+            <a:off x="900000" y="3492000"/>
+            <a:ext cx="4680000" cy="468000"/>
+          </a:xfrm>
+          <a:prstGeom prst="rect">
+            <a:avLst/>
+          </a:prstGeom>
+          <a:noFill/>
+        </p:spPr>
+        <p:txBody>
+          <a:bodyPr wrap="square" anchor="ctr" lIns="36000" rIns="36000" tIns="0" bIns="0">
+            <a:spAutoFit/>
+          </a:bodyPr>
+          <a:lstStyle/>
+          <a:p>
+            <a:pPr algn="l">
+              <a:spcAft>
+                <a:spcPts val="0"/>
+              </a:spcAft>
+            </a:pPr>
+            <a:r>
+              <a:rPr sz="1600" b="0">
+                <a:solidFill>
+                  <a:srgbClr val="1A1A1A"/>
+                </a:solidFill>
+                <a:latin typeface="Pretendard"/>
+              </a:rPr>
+              <a:t>④ 옛 30건을 새 프로토콜로 재도킹</a:t>
+            </a:r>
+          </a:p>
+        </p:txBody>
+      </p:sp>
+      <p:sp>
+        <p:nvSpPr>
+          <p:cNvPr id="20" name="TextBox 19"/>
+          <p:cNvSpPr txBox="1"/>
+          <p:nvPr/>
+        </p:nvSpPr>
+        <p:spPr>
+          <a:xfrm>
+            <a:off x="5688000" y="3492000"/>
+            <a:ext cx="2952000" cy="468000"/>
+          </a:xfrm>
+          <a:prstGeom prst="rect">
+            <a:avLst/>
+          </a:prstGeom>
+          <a:noFill/>
+        </p:spPr>
+        <p:txBody>
+          <a:bodyPr wrap="square" anchor="ctr" lIns="36000" rIns="36000" tIns="0" bIns="0">
+            <a:spAutoFit/>
+          </a:bodyPr>
+          <a:lstStyle/>
+          <a:p>
+            <a:pPr algn="ctr">
+              <a:spcAft>
+                <a:spcPts val="0"/>
+              </a:spcAft>
+            </a:pPr>
+            <a:r>
+              <a:rPr sz="1800" b="1">
+                <a:solidFill>
+                  <a:srgbClr val="D55E00"/>
+                </a:solidFill>
+                <a:latin typeface="Pretendard"/>
+              </a:rPr>
+              <a:t>-0.538 → -0.527</a:t>
+            </a:r>
+          </a:p>
+        </p:txBody>
+      </p:sp>
+      <p:sp>
+        <p:nvSpPr>
+          <p:cNvPr id="21" name="TextBox 20"/>
+          <p:cNvSpPr txBox="1"/>
+          <p:nvPr/>
+        </p:nvSpPr>
+        <p:spPr>
+          <a:xfrm>
+            <a:off x="8784000" y="3492000"/>
+            <a:ext cx="2664000" cy="468000"/>
+          </a:xfrm>
+          <a:prstGeom prst="rect">
+            <a:avLst/>
+          </a:prstGeom>
+          <a:noFill/>
+        </p:spPr>
+        <p:txBody>
+          <a:bodyPr wrap="square" anchor="ctr" lIns="36000" rIns="36000" tIns="0" bIns="0">
+            <a:spAutoFit/>
+          </a:bodyPr>
+          <a:lstStyle/>
+          <a:p>
+            <a:pPr algn="r">
+              <a:spcAft>
+                <a:spcPts val="0"/>
+              </a:spcAft>
+            </a:pPr>
+            <a:r>
+              <a:rPr sz="1500" b="0">
+                <a:solidFill>
+                  <a:srgbClr val="5A636B"/>
+                </a:solidFill>
+                <a:latin typeface="Pretendard"/>
+              </a:rPr>
+              <a:t>점수 상관 +0.997</a:t>
+            </a:r>
+          </a:p>
+        </p:txBody>
+      </p:sp>
+      <p:sp>
+        <p:nvSpPr>
+          <p:cNvPr id="22" name="Rounded Rectangle 21"/>
+          <p:cNvSpPr/>
+          <p:nvPr/>
+        </p:nvSpPr>
+        <p:spPr>
+          <a:xfrm>
+            <a:off x="720000" y="4248000"/>
+            <a:ext cx="10753200" cy="1440000"/>
+          </a:xfrm>
+          <a:prstGeom prst="roundRect">
+            <a:avLst/>
+          </a:prstGeom>
+          <a:solidFill>
+            <a:srgbClr val="F3F5F7"/>
+          </a:solidFill>
+          <a:ln w="20320">
+            <a:solidFill>
+              <a:srgbClr val="0B2A4A"/>
+            </a:solidFill>
+          </a:ln>
+          <a:effectLst/>
+        </p:spPr>
+        <p:style>
+          <a:lnRef idx="1">
+            <a:schemeClr val="accent1"/>
+          </a:lnRef>
+          <a:fillRef idx="3">
+            <a:schemeClr val="accent1"/>
+          </a:fillRef>
+          <a:effectRef idx="2">
+            <a:schemeClr val="accent1"/>
+          </a:effectRef>
+          <a:fontRef idx="minor">
+            <a:schemeClr val="lt1"/>
+          </a:fontRef>
+        </p:style>
+        <p:txBody>
+          <a:bodyPr rtlCol="0" anchor="ctr"/>
+          <a:lstStyle/>
+          <a:p>
+            <a:pPr algn="ctr"/>
+          </a:p>
+        </p:txBody>
+      </p:sp>
+      <p:sp>
+        <p:nvSpPr>
+          <p:cNvPr id="23" name="TextBox 22"/>
+          <p:cNvSpPr txBox="1"/>
+          <p:nvPr/>
+        </p:nvSpPr>
+        <p:spPr>
+          <a:xfrm>
+            <a:off x="936000" y="4392000"/>
+            <a:ext cx="10321200" cy="1224000"/>
           </a:xfrm>
           <a:prstGeom prst="rect">
             <a:avLst/>
@@ -5253,331 +6120,19 @@
           </a:bodyPr>
           <a:lstStyle/>
           <a:p>
-            <a:pPr algn="ctr">
-              <a:spcAft>
-                <a:spcPts val="0"/>
-              </a:spcAft>
-            </a:pPr>
-            <a:r>
-              <a:rPr sz="4200" b="1">
-                <a:solidFill>
-                  <a:srgbClr val="D55E00"/>
-                </a:solidFill>
-                <a:latin typeface="Pretendard"/>
-              </a:rPr>
-              <a:t>4.50 Å</a:t>
-            </a:r>
-          </a:p>
-        </p:txBody>
-      </p:sp>
-      <p:sp>
-        <p:nvSpPr>
-          <p:cNvPr id="7" name="TextBox 6"/>
-          <p:cNvSpPr txBox="1"/>
-          <p:nvPr/>
-        </p:nvSpPr>
-        <p:spPr>
-          <a:xfrm>
-            <a:off x="432000" y="2736000"/>
-            <a:ext cx="2832300" cy="360000"/>
-          </a:xfrm>
-          <a:prstGeom prst="rect">
-            <a:avLst/>
-          </a:prstGeom>
-          <a:noFill/>
-        </p:spPr>
-        <p:txBody>
-          <a:bodyPr wrap="square" anchor="t" lIns="36000" rIns="36000" tIns="0" bIns="0">
-            <a:spAutoFit/>
-          </a:bodyPr>
-          <a:lstStyle/>
-          <a:p>
-            <a:pPr algn="ctr">
-              <a:spcAft>
-                <a:spcPts val="0"/>
-              </a:spcAft>
-            </a:pPr>
-            <a:r>
-              <a:rPr sz="1300" b="0">
-                <a:solidFill>
-                  <a:srgbClr val="5A636B"/>
-                </a:solidFill>
-                <a:latin typeface="Pretendard"/>
-              </a:rPr>
-              <a:t>1위 자세 MCS-RMSD 중앙값</a:t>
-            </a:r>
-          </a:p>
-        </p:txBody>
-      </p:sp>
-      <p:sp>
-        <p:nvSpPr>
-          <p:cNvPr id="8" name="TextBox 7"/>
-          <p:cNvSpPr txBox="1"/>
-          <p:nvPr/>
-        </p:nvSpPr>
-        <p:spPr>
-          <a:xfrm>
-            <a:off x="3264300" y="2016000"/>
-            <a:ext cx="2832300" cy="792000"/>
-          </a:xfrm>
-          <a:prstGeom prst="rect">
-            <a:avLst/>
-          </a:prstGeom>
-          <a:noFill/>
-        </p:spPr>
-        <p:txBody>
-          <a:bodyPr wrap="square" anchor="t" lIns="36000" rIns="36000" tIns="0" bIns="0">
-            <a:spAutoFit/>
-          </a:bodyPr>
-          <a:lstStyle/>
-          <a:p>
-            <a:pPr algn="ctr">
-              <a:spcAft>
-                <a:spcPts val="0"/>
-              </a:spcAft>
-            </a:pPr>
-            <a:r>
-              <a:rPr sz="4200" b="1">
-                <a:solidFill>
-                  <a:srgbClr val="D55E00"/>
-                </a:solidFill>
-                <a:latin typeface="Pretendard"/>
-              </a:rPr>
-              <a:t>19.0%</a:t>
-            </a:r>
-          </a:p>
-        </p:txBody>
-      </p:sp>
-      <p:sp>
-        <p:nvSpPr>
-          <p:cNvPr id="9" name="TextBox 8"/>
-          <p:cNvSpPr txBox="1"/>
-          <p:nvPr/>
-        </p:nvSpPr>
-        <p:spPr>
-          <a:xfrm>
-            <a:off x="3264300" y="2736000"/>
-            <a:ext cx="2832300" cy="360000"/>
-          </a:xfrm>
-          <a:prstGeom prst="rect">
-            <a:avLst/>
-          </a:prstGeom>
-          <a:noFill/>
-        </p:spPr>
-        <p:txBody>
-          <a:bodyPr wrap="square" anchor="t" lIns="36000" rIns="36000" tIns="0" bIns="0">
-            <a:spAutoFit/>
-          </a:bodyPr>
-          <a:lstStyle/>
-          <a:p>
-            <a:pPr algn="ctr">
-              <a:spcAft>
-                <a:spcPts val="0"/>
-              </a:spcAft>
-            </a:pPr>
-            <a:r>
-              <a:rPr sz="1300" b="0">
-                <a:solidFill>
-                  <a:srgbClr val="5A636B"/>
-                </a:solidFill>
-                <a:latin typeface="Pretendard"/>
-              </a:rPr>
-              <a:t>2 Å 기준 통과 (전체)</a:t>
-            </a:r>
-          </a:p>
-        </p:txBody>
-      </p:sp>
-      <p:sp>
-        <p:nvSpPr>
-          <p:cNvPr id="10" name="TextBox 9"/>
-          <p:cNvSpPr txBox="1"/>
-          <p:nvPr/>
-        </p:nvSpPr>
-        <p:spPr>
-          <a:xfrm>
-            <a:off x="6096600" y="2016000"/>
-            <a:ext cx="2832300" cy="792000"/>
-          </a:xfrm>
-          <a:prstGeom prst="rect">
-            <a:avLst/>
-          </a:prstGeom>
-          <a:noFill/>
-        </p:spPr>
-        <p:txBody>
-          <a:bodyPr wrap="square" anchor="t" lIns="36000" rIns="36000" tIns="0" bIns="0">
-            <a:spAutoFit/>
-          </a:bodyPr>
-          <a:lstStyle/>
-          <a:p>
-            <a:pPr algn="ctr">
-              <a:spcAft>
-                <a:spcPts val="0"/>
-              </a:spcAft>
-            </a:pPr>
-            <a:r>
-              <a:rPr sz="4200" b="1">
-                <a:solidFill>
-                  <a:srgbClr val="D55E00"/>
-                </a:solidFill>
-                <a:latin typeface="Pretendard"/>
-              </a:rPr>
-              <a:t>1.8%</a:t>
-            </a:r>
-          </a:p>
-        </p:txBody>
-      </p:sp>
-      <p:sp>
-        <p:nvSpPr>
-          <p:cNvPr id="11" name="TextBox 10"/>
-          <p:cNvSpPr txBox="1"/>
-          <p:nvPr/>
-        </p:nvSpPr>
-        <p:spPr>
-          <a:xfrm>
-            <a:off x="6096600" y="2736000"/>
-            <a:ext cx="2832300" cy="360000"/>
-          </a:xfrm>
-          <a:prstGeom prst="rect">
-            <a:avLst/>
-          </a:prstGeom>
-          <a:noFill/>
-        </p:spPr>
-        <p:txBody>
-          <a:bodyPr wrap="square" anchor="t" lIns="36000" rIns="36000" tIns="0" bIns="0">
-            <a:spAutoFit/>
-          </a:bodyPr>
-          <a:lstStyle/>
-          <a:p>
-            <a:pPr algn="ctr">
-              <a:spcAft>
-                <a:spcPts val="0"/>
-              </a:spcAft>
-            </a:pPr>
-            <a:r>
-              <a:rPr sz="1300" b="0">
-                <a:solidFill>
-                  <a:srgbClr val="5A636B"/>
-                </a:solidFill>
-                <a:latin typeface="Pretendard"/>
-              </a:rPr>
-              <a:t>far 대역 통과율</a:t>
-            </a:r>
-          </a:p>
-        </p:txBody>
-      </p:sp>
-      <p:sp>
-        <p:nvSpPr>
-          <p:cNvPr id="12" name="TextBox 11"/>
-          <p:cNvSpPr txBox="1"/>
-          <p:nvPr/>
-        </p:nvSpPr>
-        <p:spPr>
-          <a:xfrm>
-            <a:off x="8928900" y="2016000"/>
-            <a:ext cx="2832300" cy="792000"/>
-          </a:xfrm>
-          <a:prstGeom prst="rect">
-            <a:avLst/>
-          </a:prstGeom>
-          <a:noFill/>
-        </p:spPr>
-        <p:txBody>
-          <a:bodyPr wrap="square" anchor="t" lIns="36000" rIns="36000" tIns="0" bIns="0">
-            <a:spAutoFit/>
-          </a:bodyPr>
-          <a:lstStyle/>
-          <a:p>
-            <a:pPr algn="ctr">
-              <a:spcAft>
-                <a:spcPts val="0"/>
-              </a:spcAft>
-            </a:pPr>
-            <a:r>
-              <a:rPr sz="4200" b="1">
-                <a:solidFill>
-                  <a:srgbClr val="D55E00"/>
-                </a:solidFill>
-                <a:latin typeface="Pretendard"/>
-              </a:rPr>
-              <a:t>25.0%</a:t>
-            </a:r>
-          </a:p>
-        </p:txBody>
-      </p:sp>
-      <p:sp>
-        <p:nvSpPr>
-          <p:cNvPr id="13" name="TextBox 12"/>
-          <p:cNvSpPr txBox="1"/>
-          <p:nvPr/>
-        </p:nvSpPr>
-        <p:spPr>
-          <a:xfrm>
-            <a:off x="8928900" y="2736000"/>
-            <a:ext cx="2832300" cy="360000"/>
-          </a:xfrm>
-          <a:prstGeom prst="rect">
-            <a:avLst/>
-          </a:prstGeom>
-          <a:noFill/>
-        </p:spPr>
-        <p:txBody>
-          <a:bodyPr wrap="square" anchor="t" lIns="36000" rIns="36000" tIns="0" bIns="0">
-            <a:spAutoFit/>
-          </a:bodyPr>
-          <a:lstStyle/>
-          <a:p>
-            <a:pPr algn="ctr">
-              <a:spcAft>
-                <a:spcPts val="0"/>
-              </a:spcAft>
-            </a:pPr>
-            <a:r>
-              <a:rPr sz="1300" b="0">
-                <a:solidFill>
-                  <a:srgbClr val="5A636B"/>
-                </a:solidFill>
-                <a:latin typeface="Pretendard"/>
-              </a:rPr>
-              <a:t>near 대역 통과율</a:t>
-            </a:r>
-          </a:p>
-        </p:txBody>
-      </p:sp>
-      <p:sp>
-        <p:nvSpPr>
-          <p:cNvPr id="14" name="TextBox 13"/>
-          <p:cNvSpPr txBox="1"/>
-          <p:nvPr/>
-        </p:nvSpPr>
-        <p:spPr>
-          <a:xfrm>
-            <a:off x="864000" y="4032000"/>
-            <a:ext cx="10465200" cy="1440000"/>
-          </a:xfrm>
-          <a:prstGeom prst="rect">
-            <a:avLst/>
-          </a:prstGeom>
-          <a:noFill/>
-        </p:spPr>
-        <p:txBody>
-          <a:bodyPr wrap="square" anchor="t" lIns="36000" rIns="36000" tIns="0" bIns="0">
-            <a:spAutoFit/>
-          </a:bodyPr>
-          <a:lstStyle/>
-          <a:p>
             <a:pPr algn="l">
               <a:spcAft>
                 <a:spcPts val="400"/>
               </a:spcAft>
             </a:pPr>
             <a:r>
-              <a:rPr sz="1700" b="1">
+              <a:rPr sz="1800" b="1">
                 <a:solidFill>
                   <a:srgbClr val="0B2A4A"/>
                 </a:solidFill>
                 <a:latin typeface="Pretendard"/>
               </a:rPr>
-              <a:t>이 지표가 무엇을 재는지 분명히 해 둔다.</a:t>
+              <a:t>이 판본의 초안은 “골격 교란 때문” 이라고 적었다. 검정해 보니 1.2% 였다.</a:t>
             </a:r>
           </a:p>
           <a:p>
@@ -5593,7 +6148,7 @@
                 </a:solidFill>
                 <a:latin typeface="Pretendard"/>
               </a:rPr>
-              <a:t>실데나필 외의 화합물에는 실험 결정 자세가 없다. 이 값은 “자세가 맞는가”가 아니라 “공유 부분구조가 공결정 리간드 위에 겹치는가”를 잰다. 골격이 다른 far 대역에서는 해석이 특히 약하므로 대역별로 읽어야 한다.</a:t>
+              <a:t>네 검정이 모두 후보를 배제한다. 원인은 그 화합물 집합 자체이며, 어떤 성질 때문인지는 이 데이터로 더 좁히지 못했다 — 그렇게 적었다.</a:t>
             </a:r>
           </a:p>
         </p:txBody>
@@ -5694,7 +6249,7 @@
                 </a:solidFill>
                 <a:latin typeface="Pretendard"/>
               </a:rPr>
-              <a:t>결론</a:t>
+              <a:t>정리</a:t>
             </a:r>
           </a:p>
         </p:txBody>
@@ -5733,7 +6288,7 @@
                 </a:solidFill>
                 <a:latin typeface="Pretendard"/>
               </a:rPr>
-              <a:t>정리 — 무엇을 말할 수 있고 무엇을 말할 수 없는가</a:t>
+              <a:t>무엇을 말할 수 있고, 무엇이 남았나</a:t>
             </a:r>
           </a:p>
         </p:txBody>
@@ -5779,23 +6334,25 @@
       </p:sp>
       <p:sp>
         <p:nvSpPr>
-          <p:cNvPr id="6" name="Rectangle 5"/>
+          <p:cNvPr id="6" name="Rounded Rectangle 5"/>
           <p:cNvSpPr/>
           <p:nvPr/>
         </p:nvSpPr>
         <p:spPr>
           <a:xfrm>
-            <a:off x="720000" y="1440000"/>
-            <a:ext cx="144000" cy="612000"/>
-          </a:xfrm>
-          <a:prstGeom prst="rect">
+            <a:off x="720000" y="1368000"/>
+            <a:ext cx="5268600" cy="2016000"/>
+          </a:xfrm>
+          <a:prstGeom prst="roundRect">
             <a:avLst/>
           </a:prstGeom>
           <a:solidFill>
-            <a:srgbClr val="D55E00"/>
+            <a:srgbClr val="F3F5F7"/>
           </a:solidFill>
-          <a:ln>
-            <a:noFill/>
+          <a:ln w="17780">
+            <a:solidFill>
+              <a:srgbClr val="009E73"/>
+            </a:solidFill>
           </a:ln>
           <a:effectLst/>
         </p:spPr>
@@ -5829,8 +6386,8 @@
         </p:nvSpPr>
         <p:spPr>
           <a:xfrm>
-            <a:off x="1044000" y="1440000"/>
-            <a:ext cx="10393200" cy="360000"/>
+            <a:off x="936000" y="1512000"/>
+            <a:ext cx="4836600" cy="1800000"/>
           </a:xfrm>
           <a:prstGeom prst="rect">
             <a:avLst/>
@@ -5845,46 +6402,39 @@
           <a:p>
             <a:pPr algn="l">
               <a:spcAft>
-                <a:spcPts val="0"/>
-              </a:spcAft>
-            </a:pPr>
-            <a:r>
-              <a:rPr sz="1900" b="1">
-                <a:solidFill>
-                  <a:srgbClr val="D55E00"/>
-                </a:solidFill>
-                <a:latin typeface="Pretendard"/>
-              </a:rPr>
-              <a:t>정량 예측은 실패했다</a:t>
-            </a:r>
-          </a:p>
-        </p:txBody>
-      </p:sp>
-      <p:sp>
-        <p:nvSpPr>
-          <p:cNvPr id="8" name="TextBox 7"/>
-          <p:cNvSpPr txBox="1"/>
-          <p:nvPr/>
-        </p:nvSpPr>
-        <p:spPr>
-          <a:xfrm>
-            <a:off x="1044000" y="1782000"/>
-            <a:ext cx="10393200" cy="288000"/>
-          </a:xfrm>
-          <a:prstGeom prst="rect">
-            <a:avLst/>
-          </a:prstGeom>
-          <a:noFill/>
-        </p:spPr>
-        <p:txBody>
-          <a:bodyPr wrap="square" anchor="t" lIns="36000" rIns="36000" tIns="0" bIns="0">
-            <a:spAutoFit/>
-          </a:bodyPr>
-          <a:lstStyle/>
+                <a:spcPts val="250"/>
+              </a:spcAft>
+            </a:pPr>
+            <a:r>
+              <a:rPr sz="1800" b="1">
+                <a:solidFill>
+                  <a:srgbClr val="009E73"/>
+                </a:solidFill>
+                <a:latin typeface="Pretendard"/>
+              </a:rPr>
+              <a:t>실험으로 제거한 것</a:t>
+            </a:r>
+          </a:p>
           <a:p>
             <a:pPr algn="l">
               <a:spcAft>
-                <a:spcPts val="0"/>
+                <a:spcPts val="250"/>
+              </a:spcAft>
+            </a:pPr>
+            <a:r>
+              <a:rPr sz="1500" b="1">
+                <a:solidFill>
+                  <a:srgbClr val="1A1A1A"/>
+                </a:solidFill>
+                <a:latin typeface="Pretendard"/>
+              </a:rPr>
+              <a:t>C2 자세순위 실패의 원인 2개</a:t>
+            </a:r>
+          </a:p>
+          <a:p>
+            <a:pPr algn="l">
+              <a:spcAft>
+                <a:spcPts val="250"/>
               </a:spcAft>
             </a:pPr>
             <a:r>
@@ -5894,30 +6444,64 @@
                 </a:solidFill>
                 <a:latin typeface="Pretendard"/>
               </a:rPr>
-              <a:t>Q² 세 모델 모두 0 근처, 기준 0.3 에 미달</a:t>
-            </a:r>
-          </a:p>
-        </p:txBody>
-      </p:sp>
-      <p:sp>
-        <p:nvSpPr>
-          <p:cNvPr id="9" name="Rectangle 8"/>
+              <a:t>   탐색 깊이 · 프로토네이션</a:t>
+            </a:r>
+          </a:p>
+          <a:p>
+            <a:pPr algn="l">
+              <a:spcAft>
+                <a:spcPts val="250"/>
+              </a:spcAft>
+            </a:pPr>
+            <a:r>
+              <a:rPr sz="1500" b="1">
+                <a:solidFill>
+                  <a:srgbClr val="1A1A1A"/>
+                </a:solidFill>
+                <a:latin typeface="Pretendard"/>
+              </a:rPr>
+              <a:t>n=30 비재현의 설명 2개</a:t>
+            </a:r>
+          </a:p>
+          <a:p>
+            <a:pPr algn="l">
+              <a:spcAft>
+                <a:spcPts val="250"/>
+              </a:spcAft>
+            </a:pPr>
+            <a:r>
+              <a:rPr sz="1400" b="0">
+                <a:solidFill>
+                  <a:srgbClr val="5A636B"/>
+                </a:solidFill>
+                <a:latin typeface="Pretendard"/>
+              </a:rPr>
+              <a:t>   골격 교란 · 프로토콜 차이</a:t>
+            </a:r>
+          </a:p>
+        </p:txBody>
+      </p:sp>
+      <p:sp>
+        <p:nvSpPr>
+          <p:cNvPr id="8" name="Rounded Rectangle 7"/>
           <p:cNvSpPr/>
           <p:nvPr/>
         </p:nvSpPr>
         <p:spPr>
           <a:xfrm>
-            <a:off x="720000" y="2196000"/>
-            <a:ext cx="144000" cy="612000"/>
-          </a:xfrm>
-          <a:prstGeom prst="rect">
+            <a:off x="6204600" y="1368000"/>
+            <a:ext cx="5268600" cy="2016000"/>
+          </a:xfrm>
+          <a:prstGeom prst="roundRect">
             <a:avLst/>
           </a:prstGeom>
           <a:solidFill>
-            <a:srgbClr val="D55E00"/>
+            <a:srgbClr val="F3F5F7"/>
           </a:solidFill>
-          <a:ln>
-            <a:noFill/>
+          <a:ln w="17780">
+            <a:solidFill>
+              <a:srgbClr val="D55E00"/>
+            </a:solidFill>
           </a:ln>
           <a:effectLst/>
         </p:spPr>
@@ -5945,14 +6529,117 @@
       </p:sp>
       <p:sp>
         <p:nvSpPr>
+          <p:cNvPr id="9" name="TextBox 8"/>
+          <p:cNvSpPr txBox="1"/>
+          <p:nvPr/>
+        </p:nvSpPr>
+        <p:spPr>
+          <a:xfrm>
+            <a:off x="6420600" y="1512000"/>
+            <a:ext cx="4836600" cy="1800000"/>
+          </a:xfrm>
+          <a:prstGeom prst="rect">
+            <a:avLst/>
+          </a:prstGeom>
+          <a:noFill/>
+        </p:spPr>
+        <p:txBody>
+          <a:bodyPr wrap="square" anchor="t" lIns="36000" rIns="36000" tIns="0" bIns="0">
+            <a:spAutoFit/>
+          </a:bodyPr>
+          <a:lstStyle/>
+          <a:p>
+            <a:pPr algn="l">
+              <a:spcAft>
+                <a:spcPts val="250"/>
+              </a:spcAft>
+            </a:pPr>
+            <a:r>
+              <a:rPr sz="1800" b="1">
+                <a:solidFill>
+                  <a:srgbClr val="D55E00"/>
+                </a:solidFill>
+                <a:latin typeface="Pretendard"/>
+              </a:rPr>
+              <a:t>아직 배제하지 못한 것</a:t>
+            </a:r>
+          </a:p>
+          <a:p>
+            <a:pPr algn="l">
+              <a:spcAft>
+                <a:spcPts val="250"/>
+              </a:spcAft>
+            </a:pPr>
+            <a:r>
+              <a:rPr sz="1500" b="0">
+                <a:solidFill>
+                  <a:srgbClr val="1A1A1A"/>
+                </a:solidFill>
+                <a:latin typeface="Pretendard"/>
+              </a:rPr>
+              <a:t>물 전량 제거 · 강체 수용체</a:t>
+            </a:r>
+          </a:p>
+          <a:p>
+            <a:pPr algn="l">
+              <a:spcAft>
+                <a:spcPts val="250"/>
+              </a:spcAft>
+            </a:pPr>
+            <a:r>
+              <a:rPr sz="1500" b="0">
+                <a:solidFill>
+                  <a:srgbClr val="1A1A1A"/>
+                </a:solidFill>
+                <a:latin typeface="Pretendard"/>
+              </a:rPr>
+              <a:t>단일 배좌 · holo 유도적합 편향</a:t>
+            </a:r>
+          </a:p>
+          <a:p>
+            <a:pPr algn="l">
+              <a:spcAft>
+                <a:spcPts val="250"/>
+              </a:spcAft>
+            </a:pPr>
+            <a:r>
+              <a:rPr sz="1500" b="1">
+                <a:solidFill>
+                  <a:srgbClr val="1A1A1A"/>
+                </a:solidFill>
+                <a:latin typeface="Pretendard"/>
+              </a:rPr>
+              <a:t>그리고 채점 함수 자체</a:t>
+            </a:r>
+          </a:p>
+          <a:p>
+            <a:pPr algn="l">
+              <a:spcAft>
+                <a:spcPts val="250"/>
+              </a:spcAft>
+            </a:pPr>
+            <a:r>
+              <a:rPr sz="1400" b="0">
+                <a:solidFill>
+                  <a:srgbClr val="5A636B"/>
+                </a:solidFill>
+                <a:latin typeface="Pretendard"/>
+              </a:rPr>
+              <a:t>   이들은 검정하지 않았다</a:t>
+            </a:r>
+          </a:p>
+        </p:txBody>
+      </p:sp>
+      <p:sp>
+        <p:nvSpPr>
           <p:cNvPr id="10" name="TextBox 9"/>
           <p:cNvSpPr txBox="1"/>
           <p:nvPr/>
         </p:nvSpPr>
         <p:spPr>
           <a:xfrm>
-            <a:off x="1044000" y="2196000"/>
-            <a:ext cx="10393200" cy="360000"/>
+            <a:off x="720000" y="3528000"/>
+            <a:ext cx="10753200" cy="360000"/>
           </a:xfrm>
           <a:prstGeom prst="rect">
             <a:avLst/>
@@ -5965,81 +6652,44 @@
           </a:bodyPr>
           <a:lstStyle/>
           <a:p>
-            <a:pPr algn="l">
+            <a:pPr algn="ctr">
               <a:spcAft>
                 <a:spcPts val="0"/>
               </a:spcAft>
             </a:pPr>
             <a:r>
-              <a:rPr sz="1900" b="1">
-                <a:solidFill>
-                  <a:srgbClr val="D55E00"/>
-                </a:solidFill>
-                <a:latin typeface="Pretendard"/>
-              </a:rPr>
-              <a:t>선별도 전체적으로는 작동하지 않았다</a:t>
-            </a:r>
-          </a:p>
-        </p:txBody>
-      </p:sp>
-      <p:sp>
-        <p:nvSpPr>
-          <p:cNvPr id="11" name="TextBox 10"/>
-          <p:cNvSpPr txBox="1"/>
-          <p:nvPr/>
-        </p:nvSpPr>
-        <p:spPr>
-          <a:xfrm>
-            <a:off x="1044000" y="2538000"/>
-            <a:ext cx="10393200" cy="288000"/>
-          </a:xfrm>
-          <a:prstGeom prst="rect">
-            <a:avLst/>
-          </a:prstGeom>
-          <a:noFill/>
-        </p:spPr>
-        <p:txBody>
-          <a:bodyPr wrap="square" anchor="t" lIns="36000" rIns="36000" tIns="0" bIns="0">
-            <a:spAutoFit/>
-          </a:bodyPr>
-          <a:lstStyle/>
-          <a:p>
-            <a:pPr algn="l">
-              <a:spcAft>
-                <a:spcPts val="0"/>
-              </a:spcAft>
-            </a:pPr>
-            <a:r>
-              <a:rPr sz="1400" b="0">
-                <a:solidFill>
-                  <a:srgbClr val="5A636B"/>
-                </a:solidFill>
-                <a:latin typeface="Pretendard"/>
-              </a:rPr>
-              <a:t>한 대역의 신호는 칸 하나에 의존</a:t>
-            </a:r>
-          </a:p>
-        </p:txBody>
-      </p:sp>
-      <p:sp>
-        <p:nvSpPr>
-          <p:cNvPr id="12" name="Rectangle 11"/>
+              <a:rPr sz="1500" b="1">
+                <a:solidFill>
+                  <a:srgbClr val="0B2A4A"/>
+                </a:solidFill>
+                <a:latin typeface="Pretendard"/>
+              </a:rPr>
+              <a:t>두 갈래는 서로 다른 현상이다 — 하나로 세지 않는다</a:t>
+            </a:r>
+          </a:p>
+        </p:txBody>
+      </p:sp>
+      <p:sp>
+        <p:nvSpPr>
+          <p:cNvPr id="11" name="Rounded Rectangle 10"/>
           <p:cNvSpPr/>
           <p:nvPr/>
         </p:nvSpPr>
         <p:spPr>
           <a:xfrm>
-            <a:off x="720000" y="2952000"/>
-            <a:ext cx="144000" cy="612000"/>
-          </a:xfrm>
-          <a:prstGeom prst="rect">
+            <a:off x="720000" y="4032000"/>
+            <a:ext cx="10753200" cy="1656000"/>
+          </a:xfrm>
+          <a:prstGeom prst="roundRect">
             <a:avLst/>
           </a:prstGeom>
           <a:solidFill>
-            <a:srgbClr val="009E73"/>
+            <a:srgbClr val="E8F4EF"/>
           </a:solidFill>
-          <a:ln>
-            <a:noFill/>
+          <a:ln w="22860">
+            <a:solidFill>
+              <a:srgbClr val="009E73"/>
+            </a:solidFill>
           </a:ln>
           <a:effectLst/>
         </p:spPr>
@@ -6067,14 +6717,14 @@
       </p:sp>
       <p:sp>
         <p:nvSpPr>
-          <p:cNvPr id="13" name="TextBox 12"/>
-          <p:cNvSpPr txBox="1"/>
-          <p:nvPr/>
-        </p:nvSpPr>
-        <p:spPr>
-          <a:xfrm>
-            <a:off x="1044000" y="2952000"/>
-            <a:ext cx="10393200" cy="360000"/>
+          <p:cNvPr id="12" name="TextBox 11"/>
+          <p:cNvSpPr txBox="1"/>
+          <p:nvPr/>
+        </p:nvSpPr>
+        <p:spPr>
+          <a:xfrm>
+            <a:off x="936000" y="4176000"/>
+            <a:ext cx="10321200" cy="1440000"/>
           </a:xfrm>
           <a:prstGeom prst="rect">
             <a:avLst/>
@@ -6089,7 +6739,7 @@
           <a:p>
             <a:pPr algn="l">
               <a:spcAft>
-                <a:spcPts val="0"/>
+                <a:spcPts val="300"/>
               </a:spcAft>
             </a:pPr>
             <a:r>
@@ -6099,269 +6749,55 @@
                 </a:solidFill>
                 <a:latin typeface="Pretendard"/>
               </a:rPr>
-              <a:t>네 후보를 실험으로 제거했다</a:t>
-            </a:r>
-          </a:p>
-        </p:txBody>
-      </p:sp>
-      <p:sp>
-        <p:nvSpPr>
-          <p:cNvPr id="14" name="TextBox 13"/>
-          <p:cNvSpPr txBox="1"/>
-          <p:nvPr/>
-        </p:nvSpPr>
-        <p:spPr>
-          <a:xfrm>
-            <a:off x="1044000" y="3294000"/>
-            <a:ext cx="10393200" cy="288000"/>
-          </a:xfrm>
-          <a:prstGeom prst="rect">
-            <a:avLst/>
-          </a:prstGeom>
-          <a:noFill/>
-        </p:spPr>
-        <p:txBody>
-          <a:bodyPr wrap="square" anchor="t" lIns="36000" rIns="36000" tIns="0" bIns="0">
-            <a:spAutoFit/>
-          </a:bodyPr>
-          <a:lstStyle/>
+              <a:t>가져가실 것 셋</a:t>
+            </a:r>
+          </a:p>
           <a:p>
             <a:pPr algn="l">
               <a:spcAft>
-                <a:spcPts val="0"/>
-              </a:spcAft>
-            </a:pPr>
-            <a:r>
-              <a:rPr sz="1400" b="0">
-                <a:solidFill>
-                  <a:srgbClr val="5A636B"/>
-                </a:solidFill>
-                <a:latin typeface="Pretendard"/>
-              </a:rPr>
-              <a:t>탐색 깊이 · 프로토네이션 · 프로토콜 · 골격 교란</a:t>
-            </a:r>
-          </a:p>
-        </p:txBody>
-      </p:sp>
-      <p:sp>
-        <p:nvSpPr>
-          <p:cNvPr id="15" name="Rectangle 14"/>
-          <p:cNvSpPr/>
-          <p:nvPr/>
-        </p:nvSpPr>
-        <p:spPr>
-          <a:xfrm>
-            <a:off x="720000" y="3708000"/>
-            <a:ext cx="144000" cy="612000"/>
-          </a:xfrm>
-          <a:prstGeom prst="rect">
-            <a:avLst/>
-          </a:prstGeom>
-          <a:solidFill>
-            <a:srgbClr val="5A636B"/>
-          </a:solidFill>
-          <a:ln>
-            <a:noFill/>
-          </a:ln>
-          <a:effectLst/>
-        </p:spPr>
-        <p:style>
-          <a:lnRef idx="1">
-            <a:schemeClr val="accent1"/>
-          </a:lnRef>
-          <a:fillRef idx="3">
-            <a:schemeClr val="accent1"/>
-          </a:fillRef>
-          <a:effectRef idx="2">
-            <a:schemeClr val="accent1"/>
-          </a:effectRef>
-          <a:fontRef idx="minor">
-            <a:schemeClr val="lt1"/>
-          </a:fontRef>
-        </p:style>
-        <p:txBody>
-          <a:bodyPr rtlCol="0" anchor="ctr"/>
-          <a:lstStyle/>
-          <a:p>
-            <a:pPr algn="ctr"/>
-          </a:p>
-        </p:txBody>
-      </p:sp>
-      <p:sp>
-        <p:nvSpPr>
-          <p:cNvPr id="16" name="TextBox 15"/>
-          <p:cNvSpPr txBox="1"/>
-          <p:nvPr/>
-        </p:nvSpPr>
-        <p:spPr>
-          <a:xfrm>
-            <a:off x="1044000" y="3708000"/>
-            <a:ext cx="10393200" cy="360000"/>
-          </a:xfrm>
-          <a:prstGeom prst="rect">
-            <a:avLst/>
-          </a:prstGeom>
-          <a:noFill/>
-        </p:spPr>
-        <p:txBody>
-          <a:bodyPr wrap="square" anchor="t" lIns="36000" rIns="36000" tIns="0" bIns="0">
-            <a:spAutoFit/>
-          </a:bodyPr>
-          <a:lstStyle/>
+                <a:spcPts val="300"/>
+              </a:spcAft>
+            </a:pPr>
+            <a:r>
+              <a:rPr sz="1600" b="0">
+                <a:solidFill>
+                  <a:srgbClr val="1A1A1A"/>
+                </a:solidFill>
+                <a:latin typeface="Pretendard"/>
+              </a:rPr>
+              <a:t>①  재도킹 대조를 C1/C2 로 쪼개고 깊이를 흔들어 병목을 특정하라</a:t>
+            </a:r>
+          </a:p>
           <a:p>
             <a:pPr algn="l">
               <a:spcAft>
-                <a:spcPts val="0"/>
-              </a:spcAft>
-            </a:pPr>
-            <a:r>
-              <a:rPr sz="1900" b="1">
-                <a:solidFill>
-                  <a:srgbClr val="0B2A4A"/>
-                </a:solidFill>
-                <a:latin typeface="Pretendard"/>
-              </a:rPr>
-              <a:t>남은 후보</a:t>
-            </a:r>
-          </a:p>
-        </p:txBody>
-      </p:sp>
-      <p:sp>
-        <p:nvSpPr>
-          <p:cNvPr id="17" name="TextBox 16"/>
-          <p:cNvSpPr txBox="1"/>
-          <p:nvPr/>
-        </p:nvSpPr>
-        <p:spPr>
-          <a:xfrm>
-            <a:off x="1044000" y="4050000"/>
-            <a:ext cx="10393200" cy="288000"/>
-          </a:xfrm>
-          <a:prstGeom prst="rect">
-            <a:avLst/>
-          </a:prstGeom>
-          <a:noFill/>
-        </p:spPr>
-        <p:txBody>
-          <a:bodyPr wrap="square" anchor="t" lIns="36000" rIns="36000" tIns="0" bIns="0">
-            <a:spAutoFit/>
-          </a:bodyPr>
-          <a:lstStyle/>
+                <a:spcPts val="300"/>
+              </a:spcAft>
+            </a:pPr>
+            <a:r>
+              <a:rPr sz="1600" b="0">
+                <a:solidFill>
+                  <a:srgbClr val="1A1A1A"/>
+                </a:solidFill>
+                <a:latin typeface="Pretendard"/>
+              </a:rPr>
+              <a:t>②  점수를 매긴 자세가 어디에 놓였는지 먼저 보고하라 — 이 연구에서는 19% 였다</a:t>
+            </a:r>
+          </a:p>
           <a:p>
             <a:pPr algn="l">
               <a:spcAft>
-                <a:spcPts val="0"/>
-              </a:spcAft>
-            </a:pPr>
-            <a:r>
-              <a:rPr sz="1400" b="0">
-                <a:solidFill>
-                  <a:srgbClr val="5A636B"/>
-                </a:solidFill>
-                <a:latin typeface="Pretendard"/>
-              </a:rPr>
-              <a:t>물 제거 · 강체 수용체 · 단일 배좌 · holo 편향 · 채점 함수</a:t>
-            </a:r>
-          </a:p>
-        </p:txBody>
-      </p:sp>
-      <p:sp>
-        <p:nvSpPr>
-          <p:cNvPr id="18" name="Rounded Rectangle 17"/>
-          <p:cNvSpPr/>
-          <p:nvPr/>
-        </p:nvSpPr>
-        <p:spPr>
-          <a:xfrm>
-            <a:off x="720000" y="4608000"/>
-            <a:ext cx="10753200" cy="1152000"/>
-          </a:xfrm>
-          <a:prstGeom prst="roundRect">
-            <a:avLst/>
-          </a:prstGeom>
-          <a:solidFill>
-            <a:srgbClr val="F3F5F7"/>
-          </a:solidFill>
-          <a:ln w="20320">
-            <a:solidFill>
-              <a:srgbClr val="0B2A4A"/>
-            </a:solidFill>
-          </a:ln>
-          <a:effectLst/>
-        </p:spPr>
-        <p:style>
-          <a:lnRef idx="1">
-            <a:schemeClr val="accent1"/>
-          </a:lnRef>
-          <a:fillRef idx="3">
-            <a:schemeClr val="accent1"/>
-          </a:fillRef>
-          <a:effectRef idx="2">
-            <a:schemeClr val="accent1"/>
-          </a:effectRef>
-          <a:fontRef idx="minor">
-            <a:schemeClr val="lt1"/>
-          </a:fontRef>
-        </p:style>
-        <p:txBody>
-          <a:bodyPr rtlCol="0" anchor="ctr"/>
-          <a:lstStyle/>
-          <a:p>
-            <a:pPr algn="ctr"/>
-          </a:p>
-        </p:txBody>
-      </p:sp>
-      <p:sp>
-        <p:nvSpPr>
-          <p:cNvPr id="19" name="TextBox 18"/>
-          <p:cNvSpPr txBox="1"/>
-          <p:nvPr/>
-        </p:nvSpPr>
-        <p:spPr>
-          <a:xfrm>
-            <a:off x="936000" y="4788000"/>
-            <a:ext cx="10321200" cy="864000"/>
-          </a:xfrm>
-          <a:prstGeom prst="rect">
-            <a:avLst/>
-          </a:prstGeom>
-          <a:noFill/>
-        </p:spPr>
-        <p:txBody>
-          <a:bodyPr wrap="square" anchor="t" lIns="36000" rIns="36000" tIns="0" bIns="0">
-            <a:spAutoFit/>
-          </a:bodyPr>
-          <a:lstStyle/>
-          <a:p>
-            <a:pPr algn="l">
-              <a:spcAft>
                 <a:spcPts val="300"/>
               </a:spcAft>
             </a:pPr>
             <a:r>
-              <a:rPr sz="1700" b="1">
-                <a:solidFill>
-                  <a:srgbClr val="0B2A4A"/>
-                </a:solidFill>
-                <a:latin typeface="Pretendard"/>
-              </a:rPr>
-              <a:t>실무 지침</a:t>
-            </a:r>
-          </a:p>
-          <a:p>
-            <a:pPr algn="l">
-              <a:spcAft>
-                <a:spcPts val="300"/>
-              </a:spcAft>
-            </a:pPr>
-            <a:r>
-              <a:rPr sz="1500" b="0">
+              <a:rPr sz="1600" b="0">
                 <a:solidFill>
                   <a:srgbClr val="1A1A1A"/>
                 </a:solidFill>
                 <a:latin typeface="Pretendard"/>
               </a:rPr>
-              <a:t>① 재도킹 대조를 C1/C2 로 쪼개고 깊이를 흔들어 병목을 특정하라   ② 점수를 매긴 자세가 어디에 놓였는지 먼저 보고하라   ③ 벤치마크의 골격 분포를 통제하라</a:t>
+              <a:t>③  벤치마크의 골격 분포를 통제하라 (다만 여기서 그 통제가 바꾼 몫은 거의 0 이었다)</a:t>
             </a:r>
           </a:p>
         </p:txBody>
@@ -6436,7 +6872,7 @@
         </p:nvSpPr>
         <p:spPr>
           <a:xfrm>
-            <a:off x="864000" y="2016000"/>
+            <a:off x="864000" y="1656000"/>
             <a:ext cx="10465200" cy="864000"/>
           </a:xfrm>
           <a:prstGeom prst="rect">
@@ -6476,7 +6912,46 @@
         </p:nvSpPr>
         <p:spPr>
           <a:xfrm>
-            <a:off x="864000" y="3600000"/>
+            <a:off x="864000" y="3312000"/>
+            <a:ext cx="10465200" cy="720000"/>
+          </a:xfrm>
+          <a:prstGeom prst="rect">
+            <a:avLst/>
+          </a:prstGeom>
+          <a:noFill/>
+        </p:spPr>
+        <p:txBody>
+          <a:bodyPr wrap="square" anchor="t" lIns="36000" rIns="36000" tIns="0" bIns="0">
+            <a:spAutoFit/>
+          </a:bodyPr>
+          <a:lstStyle/>
+          <a:p>
+            <a:pPr algn="ctr">
+              <a:spcAft>
+                <a:spcPts val="0"/>
+              </a:spcAft>
+            </a:pPr>
+            <a:r>
+              <a:rPr sz="1600" b="0">
+                <a:solidFill>
+                  <a:srgbClr val="9FC5E0"/>
+                </a:solidFill>
+                <a:latin typeface="Pretendard"/>
+              </a:rPr>
+              <a:t>방금 보신 11번 슬라이드가 그 세 번째입니다 — 이 판본의 초안도 틀렸고, 그걸 잡은 것은 자동 검증이 아니라 외부 비평이었습니다.</a:t>
+            </a:r>
+          </a:p>
+        </p:txBody>
+      </p:sp>
+      <p:sp>
+        <p:nvSpPr>
+          <p:cNvPr id="5" name="TextBox 4"/>
+          <p:cNvSpPr txBox="1"/>
+          <p:nvPr/>
+        </p:nvSpPr>
+        <p:spPr>
+          <a:xfrm>
+            <a:off x="864000" y="4248000"/>
             <a:ext cx="10465200" cy="504000"/>
           </a:xfrm>
           <a:prstGeom prst="rect">
@@ -6496,38 +6971,54 @@
               </a:spcAft>
             </a:pPr>
             <a:r>
-              <a:rPr sz="1600" b="0">
+              <a:rPr sz="1700" b="1">
+                <a:solidFill>
+                  <a:srgbClr val="FFFFFF"/>
+                </a:solidFill>
+                <a:latin typeface="Pretendard"/>
+              </a:rPr>
+              <a:t>게이트는 수치가 산출되었는지를 검사할 뿐, 결론이 데이터에서 따라 나오는지는 검사하지 못한다.</a:t>
+            </a:r>
+          </a:p>
+        </p:txBody>
+      </p:sp>
+      <p:sp>
+        <p:nvSpPr>
+          <p:cNvPr id="6" name="TextBox 5"/>
+          <p:cNvSpPr txBox="1"/>
+          <p:nvPr/>
+        </p:nvSpPr>
+        <p:spPr>
+          <a:xfrm>
+            <a:off x="864000" y="5256000"/>
+            <a:ext cx="10465200" cy="576000"/>
+          </a:xfrm>
+          <a:prstGeom prst="rect">
+            <a:avLst/>
+          </a:prstGeom>
+          <a:noFill/>
+        </p:spPr>
+        <p:txBody>
+          <a:bodyPr wrap="square" anchor="t" lIns="36000" rIns="36000" tIns="0" bIns="0">
+            <a:spAutoFit/>
+          </a:bodyPr>
+          <a:lstStyle/>
+          <a:p>
+            <a:pPr algn="ctr">
+              <a:spcAft>
+                <a:spcPts val="300"/>
+              </a:spcAft>
+            </a:pPr>
+            <a:r>
+              <a:rPr sz="1400" b="0">
                 <a:solidFill>
                   <a:srgbClr val="9FC5E0"/>
                 </a:solidFill>
                 <a:latin typeface="Pretendard"/>
               </a:rPr>
-              <a:t>오류를 찾은 것은 자동 검증이 아니라 외부 비평이었다. 게이트는 수치가 산출되었는지를 검사할 뿐, 결론이 데이터에서 따라 나오는지는 검사하지 못한다.</a:t>
-            </a:r>
-          </a:p>
-        </p:txBody>
-      </p:sp>
-      <p:sp>
-        <p:nvSpPr>
-          <p:cNvPr id="5" name="TextBox 4"/>
-          <p:cNvSpPr txBox="1"/>
-          <p:nvPr/>
-        </p:nvSpPr>
-        <p:spPr>
-          <a:xfrm>
-            <a:off x="864000" y="4968000"/>
-            <a:ext cx="10465200" cy="576000"/>
-          </a:xfrm>
-          <a:prstGeom prst="rect">
-            <a:avLst/>
-          </a:prstGeom>
-          <a:noFill/>
-        </p:spPr>
-        <p:txBody>
-          <a:bodyPr wrap="square" anchor="t" lIns="36000" rIns="36000" tIns="0" bIns="0">
-            <a:spAutoFit/>
-          </a:bodyPr>
-          <a:lstStyle/>
+              <a:t>세 판본의 차이와 리뷰 기록 전부 공개</a:t>
+            </a:r>
+          </a:p>
           <a:p>
             <a:pPr algn="ctr">
               <a:spcAft>
@@ -6535,23 +7026,7 @@
               </a:spcAft>
             </a:pPr>
             <a:r>
-              <a:rPr sz="1500" b="0">
-                <a:solidFill>
-                  <a:srgbClr val="9FC5E0"/>
-                </a:solidFill>
-                <a:latin typeface="Pretendard"/>
-              </a:rPr>
-              <a:t>전 산출물 · 코드 · 리뷰 기록 공개</a:t>
-            </a:r>
-          </a:p>
-          <a:p>
-            <a:pPr algn="ctr">
-              <a:spcAft>
-                <a:spcPts val="300"/>
-              </a:spcAft>
-            </a:pPr>
-            <a:r>
-              <a:rPr sz="1700" b="1">
+              <a:rPr sz="1600" b="1">
                 <a:solidFill>
                   <a:srgbClr val="FFFFFF"/>
                 </a:solidFill>
@@ -6697,7 +7172,7 @@
                 </a:solidFill>
                 <a:latin typeface="Pretendard"/>
               </a:rPr>
-              <a:t>도킹 벤치마크는 두 가지를 동시에 재고 있다</a:t>
+              <a:t>홀로 구조를 쓰면 점수와 골격 닮음이 같은 방향을 가리킨다</a:t>
             </a:r>
           </a:p>
         </p:txBody>
@@ -6743,7 +7218,7 @@
       </p:sp>
       <p:pic>
         <p:nvPicPr>
-          <p:cNvPr id="6" name="Picture 5" descr="fig01_graphical_abstract.png"/>
+          <p:cNvPr id="6" name="Picture 5" descr="fig00_problem.png"/>
           <p:cNvPicPr>
             <a:picLocks noChangeAspect="1"/>
           </p:cNvPicPr>
@@ -6757,8 +7232,8 @@
         </p:blipFill>
         <p:spPr>
           <a:xfrm>
-            <a:off x="432000" y="1296000"/>
-            <a:ext cx="11329200" cy="4109235"/>
+            <a:off x="1872000" y="1152000"/>
+            <a:ext cx="8449200" cy="4450573"/>
           </a:xfrm>
           <a:prstGeom prst="rect">
             <a:avLst/>
@@ -6861,7 +7336,7 @@
                 </a:solidFill>
                 <a:latin typeface="Pretendard"/>
               </a:rPr>
-              <a:t>핵심</a:t>
+              <a:t>약속</a:t>
             </a:r>
           </a:p>
         </p:txBody>
@@ -6900,7 +7375,7 @@
                 </a:solidFill>
                 <a:latin typeface="Pretendard"/>
               </a:rPr>
-              <a:t>결론부터 — 골격을 분리하니 상관이 사라졌다</a:t>
+              <a:t>사전에 정한 합격선은 넷이었다</a:t>
             </a:r>
           </a:p>
         </p:txBody>
@@ -6946,25 +7421,140 @@
       </p:sp>
       <p:sp>
         <p:nvSpPr>
-          <p:cNvPr id="6" name="Rounded Rectangle 5"/>
+          <p:cNvPr id="6" name="TextBox 5"/>
+          <p:cNvSpPr txBox="1"/>
+          <p:nvPr/>
+        </p:nvSpPr>
+        <p:spPr>
+          <a:xfrm>
+            <a:off x="1440000" y="1440000"/>
+            <a:ext cx="4248000" cy="288000"/>
+          </a:xfrm>
+          <a:prstGeom prst="rect">
+            <a:avLst/>
+          </a:prstGeom>
+          <a:noFill/>
+        </p:spPr>
+        <p:txBody>
+          <a:bodyPr wrap="square" anchor="t" lIns="36000" rIns="36000" tIns="0" bIns="0">
+            <a:spAutoFit/>
+          </a:bodyPr>
+          <a:lstStyle/>
+          <a:p>
+            <a:pPr algn="l">
+              <a:spcAft>
+                <a:spcPts val="0"/>
+              </a:spcAft>
+            </a:pPr>
+            <a:r>
+              <a:rPr sz="1400" b="1">
+                <a:solidFill>
+                  <a:srgbClr val="5A636B"/>
+                </a:solidFill>
+                <a:latin typeface="Pretendard"/>
+              </a:rPr>
+              <a:t>목적</a:t>
+            </a:r>
+          </a:p>
+        </p:txBody>
+      </p:sp>
+      <p:sp>
+        <p:nvSpPr>
+          <p:cNvPr id="7" name="TextBox 6"/>
+          <p:cNvSpPr txBox="1"/>
+          <p:nvPr/>
+        </p:nvSpPr>
+        <p:spPr>
+          <a:xfrm>
+            <a:off x="5832000" y="1440000"/>
+            <a:ext cx="2952000" cy="288000"/>
+          </a:xfrm>
+          <a:prstGeom prst="rect">
+            <a:avLst/>
+          </a:prstGeom>
+          <a:noFill/>
+        </p:spPr>
+        <p:txBody>
+          <a:bodyPr wrap="square" anchor="t" lIns="36000" rIns="36000" tIns="0" bIns="0">
+            <a:spAutoFit/>
+          </a:bodyPr>
+          <a:lstStyle/>
+          <a:p>
+            <a:pPr algn="ctr">
+              <a:spcAft>
+                <a:spcPts val="0"/>
+              </a:spcAft>
+            </a:pPr>
+            <a:r>
+              <a:rPr sz="1400" b="1">
+                <a:solidFill>
+                  <a:srgbClr val="5A636B"/>
+                </a:solidFill>
+                <a:latin typeface="Pretendard"/>
+              </a:rPr>
+              <a:t>판정 지표</a:t>
+            </a:r>
+          </a:p>
+        </p:txBody>
+      </p:sp>
+      <p:sp>
+        <p:nvSpPr>
+          <p:cNvPr id="8" name="TextBox 7"/>
+          <p:cNvSpPr txBox="1"/>
+          <p:nvPr/>
+        </p:nvSpPr>
+        <p:spPr>
+          <a:xfrm>
+            <a:off x="9000000" y="1440000"/>
+            <a:ext cx="2664000" cy="288000"/>
+          </a:xfrm>
+          <a:prstGeom prst="rect">
+            <a:avLst/>
+          </a:prstGeom>
+          <a:noFill/>
+        </p:spPr>
+        <p:txBody>
+          <a:bodyPr wrap="square" anchor="t" lIns="36000" rIns="36000" tIns="0" bIns="0">
+            <a:spAutoFit/>
+          </a:bodyPr>
+          <a:lstStyle/>
+          <a:p>
+            <a:pPr algn="ctr">
+              <a:spcAft>
+                <a:spcPts val="0"/>
+              </a:spcAft>
+            </a:pPr>
+            <a:r>
+              <a:rPr sz="1400" b="1">
+                <a:solidFill>
+                  <a:srgbClr val="5A636B"/>
+                </a:solidFill>
+                <a:latin typeface="Pretendard"/>
+              </a:rPr>
+              <a:t>사전 합격선</a:t>
+            </a:r>
+          </a:p>
+        </p:txBody>
+      </p:sp>
+      <p:sp>
+        <p:nvSpPr>
+          <p:cNvPr id="9" name="Rectangle 8"/>
           <p:cNvSpPr/>
           <p:nvPr/>
         </p:nvSpPr>
         <p:spPr>
           <a:xfrm>
-            <a:off x="720000" y="1656000"/>
-            <a:ext cx="10753200" cy="1656000"/>
-          </a:xfrm>
-          <a:prstGeom prst="roundRect">
+            <a:off x="720000" y="1800000"/>
+            <a:ext cx="10753200" cy="756000"/>
+          </a:xfrm>
+          <a:prstGeom prst="rect">
             <a:avLst/>
           </a:prstGeom>
           <a:solidFill>
-            <a:srgbClr val="FDF0E6"/>
+            <a:srgbClr val="F3F5F7"/>
           </a:solidFill>
-          <a:ln w="25400">
-            <a:solidFill>
-              <a:srgbClr val="D55E00"/>
-            </a:solidFill>
+          <a:ln>
+            <a:noFill/>
           </a:ln>
           <a:effectLst/>
         </p:spPr>
@@ -6992,14 +7582,946 @@
       </p:sp>
       <p:sp>
         <p:nvSpPr>
-          <p:cNvPr id="7" name="TextBox 6"/>
-          <p:cNvSpPr txBox="1"/>
-          <p:nvPr/>
-        </p:nvSpPr>
-        <p:spPr>
-          <a:xfrm>
-            <a:off x="936000" y="1980000"/>
-            <a:ext cx="10321200" cy="504000"/>
+          <p:cNvPr id="10" name="Oval 9"/>
+          <p:cNvSpPr/>
+          <p:nvPr/>
+        </p:nvSpPr>
+        <p:spPr>
+          <a:xfrm>
+            <a:off x="864000" y="1944000"/>
+            <a:ext cx="432000" cy="468000"/>
+          </a:xfrm>
+          <a:prstGeom prst="ellipse">
+            <a:avLst/>
+          </a:prstGeom>
+          <a:solidFill>
+            <a:srgbClr val="0072B2"/>
+          </a:solidFill>
+          <a:ln>
+            <a:noFill/>
+          </a:ln>
+          <a:effectLst/>
+        </p:spPr>
+        <p:style>
+          <a:lnRef idx="1">
+            <a:schemeClr val="accent1"/>
+          </a:lnRef>
+          <a:fillRef idx="3">
+            <a:schemeClr val="accent1"/>
+          </a:fillRef>
+          <a:effectRef idx="2">
+            <a:schemeClr val="accent1"/>
+          </a:effectRef>
+          <a:fontRef idx="minor">
+            <a:schemeClr val="lt1"/>
+          </a:fontRef>
+        </p:style>
+        <p:txBody>
+          <a:bodyPr rtlCol="0" anchor="ctr"/>
+          <a:lstStyle/>
+          <a:p>
+            <a:pPr algn="ctr"/>
+          </a:p>
+        </p:txBody>
+      </p:sp>
+      <p:sp>
+        <p:nvSpPr>
+          <p:cNvPr id="11" name="TextBox 10"/>
+          <p:cNvSpPr txBox="1"/>
+          <p:nvPr/>
+        </p:nvSpPr>
+        <p:spPr>
+          <a:xfrm>
+            <a:off x="864000" y="1944000"/>
+            <a:ext cx="432000" cy="468000"/>
+          </a:xfrm>
+          <a:prstGeom prst="rect">
+            <a:avLst/>
+          </a:prstGeom>
+          <a:noFill/>
+        </p:spPr>
+        <p:txBody>
+          <a:bodyPr wrap="square" anchor="ctr" lIns="36000" rIns="36000" tIns="0" bIns="0">
+            <a:spAutoFit/>
+          </a:bodyPr>
+          <a:lstStyle/>
+          <a:p>
+            <a:pPr algn="ctr">
+              <a:spcAft>
+                <a:spcPts val="0"/>
+              </a:spcAft>
+            </a:pPr>
+            <a:r>
+              <a:rPr sz="1500" b="1">
+                <a:solidFill>
+                  <a:srgbClr val="FFFFFF"/>
+                </a:solidFill>
+                <a:latin typeface="Pretendard"/>
+              </a:rPr>
+              <a:t>1</a:t>
+            </a:r>
+          </a:p>
+        </p:txBody>
+      </p:sp>
+      <p:sp>
+        <p:nvSpPr>
+          <p:cNvPr id="12" name="TextBox 11"/>
+          <p:cNvSpPr txBox="1"/>
+          <p:nvPr/>
+        </p:nvSpPr>
+        <p:spPr>
+          <a:xfrm>
+            <a:off x="1440000" y="1944000"/>
+            <a:ext cx="4248000" cy="468000"/>
+          </a:xfrm>
+          <a:prstGeom prst="rect">
+            <a:avLst/>
+          </a:prstGeom>
+          <a:noFill/>
+        </p:spPr>
+        <p:txBody>
+          <a:bodyPr wrap="square" anchor="ctr" lIns="36000" rIns="36000" tIns="0" bIns="0">
+            <a:spAutoFit/>
+          </a:bodyPr>
+          <a:lstStyle/>
+          <a:p>
+            <a:pPr algn="l">
+              <a:spcAft>
+                <a:spcPts val="0"/>
+              </a:spcAft>
+            </a:pPr>
+            <a:r>
+              <a:rPr sz="1700" b="0">
+                <a:solidFill>
+                  <a:srgbClr val="1A1A1A"/>
+                </a:solidFill>
+                <a:latin typeface="Pretendard"/>
+              </a:rPr>
+              <a:t>역가를 정량 예측하는가</a:t>
+            </a:r>
+          </a:p>
+        </p:txBody>
+      </p:sp>
+      <p:sp>
+        <p:nvSpPr>
+          <p:cNvPr id="13" name="TextBox 12"/>
+          <p:cNvSpPr txBox="1"/>
+          <p:nvPr/>
+        </p:nvSpPr>
+        <p:spPr>
+          <a:xfrm>
+            <a:off x="5832000" y="1944000"/>
+            <a:ext cx="2952000" cy="468000"/>
+          </a:xfrm>
+          <a:prstGeom prst="rect">
+            <a:avLst/>
+          </a:prstGeom>
+          <a:noFill/>
+        </p:spPr>
+        <p:txBody>
+          <a:bodyPr wrap="square" anchor="ctr" lIns="36000" rIns="36000" tIns="0" bIns="0">
+            <a:spAutoFit/>
+          </a:bodyPr>
+          <a:lstStyle/>
+          <a:p>
+            <a:pPr algn="ctr">
+              <a:spcAft>
+                <a:spcPts val="0"/>
+              </a:spcAft>
+            </a:pPr>
+            <a:r>
+              <a:rPr sz="1500" b="0">
+                <a:solidFill>
+                  <a:srgbClr val="5A636B"/>
+                </a:solidFill>
+                <a:latin typeface="Pretendard"/>
+              </a:rPr>
+              <a:t>교차검증 Q²</a:t>
+            </a:r>
+          </a:p>
+        </p:txBody>
+      </p:sp>
+      <p:sp>
+        <p:nvSpPr>
+          <p:cNvPr id="14" name="TextBox 13"/>
+          <p:cNvSpPr txBox="1"/>
+          <p:nvPr/>
+        </p:nvSpPr>
+        <p:spPr>
+          <a:xfrm>
+            <a:off x="9000000" y="1944000"/>
+            <a:ext cx="2664000" cy="468000"/>
+          </a:xfrm>
+          <a:prstGeom prst="rect">
+            <a:avLst/>
+          </a:prstGeom>
+          <a:noFill/>
+        </p:spPr>
+        <p:txBody>
+          <a:bodyPr wrap="square" anchor="ctr" lIns="36000" rIns="36000" tIns="0" bIns="0">
+            <a:spAutoFit/>
+          </a:bodyPr>
+          <a:lstStyle/>
+          <a:p>
+            <a:pPr algn="ctr">
+              <a:spcAft>
+                <a:spcPts val="0"/>
+              </a:spcAft>
+            </a:pPr>
+            <a:r>
+              <a:rPr sz="1600" b="1">
+                <a:solidFill>
+                  <a:srgbClr val="0072B2"/>
+                </a:solidFill>
+                <a:latin typeface="Pretendard"/>
+              </a:rPr>
+              <a:t>Q² ≥ 0.3</a:t>
+            </a:r>
+          </a:p>
+        </p:txBody>
+      </p:sp>
+      <p:sp>
+        <p:nvSpPr>
+          <p:cNvPr id="15" name="Rectangle 14"/>
+          <p:cNvSpPr/>
+          <p:nvPr/>
+        </p:nvSpPr>
+        <p:spPr>
+          <a:xfrm>
+            <a:off x="720000" y="2628000"/>
+            <a:ext cx="10753200" cy="756000"/>
+          </a:xfrm>
+          <a:prstGeom prst="rect">
+            <a:avLst/>
+          </a:prstGeom>
+          <a:solidFill>
+            <a:srgbClr val="FFFFFF"/>
+          </a:solidFill>
+          <a:ln>
+            <a:noFill/>
+          </a:ln>
+          <a:effectLst/>
+        </p:spPr>
+        <p:style>
+          <a:lnRef idx="1">
+            <a:schemeClr val="accent1"/>
+          </a:lnRef>
+          <a:fillRef idx="3">
+            <a:schemeClr val="accent1"/>
+          </a:fillRef>
+          <a:effectRef idx="2">
+            <a:schemeClr val="accent1"/>
+          </a:effectRef>
+          <a:fontRef idx="minor">
+            <a:schemeClr val="lt1"/>
+          </a:fontRef>
+        </p:style>
+        <p:txBody>
+          <a:bodyPr rtlCol="0" anchor="ctr"/>
+          <a:lstStyle/>
+          <a:p>
+            <a:pPr algn="ctr"/>
+          </a:p>
+        </p:txBody>
+      </p:sp>
+      <p:sp>
+        <p:nvSpPr>
+          <p:cNvPr id="16" name="Oval 15"/>
+          <p:cNvSpPr/>
+          <p:nvPr/>
+        </p:nvSpPr>
+        <p:spPr>
+          <a:xfrm>
+            <a:off x="864000" y="2772000"/>
+            <a:ext cx="432000" cy="468000"/>
+          </a:xfrm>
+          <a:prstGeom prst="ellipse">
+            <a:avLst/>
+          </a:prstGeom>
+          <a:solidFill>
+            <a:srgbClr val="0072B2"/>
+          </a:solidFill>
+          <a:ln>
+            <a:noFill/>
+          </a:ln>
+          <a:effectLst/>
+        </p:spPr>
+        <p:style>
+          <a:lnRef idx="1">
+            <a:schemeClr val="accent1"/>
+          </a:lnRef>
+          <a:fillRef idx="3">
+            <a:schemeClr val="accent1"/>
+          </a:fillRef>
+          <a:effectRef idx="2">
+            <a:schemeClr val="accent1"/>
+          </a:effectRef>
+          <a:fontRef idx="minor">
+            <a:schemeClr val="lt1"/>
+          </a:fontRef>
+        </p:style>
+        <p:txBody>
+          <a:bodyPr rtlCol="0" anchor="ctr"/>
+          <a:lstStyle/>
+          <a:p>
+            <a:pPr algn="ctr"/>
+          </a:p>
+        </p:txBody>
+      </p:sp>
+      <p:sp>
+        <p:nvSpPr>
+          <p:cNvPr id="17" name="TextBox 16"/>
+          <p:cNvSpPr txBox="1"/>
+          <p:nvPr/>
+        </p:nvSpPr>
+        <p:spPr>
+          <a:xfrm>
+            <a:off x="864000" y="2772000"/>
+            <a:ext cx="432000" cy="468000"/>
+          </a:xfrm>
+          <a:prstGeom prst="rect">
+            <a:avLst/>
+          </a:prstGeom>
+          <a:noFill/>
+        </p:spPr>
+        <p:txBody>
+          <a:bodyPr wrap="square" anchor="ctr" lIns="36000" rIns="36000" tIns="0" bIns="0">
+            <a:spAutoFit/>
+          </a:bodyPr>
+          <a:lstStyle/>
+          <a:p>
+            <a:pPr algn="ctr">
+              <a:spcAft>
+                <a:spcPts val="0"/>
+              </a:spcAft>
+            </a:pPr>
+            <a:r>
+              <a:rPr sz="1500" b="1">
+                <a:solidFill>
+                  <a:srgbClr val="FFFFFF"/>
+                </a:solidFill>
+                <a:latin typeface="Pretendard"/>
+              </a:rPr>
+              <a:t>2</a:t>
+            </a:r>
+          </a:p>
+        </p:txBody>
+      </p:sp>
+      <p:sp>
+        <p:nvSpPr>
+          <p:cNvPr id="18" name="TextBox 17"/>
+          <p:cNvSpPr txBox="1"/>
+          <p:nvPr/>
+        </p:nvSpPr>
+        <p:spPr>
+          <a:xfrm>
+            <a:off x="1440000" y="2772000"/>
+            <a:ext cx="4248000" cy="468000"/>
+          </a:xfrm>
+          <a:prstGeom prst="rect">
+            <a:avLst/>
+          </a:prstGeom>
+          <a:noFill/>
+        </p:spPr>
+        <p:txBody>
+          <a:bodyPr wrap="square" anchor="ctr" lIns="36000" rIns="36000" tIns="0" bIns="0">
+            <a:spAutoFit/>
+          </a:bodyPr>
+          <a:lstStyle/>
+          <a:p>
+            <a:pPr algn="l">
+              <a:spcAft>
+                <a:spcPts val="0"/>
+              </a:spcAft>
+            </a:pPr>
+            <a:r>
+              <a:rPr sz="1700" b="0">
+                <a:solidFill>
+                  <a:srgbClr val="1A1A1A"/>
+                </a:solidFill>
+                <a:latin typeface="Pretendard"/>
+              </a:rPr>
+              <a:t>강한 화합물을 선별하는가</a:t>
+            </a:r>
+          </a:p>
+        </p:txBody>
+      </p:sp>
+      <p:sp>
+        <p:nvSpPr>
+          <p:cNvPr id="19" name="TextBox 18"/>
+          <p:cNvSpPr txBox="1"/>
+          <p:nvPr/>
+        </p:nvSpPr>
+        <p:spPr>
+          <a:xfrm>
+            <a:off x="5832000" y="2772000"/>
+            <a:ext cx="2952000" cy="468000"/>
+          </a:xfrm>
+          <a:prstGeom prst="rect">
+            <a:avLst/>
+          </a:prstGeom>
+          <a:noFill/>
+        </p:spPr>
+        <p:txBody>
+          <a:bodyPr wrap="square" anchor="ctr" lIns="36000" rIns="36000" tIns="0" bIns="0">
+            <a:spAutoFit/>
+          </a:bodyPr>
+          <a:lstStyle/>
+          <a:p>
+            <a:pPr algn="ctr">
+              <a:spcAft>
+                <a:spcPts val="0"/>
+              </a:spcAft>
+            </a:pPr>
+            <a:r>
+              <a:rPr sz="1500" b="0">
+                <a:solidFill>
+                  <a:srgbClr val="5A636B"/>
+                </a:solidFill>
+                <a:latin typeface="Pretendard"/>
+              </a:rPr>
+              <a:t>순위상관 · ROC-AUC</a:t>
+            </a:r>
+          </a:p>
+        </p:txBody>
+      </p:sp>
+      <p:sp>
+        <p:nvSpPr>
+          <p:cNvPr id="20" name="TextBox 19"/>
+          <p:cNvSpPr txBox="1"/>
+          <p:nvPr/>
+        </p:nvSpPr>
+        <p:spPr>
+          <a:xfrm>
+            <a:off x="9000000" y="2772000"/>
+            <a:ext cx="2664000" cy="468000"/>
+          </a:xfrm>
+          <a:prstGeom prst="rect">
+            <a:avLst/>
+          </a:prstGeom>
+          <a:noFill/>
+        </p:spPr>
+        <p:txBody>
+          <a:bodyPr wrap="square" anchor="ctr" lIns="36000" rIns="36000" tIns="0" bIns="0">
+            <a:spAutoFit/>
+          </a:bodyPr>
+          <a:lstStyle/>
+          <a:p>
+            <a:pPr algn="ctr">
+              <a:spcAft>
+                <a:spcPts val="0"/>
+              </a:spcAft>
+            </a:pPr>
+            <a:r>
+              <a:rPr sz="1600" b="1">
+                <a:solidFill>
+                  <a:srgbClr val="0072B2"/>
+                </a:solidFill>
+                <a:latin typeface="Pretendard"/>
+              </a:rPr>
+              <a:t>p &lt; 0.05  &amp;  AUC ≥ 0.7</a:t>
+            </a:r>
+          </a:p>
+        </p:txBody>
+      </p:sp>
+      <p:sp>
+        <p:nvSpPr>
+          <p:cNvPr id="21" name="Rectangle 20"/>
+          <p:cNvSpPr/>
+          <p:nvPr/>
+        </p:nvSpPr>
+        <p:spPr>
+          <a:xfrm>
+            <a:off x="720000" y="3456000"/>
+            <a:ext cx="10753200" cy="756000"/>
+          </a:xfrm>
+          <a:prstGeom prst="rect">
+            <a:avLst/>
+          </a:prstGeom>
+          <a:solidFill>
+            <a:srgbClr val="F3F5F7"/>
+          </a:solidFill>
+          <a:ln>
+            <a:noFill/>
+          </a:ln>
+          <a:effectLst/>
+        </p:spPr>
+        <p:style>
+          <a:lnRef idx="1">
+            <a:schemeClr val="accent1"/>
+          </a:lnRef>
+          <a:fillRef idx="3">
+            <a:schemeClr val="accent1"/>
+          </a:fillRef>
+          <a:effectRef idx="2">
+            <a:schemeClr val="accent1"/>
+          </a:effectRef>
+          <a:fontRef idx="minor">
+            <a:schemeClr val="lt1"/>
+          </a:fontRef>
+        </p:style>
+        <p:txBody>
+          <a:bodyPr rtlCol="0" anchor="ctr"/>
+          <a:lstStyle/>
+          <a:p>
+            <a:pPr algn="ctr"/>
+          </a:p>
+        </p:txBody>
+      </p:sp>
+      <p:sp>
+        <p:nvSpPr>
+          <p:cNvPr id="22" name="Oval 21"/>
+          <p:cNvSpPr/>
+          <p:nvPr/>
+        </p:nvSpPr>
+        <p:spPr>
+          <a:xfrm>
+            <a:off x="864000" y="3600000"/>
+            <a:ext cx="432000" cy="468000"/>
+          </a:xfrm>
+          <a:prstGeom prst="ellipse">
+            <a:avLst/>
+          </a:prstGeom>
+          <a:solidFill>
+            <a:srgbClr val="0072B2"/>
+          </a:solidFill>
+          <a:ln>
+            <a:noFill/>
+          </a:ln>
+          <a:effectLst/>
+        </p:spPr>
+        <p:style>
+          <a:lnRef idx="1">
+            <a:schemeClr val="accent1"/>
+          </a:lnRef>
+          <a:fillRef idx="3">
+            <a:schemeClr val="accent1"/>
+          </a:fillRef>
+          <a:effectRef idx="2">
+            <a:schemeClr val="accent1"/>
+          </a:effectRef>
+          <a:fontRef idx="minor">
+            <a:schemeClr val="lt1"/>
+          </a:fontRef>
+        </p:style>
+        <p:txBody>
+          <a:bodyPr rtlCol="0" anchor="ctr"/>
+          <a:lstStyle/>
+          <a:p>
+            <a:pPr algn="ctr"/>
+          </a:p>
+        </p:txBody>
+      </p:sp>
+      <p:sp>
+        <p:nvSpPr>
+          <p:cNvPr id="23" name="TextBox 22"/>
+          <p:cNvSpPr txBox="1"/>
+          <p:nvPr/>
+        </p:nvSpPr>
+        <p:spPr>
+          <a:xfrm>
+            <a:off x="864000" y="3600000"/>
+            <a:ext cx="432000" cy="468000"/>
+          </a:xfrm>
+          <a:prstGeom prst="rect">
+            <a:avLst/>
+          </a:prstGeom>
+          <a:noFill/>
+        </p:spPr>
+        <p:txBody>
+          <a:bodyPr wrap="square" anchor="ctr" lIns="36000" rIns="36000" tIns="0" bIns="0">
+            <a:spAutoFit/>
+          </a:bodyPr>
+          <a:lstStyle/>
+          <a:p>
+            <a:pPr algn="ctr">
+              <a:spcAft>
+                <a:spcPts val="0"/>
+              </a:spcAft>
+            </a:pPr>
+            <a:r>
+              <a:rPr sz="1500" b="1">
+                <a:solidFill>
+                  <a:srgbClr val="FFFFFF"/>
+                </a:solidFill>
+                <a:latin typeface="Pretendard"/>
+              </a:rPr>
+              <a:t>3</a:t>
+            </a:r>
+          </a:p>
+        </p:txBody>
+      </p:sp>
+      <p:sp>
+        <p:nvSpPr>
+          <p:cNvPr id="24" name="TextBox 23"/>
+          <p:cNvSpPr txBox="1"/>
+          <p:nvPr/>
+        </p:nvSpPr>
+        <p:spPr>
+          <a:xfrm>
+            <a:off x="1440000" y="3600000"/>
+            <a:ext cx="4248000" cy="468000"/>
+          </a:xfrm>
+          <a:prstGeom prst="rect">
+            <a:avLst/>
+          </a:prstGeom>
+          <a:noFill/>
+        </p:spPr>
+        <p:txBody>
+          <a:bodyPr wrap="square" anchor="ctr" lIns="36000" rIns="36000" tIns="0" bIns="0">
+            <a:spAutoFit/>
+          </a:bodyPr>
+          <a:lstStyle/>
+          <a:p>
+            <a:pPr algn="l">
+              <a:spcAft>
+                <a:spcPts val="0"/>
+              </a:spcAft>
+            </a:pPr>
+            <a:r>
+              <a:rPr sz="1700" b="0">
+                <a:solidFill>
+                  <a:srgbClr val="1A1A1A"/>
+                </a:solidFill>
+                <a:latin typeface="Pretendard"/>
+              </a:rPr>
+              <a:t>골격 통제 후에도 남는가</a:t>
+            </a:r>
+          </a:p>
+        </p:txBody>
+      </p:sp>
+      <p:sp>
+        <p:nvSpPr>
+          <p:cNvPr id="25" name="TextBox 24"/>
+          <p:cNvSpPr txBox="1"/>
+          <p:nvPr/>
+        </p:nvSpPr>
+        <p:spPr>
+          <a:xfrm>
+            <a:off x="5832000" y="3600000"/>
+            <a:ext cx="2952000" cy="468000"/>
+          </a:xfrm>
+          <a:prstGeom prst="rect">
+            <a:avLst/>
+          </a:prstGeom>
+          <a:noFill/>
+        </p:spPr>
+        <p:txBody>
+          <a:bodyPr wrap="square" anchor="ctr" lIns="36000" rIns="36000" tIns="0" bIns="0">
+            <a:spAutoFit/>
+          </a:bodyPr>
+          <a:lstStyle/>
+          <a:p>
+            <a:pPr algn="ctr">
+              <a:spcAft>
+                <a:spcPts val="0"/>
+              </a:spcAft>
+            </a:pPr>
+            <a:r>
+              <a:rPr sz="1500" b="0">
+                <a:solidFill>
+                  <a:srgbClr val="5A636B"/>
+                </a:solidFill>
+                <a:latin typeface="Pretendard"/>
+              </a:rPr>
+              <a:t>Tanimoto 편상관</a:t>
+            </a:r>
+          </a:p>
+        </p:txBody>
+      </p:sp>
+      <p:sp>
+        <p:nvSpPr>
+          <p:cNvPr id="26" name="TextBox 25"/>
+          <p:cNvSpPr txBox="1"/>
+          <p:nvPr/>
+        </p:nvSpPr>
+        <p:spPr>
+          <a:xfrm>
+            <a:off x="9000000" y="3600000"/>
+            <a:ext cx="2664000" cy="468000"/>
+          </a:xfrm>
+          <a:prstGeom prst="rect">
+            <a:avLst/>
+          </a:prstGeom>
+          <a:noFill/>
+        </p:spPr>
+        <p:txBody>
+          <a:bodyPr wrap="square" anchor="ctr" lIns="36000" rIns="36000" tIns="0" bIns="0">
+            <a:spAutoFit/>
+          </a:bodyPr>
+          <a:lstStyle/>
+          <a:p>
+            <a:pPr algn="ctr">
+              <a:spcAft>
+                <a:spcPts val="0"/>
+              </a:spcAft>
+            </a:pPr>
+            <a:r>
+              <a:rPr sz="1600" b="1">
+                <a:solidFill>
+                  <a:srgbClr val="0072B2"/>
+                </a:solidFill>
+                <a:latin typeface="Pretendard"/>
+              </a:rPr>
+              <a:t>원상관의 60% 이상 유지</a:t>
+            </a:r>
+          </a:p>
+        </p:txBody>
+      </p:sp>
+      <p:sp>
+        <p:nvSpPr>
+          <p:cNvPr id="27" name="Rectangle 26"/>
+          <p:cNvSpPr/>
+          <p:nvPr/>
+        </p:nvSpPr>
+        <p:spPr>
+          <a:xfrm>
+            <a:off x="720000" y="4284000"/>
+            <a:ext cx="10753200" cy="756000"/>
+          </a:xfrm>
+          <a:prstGeom prst="rect">
+            <a:avLst/>
+          </a:prstGeom>
+          <a:solidFill>
+            <a:srgbClr val="FFFFFF"/>
+          </a:solidFill>
+          <a:ln>
+            <a:noFill/>
+          </a:ln>
+          <a:effectLst/>
+        </p:spPr>
+        <p:style>
+          <a:lnRef idx="1">
+            <a:schemeClr val="accent1"/>
+          </a:lnRef>
+          <a:fillRef idx="3">
+            <a:schemeClr val="accent1"/>
+          </a:fillRef>
+          <a:effectRef idx="2">
+            <a:schemeClr val="accent1"/>
+          </a:effectRef>
+          <a:fontRef idx="minor">
+            <a:schemeClr val="lt1"/>
+          </a:fontRef>
+        </p:style>
+        <p:txBody>
+          <a:bodyPr rtlCol="0" anchor="ctr"/>
+          <a:lstStyle/>
+          <a:p>
+            <a:pPr algn="ctr"/>
+          </a:p>
+        </p:txBody>
+      </p:sp>
+      <p:sp>
+        <p:nvSpPr>
+          <p:cNvPr id="28" name="Oval 27"/>
+          <p:cNvSpPr/>
+          <p:nvPr/>
+        </p:nvSpPr>
+        <p:spPr>
+          <a:xfrm>
+            <a:off x="864000" y="4428000"/>
+            <a:ext cx="432000" cy="468000"/>
+          </a:xfrm>
+          <a:prstGeom prst="ellipse">
+            <a:avLst/>
+          </a:prstGeom>
+          <a:solidFill>
+            <a:srgbClr val="0072B2"/>
+          </a:solidFill>
+          <a:ln>
+            <a:noFill/>
+          </a:ln>
+          <a:effectLst/>
+        </p:spPr>
+        <p:style>
+          <a:lnRef idx="1">
+            <a:schemeClr val="accent1"/>
+          </a:lnRef>
+          <a:fillRef idx="3">
+            <a:schemeClr val="accent1"/>
+          </a:fillRef>
+          <a:effectRef idx="2">
+            <a:schemeClr val="accent1"/>
+          </a:effectRef>
+          <a:fontRef idx="minor">
+            <a:schemeClr val="lt1"/>
+          </a:fontRef>
+        </p:style>
+        <p:txBody>
+          <a:bodyPr rtlCol="0" anchor="ctr"/>
+          <a:lstStyle/>
+          <a:p>
+            <a:pPr algn="ctr"/>
+          </a:p>
+        </p:txBody>
+      </p:sp>
+      <p:sp>
+        <p:nvSpPr>
+          <p:cNvPr id="29" name="TextBox 28"/>
+          <p:cNvSpPr txBox="1"/>
+          <p:nvPr/>
+        </p:nvSpPr>
+        <p:spPr>
+          <a:xfrm>
+            <a:off x="864000" y="4428000"/>
+            <a:ext cx="432000" cy="468000"/>
+          </a:xfrm>
+          <a:prstGeom prst="rect">
+            <a:avLst/>
+          </a:prstGeom>
+          <a:noFill/>
+        </p:spPr>
+        <p:txBody>
+          <a:bodyPr wrap="square" anchor="ctr" lIns="36000" rIns="36000" tIns="0" bIns="0">
+            <a:spAutoFit/>
+          </a:bodyPr>
+          <a:lstStyle/>
+          <a:p>
+            <a:pPr algn="ctr">
+              <a:spcAft>
+                <a:spcPts val="0"/>
+              </a:spcAft>
+            </a:pPr>
+            <a:r>
+              <a:rPr sz="1500" b="1">
+                <a:solidFill>
+                  <a:srgbClr val="FFFFFF"/>
+                </a:solidFill>
+                <a:latin typeface="Pretendard"/>
+              </a:rPr>
+              <a:t>4</a:t>
+            </a:r>
+          </a:p>
+        </p:txBody>
+      </p:sp>
+      <p:sp>
+        <p:nvSpPr>
+          <p:cNvPr id="30" name="TextBox 29"/>
+          <p:cNvSpPr txBox="1"/>
+          <p:nvPr/>
+        </p:nvSpPr>
+        <p:spPr>
+          <a:xfrm>
+            <a:off x="1440000" y="4428000"/>
+            <a:ext cx="4248000" cy="468000"/>
+          </a:xfrm>
+          <a:prstGeom prst="rect">
+            <a:avLst/>
+          </a:prstGeom>
+          <a:noFill/>
+        </p:spPr>
+        <p:txBody>
+          <a:bodyPr wrap="square" anchor="ctr" lIns="36000" rIns="36000" tIns="0" bIns="0">
+            <a:spAutoFit/>
+          </a:bodyPr>
+          <a:lstStyle/>
+          <a:p>
+            <a:pPr algn="l">
+              <a:spcAft>
+                <a:spcPts val="0"/>
+              </a:spcAft>
+            </a:pPr>
+            <a:r>
+              <a:rPr sz="1700" b="0">
+                <a:solidFill>
+                  <a:srgbClr val="1A1A1A"/>
+                </a:solidFill>
+                <a:latin typeface="Pretendard"/>
+              </a:rPr>
+              <a:t>대조 실패 시 무엇이 병목인가</a:t>
+            </a:r>
+          </a:p>
+        </p:txBody>
+      </p:sp>
+      <p:sp>
+        <p:nvSpPr>
+          <p:cNvPr id="31" name="TextBox 30"/>
+          <p:cNvSpPr txBox="1"/>
+          <p:nvPr/>
+        </p:nvSpPr>
+        <p:spPr>
+          <a:xfrm>
+            <a:off x="5832000" y="4428000"/>
+            <a:ext cx="2952000" cy="468000"/>
+          </a:xfrm>
+          <a:prstGeom prst="rect">
+            <a:avLst/>
+          </a:prstGeom>
+          <a:noFill/>
+        </p:spPr>
+        <p:txBody>
+          <a:bodyPr wrap="square" anchor="ctr" lIns="36000" rIns="36000" tIns="0" bIns="0">
+            <a:spAutoFit/>
+          </a:bodyPr>
+          <a:lstStyle/>
+          <a:p>
+            <a:pPr algn="ctr">
+              <a:spcAft>
+                <a:spcPts val="0"/>
+              </a:spcAft>
+            </a:pPr>
+            <a:r>
+              <a:rPr sz="1500" b="0">
+                <a:solidFill>
+                  <a:srgbClr val="5A636B"/>
+                </a:solidFill>
+                <a:latin typeface="Pretendard"/>
+              </a:rPr>
+              <a:t>C1 / C2 분리 + 통제 실험</a:t>
+            </a:r>
+          </a:p>
+        </p:txBody>
+      </p:sp>
+      <p:sp>
+        <p:nvSpPr>
+          <p:cNvPr id="32" name="TextBox 31"/>
+          <p:cNvSpPr txBox="1"/>
+          <p:nvPr/>
+        </p:nvSpPr>
+        <p:spPr>
+          <a:xfrm>
+            <a:off x="9000000" y="4428000"/>
+            <a:ext cx="2664000" cy="468000"/>
+          </a:xfrm>
+          <a:prstGeom prst="rect">
+            <a:avLst/>
+          </a:prstGeom>
+          <a:noFill/>
+        </p:spPr>
+        <p:txBody>
+          <a:bodyPr wrap="square" anchor="ctr" lIns="36000" rIns="36000" tIns="0" bIns="0">
+            <a:spAutoFit/>
+          </a:bodyPr>
+          <a:lstStyle/>
+          <a:p>
+            <a:pPr algn="ctr">
+              <a:spcAft>
+                <a:spcPts val="0"/>
+              </a:spcAft>
+            </a:pPr>
+            <a:r>
+              <a:rPr sz="1600" b="1">
+                <a:solidFill>
+                  <a:srgbClr val="0072B2"/>
+                </a:solidFill>
+                <a:latin typeface="Pretendard"/>
+              </a:rPr>
+              <a:t>후보를 실험으로 제거</a:t>
+            </a:r>
+          </a:p>
+        </p:txBody>
+      </p:sp>
+      <p:sp>
+        <p:nvSpPr>
+          <p:cNvPr id="33" name="TextBox 32"/>
+          <p:cNvSpPr txBox="1"/>
+          <p:nvPr/>
+        </p:nvSpPr>
+        <p:spPr>
+          <a:xfrm>
+            <a:off x="720000" y="5256000"/>
+            <a:ext cx="10753200" cy="360000"/>
           </a:xfrm>
           <a:prstGeom prst="rect">
             <a:avLst/>
@@ -7018,286 +8540,13 @@
               </a:spcAft>
             </a:pPr>
             <a:r>
-              <a:rPr sz="3400" b="1">
-                <a:solidFill>
-                  <a:srgbClr val="D55E00"/>
-                </a:solidFill>
-                <a:latin typeface="Pretendard"/>
-              </a:rPr>
-              <a:t>ρ = -0.079    (95% CI -0.23 ~ +0.08,   p = 0.31878)</a:t>
-            </a:r>
-          </a:p>
-        </p:txBody>
-      </p:sp>
-      <p:sp>
-        <p:nvSpPr>
-          <p:cNvPr id="8" name="TextBox 7"/>
-          <p:cNvSpPr txBox="1"/>
-          <p:nvPr/>
-        </p:nvSpPr>
-        <p:spPr>
-          <a:xfrm>
-            <a:off x="936000" y="2664000"/>
-            <a:ext cx="10321200" cy="432000"/>
-          </a:xfrm>
-          <a:prstGeom prst="rect">
-            <a:avLst/>
-          </a:prstGeom>
-          <a:noFill/>
-        </p:spPr>
-        <p:txBody>
-          <a:bodyPr wrap="square" anchor="t" lIns="36000" rIns="36000" tIns="0" bIns="0">
-            <a:spAutoFit/>
-          </a:bodyPr>
-          <a:lstStyle/>
-          <a:p>
-            <a:pPr algn="ctr">
-              <a:spcAft>
-                <a:spcPts val="0"/>
-              </a:spcAft>
-            </a:pPr>
-            <a:r>
-              <a:rPr sz="1700" b="0">
-                <a:solidFill>
-                  <a:srgbClr val="1A1A1A"/>
-                </a:solidFill>
-                <a:latin typeface="Pretendard"/>
-              </a:rPr>
-              <a:t>n = 30 에서 얻었던 ρ = -0.538 는 재현되지 않았다</a:t>
-            </a:r>
-          </a:p>
-        </p:txBody>
-      </p:sp>
-      <p:sp>
-        <p:nvSpPr>
-          <p:cNvPr id="9" name="TextBox 8"/>
-          <p:cNvSpPr txBox="1"/>
-          <p:nvPr/>
-        </p:nvSpPr>
-        <p:spPr>
-          <a:xfrm>
-            <a:off x="720000" y="4032000"/>
-            <a:ext cx="3584400" cy="792000"/>
-          </a:xfrm>
-          <a:prstGeom prst="rect">
-            <a:avLst/>
-          </a:prstGeom>
-          <a:noFill/>
-        </p:spPr>
-        <p:txBody>
-          <a:bodyPr wrap="square" anchor="t" lIns="36000" rIns="36000" tIns="0" bIns="0">
-            <a:spAutoFit/>
-          </a:bodyPr>
-          <a:lstStyle/>
-          <a:p>
-            <a:pPr algn="ctr">
-              <a:spcAft>
-                <a:spcPts val="0"/>
-              </a:spcAft>
-            </a:pPr>
-            <a:r>
-              <a:rPr sz="5000" b="1">
-                <a:solidFill>
-                  <a:srgbClr val="D55E00"/>
-                </a:solidFill>
-                <a:latin typeface="Pretendard"/>
-              </a:rPr>
-              <a:t>-0.018</a:t>
-            </a:r>
-          </a:p>
-        </p:txBody>
-      </p:sp>
-      <p:sp>
-        <p:nvSpPr>
-          <p:cNvPr id="10" name="TextBox 9"/>
-          <p:cNvSpPr txBox="1"/>
-          <p:nvPr/>
-        </p:nvSpPr>
-        <p:spPr>
-          <a:xfrm>
-            <a:off x="720000" y="4752000"/>
-            <a:ext cx="3584400" cy="360000"/>
-          </a:xfrm>
-          <a:prstGeom prst="rect">
-            <a:avLst/>
-          </a:prstGeom>
-          <a:noFill/>
-        </p:spPr>
-        <p:txBody>
-          <a:bodyPr wrap="square" anchor="t" lIns="36000" rIns="36000" tIns="0" bIns="0">
-            <a:spAutoFit/>
-          </a:bodyPr>
-          <a:lstStyle/>
-          <a:p>
-            <a:pPr algn="ctr">
-              <a:spcAft>
-                <a:spcPts val="0"/>
-              </a:spcAft>
-            </a:pPr>
-            <a:r>
               <a:rPr sz="1300" b="0">
                 <a:solidFill>
                   <a:srgbClr val="5A636B"/>
                 </a:solidFill>
                 <a:latin typeface="Pretendard"/>
               </a:rPr>
-              <a:t>교차검증 Q²  (기준 0.3)</a:t>
-            </a:r>
-          </a:p>
-        </p:txBody>
-      </p:sp>
-      <p:sp>
-        <p:nvSpPr>
-          <p:cNvPr id="11" name="TextBox 10"/>
-          <p:cNvSpPr txBox="1"/>
-          <p:nvPr/>
-        </p:nvSpPr>
-        <p:spPr>
-          <a:xfrm>
-            <a:off x="4304400" y="4032000"/>
-            <a:ext cx="3584400" cy="792000"/>
-          </a:xfrm>
-          <a:prstGeom prst="rect">
-            <a:avLst/>
-          </a:prstGeom>
-          <a:noFill/>
-        </p:spPr>
-        <p:txBody>
-          <a:bodyPr wrap="square" anchor="t" lIns="36000" rIns="36000" tIns="0" bIns="0">
-            <a:spAutoFit/>
-          </a:bodyPr>
-          <a:lstStyle/>
-          <a:p>
-            <a:pPr algn="ctr">
-              <a:spcAft>
-                <a:spcPts val="0"/>
-              </a:spcAft>
-            </a:pPr>
-            <a:r>
-              <a:rPr sz="5000" b="1">
-                <a:solidFill>
-                  <a:srgbClr val="D55E00"/>
-                </a:solidFill>
-                <a:latin typeface="Pretendard"/>
-              </a:rPr>
-              <a:t>0.574</a:t>
-            </a:r>
-          </a:p>
-        </p:txBody>
-      </p:sp>
-      <p:sp>
-        <p:nvSpPr>
-          <p:cNvPr id="12" name="TextBox 11"/>
-          <p:cNvSpPr txBox="1"/>
-          <p:nvPr/>
-        </p:nvSpPr>
-        <p:spPr>
-          <a:xfrm>
-            <a:off x="4304400" y="4752000"/>
-            <a:ext cx="3584400" cy="360000"/>
-          </a:xfrm>
-          <a:prstGeom prst="rect">
-            <a:avLst/>
-          </a:prstGeom>
-          <a:noFill/>
-        </p:spPr>
-        <p:txBody>
-          <a:bodyPr wrap="square" anchor="t" lIns="36000" rIns="36000" tIns="0" bIns="0">
-            <a:spAutoFit/>
-          </a:bodyPr>
-          <a:lstStyle/>
-          <a:p>
-            <a:pPr algn="ctr">
-              <a:spcAft>
-                <a:spcPts val="0"/>
-              </a:spcAft>
-            </a:pPr>
-            <a:r>
-              <a:rPr sz="1300" b="0">
-                <a:solidFill>
-                  <a:srgbClr val="5A636B"/>
-                </a:solidFill>
-                <a:latin typeface="Pretendard"/>
-              </a:rPr>
-              <a:t>ROC-AUC 전체  (기준 0.7)</a:t>
-            </a:r>
-          </a:p>
-        </p:txBody>
-      </p:sp>
-      <p:sp>
-        <p:nvSpPr>
-          <p:cNvPr id="13" name="TextBox 12"/>
-          <p:cNvSpPr txBox="1"/>
-          <p:nvPr/>
-        </p:nvSpPr>
-        <p:spPr>
-          <a:xfrm>
-            <a:off x="7888800" y="4032000"/>
-            <a:ext cx="3584400" cy="792000"/>
-          </a:xfrm>
-          <a:prstGeom prst="rect">
-            <a:avLst/>
-          </a:prstGeom>
-          <a:noFill/>
-        </p:spPr>
-        <p:txBody>
-          <a:bodyPr wrap="square" anchor="t" lIns="36000" rIns="36000" tIns="0" bIns="0">
-            <a:spAutoFit/>
-          </a:bodyPr>
-          <a:lstStyle/>
-          <a:p>
-            <a:pPr algn="ctr">
-              <a:spcAft>
-                <a:spcPts val="0"/>
-              </a:spcAft>
-            </a:pPr>
-            <a:r>
-              <a:rPr sz="5000" b="1">
-                <a:solidFill>
-                  <a:srgbClr val="D55E00"/>
-                </a:solidFill>
-                <a:latin typeface="Pretendard"/>
-              </a:rPr>
-              <a:t>81%</a:t>
-            </a:r>
-          </a:p>
-        </p:txBody>
-      </p:sp>
-      <p:sp>
-        <p:nvSpPr>
-          <p:cNvPr id="14" name="TextBox 13"/>
-          <p:cNvSpPr txBox="1"/>
-          <p:nvPr/>
-        </p:nvSpPr>
-        <p:spPr>
-          <a:xfrm>
-            <a:off x="7888800" y="4752000"/>
-            <a:ext cx="3584400" cy="360000"/>
-          </a:xfrm>
-          <a:prstGeom prst="rect">
-            <a:avLst/>
-          </a:prstGeom>
-          <a:noFill/>
-        </p:spPr>
-        <p:txBody>
-          <a:bodyPr wrap="square" anchor="t" lIns="36000" rIns="36000" tIns="0" bIns="0">
-            <a:spAutoFit/>
-          </a:bodyPr>
-          <a:lstStyle/>
-          <a:p>
-            <a:pPr algn="ctr">
-              <a:spcAft>
-                <a:spcPts val="0"/>
-              </a:spcAft>
-            </a:pPr>
-            <a:r>
-              <a:rPr sz="1300" b="0">
-                <a:solidFill>
-                  <a:srgbClr val="5A636B"/>
-                </a:solidFill>
-                <a:latin typeface="Pretendard"/>
-              </a:rPr>
-              <a:t>자세가 2 Å 기준 밖</a:t>
+              <a:t>사후성 고지 — 이 기준은 문헌 관행에서 가져왔고 데이터를 본 뒤 명문화했다 (논문 §2.6)</a:t>
             </a:r>
           </a:p>
         </p:txBody>
@@ -7398,7 +8647,7 @@
                 </a:solidFill>
                 <a:latin typeface="Pretendard"/>
               </a:rPr>
-              <a:t>설계</a:t>
+              <a:t>핵심</a:t>
             </a:r>
           </a:p>
         </p:txBody>
@@ -7437,7 +8686,7 @@
                 </a:solidFill>
                 <a:latin typeface="Pretendard"/>
               </a:rPr>
-              <a:t>역가와 골격 유사도를 9칸 격자로 직교화했다</a:t>
+              <a:t>결론부터 — 넷 중 하나도 넘지 못했다</a:t>
             </a:r>
           </a:p>
         </p:txBody>
@@ -7481,30 +8730,52 @@
           </a:p>
         </p:txBody>
       </p:sp>
-      <p:pic>
-        <p:nvPicPr>
-          <p:cNvPr id="6" name="Picture 5" descr="fig02_dataset.png"/>
-          <p:cNvPicPr>
-            <a:picLocks noChangeAspect="1"/>
-          </p:cNvPicPr>
-          <p:nvPr/>
-        </p:nvPicPr>
-        <p:blipFill>
-          <a:blip r:embed="rId3"/>
-          <a:stretch>
-            <a:fillRect/>
-          </a:stretch>
-        </p:blipFill>
-        <p:spPr>
-          <a:xfrm>
-            <a:off x="1034559" y="1440000"/>
-            <a:ext cx="10124082" cy="3168000"/>
-          </a:xfrm>
-          <a:prstGeom prst="rect">
-            <a:avLst/>
-          </a:prstGeom>
-        </p:spPr>
-      </p:pic>
+      <p:sp>
+        <p:nvSpPr>
+          <p:cNvPr id="6" name="Rounded Rectangle 5"/>
+          <p:cNvSpPr/>
+          <p:nvPr/>
+        </p:nvSpPr>
+        <p:spPr>
+          <a:xfrm>
+            <a:off x="720000" y="1440000"/>
+            <a:ext cx="10753200" cy="1224000"/>
+          </a:xfrm>
+          <a:prstGeom prst="roundRect">
+            <a:avLst/>
+          </a:prstGeom>
+          <a:solidFill>
+            <a:srgbClr val="FDF0E6"/>
+          </a:solidFill>
+          <a:ln w="25400">
+            <a:solidFill>
+              <a:srgbClr val="D55E00"/>
+            </a:solidFill>
+          </a:ln>
+          <a:effectLst/>
+        </p:spPr>
+        <p:style>
+          <a:lnRef idx="1">
+            <a:schemeClr val="accent1"/>
+          </a:lnRef>
+          <a:fillRef idx="3">
+            <a:schemeClr val="accent1"/>
+          </a:fillRef>
+          <a:effectRef idx="2">
+            <a:schemeClr val="accent1"/>
+          </a:effectRef>
+          <a:fontRef idx="minor">
+            <a:schemeClr val="lt1"/>
+          </a:fontRef>
+        </p:style>
+        <p:txBody>
+          <a:bodyPr rtlCol="0" anchor="ctr"/>
+          <a:lstStyle/>
+          <a:p>
+            <a:pPr algn="ctr"/>
+          </a:p>
+        </p:txBody>
+      </p:sp>
       <p:sp>
         <p:nvSpPr>
           <p:cNvPr id="7" name="TextBox 6"/>
@@ -7513,8 +8784,8 @@
         </p:nvSpPr>
         <p:spPr>
           <a:xfrm>
-            <a:off x="720000" y="4896000"/>
-            <a:ext cx="10753200" cy="648000"/>
+            <a:off x="936000" y="1692000"/>
+            <a:ext cx="10321200" cy="504000"/>
           </a:xfrm>
           <a:prstGeom prst="rect">
             <a:avLst/>
@@ -7529,33 +8800,469 @@
           <a:p>
             <a:pPr algn="ctr">
               <a:spcAft>
+                <a:spcPts val="0"/>
+              </a:spcAft>
+            </a:pPr>
+            <a:r>
+              <a:rPr sz="3400" b="1">
+                <a:solidFill>
+                  <a:srgbClr val="D55E00"/>
+                </a:solidFill>
+                <a:latin typeface="Pretendard"/>
+              </a:rPr>
+              <a:t>ρ = -0.079    (95% CI -0.23 ~ +0.08,   p = 0.31878)</a:t>
+            </a:r>
+          </a:p>
+        </p:txBody>
+      </p:sp>
+      <p:sp>
+        <p:nvSpPr>
+          <p:cNvPr id="8" name="TextBox 7"/>
+          <p:cNvSpPr txBox="1"/>
+          <p:nvPr/>
+        </p:nvSpPr>
+        <p:spPr>
+          <a:xfrm>
+            <a:off x="720000" y="3024000"/>
+            <a:ext cx="3584400" cy="720000"/>
+          </a:xfrm>
+          <a:prstGeom prst="rect">
+            <a:avLst/>
+          </a:prstGeom>
+          <a:noFill/>
+        </p:spPr>
+        <p:txBody>
+          <a:bodyPr wrap="square" anchor="t" lIns="36000" rIns="36000" tIns="0" bIns="0">
+            <a:spAutoFit/>
+          </a:bodyPr>
+          <a:lstStyle/>
+          <a:p>
+            <a:pPr algn="ctr">
+              <a:spcAft>
+                <a:spcPts val="0"/>
+              </a:spcAft>
+            </a:pPr>
+            <a:r>
+              <a:rPr sz="4800" b="1">
+                <a:solidFill>
+                  <a:srgbClr val="D55E00"/>
+                </a:solidFill>
+                <a:latin typeface="Pretendard"/>
+              </a:rPr>
+              <a:t>-0.018</a:t>
+            </a:r>
+          </a:p>
+        </p:txBody>
+      </p:sp>
+      <p:sp>
+        <p:nvSpPr>
+          <p:cNvPr id="9" name="TextBox 8"/>
+          <p:cNvSpPr txBox="1"/>
+          <p:nvPr/>
+        </p:nvSpPr>
+        <p:spPr>
+          <a:xfrm>
+            <a:off x="720000" y="3816000"/>
+            <a:ext cx="3584400" cy="288000"/>
+          </a:xfrm>
+          <a:prstGeom prst="rect">
+            <a:avLst/>
+          </a:prstGeom>
+          <a:noFill/>
+        </p:spPr>
+        <p:txBody>
+          <a:bodyPr wrap="square" anchor="t" lIns="36000" rIns="36000" tIns="0" bIns="0">
+            <a:spAutoFit/>
+          </a:bodyPr>
+          <a:lstStyle/>
+          <a:p>
+            <a:pPr algn="ctr">
+              <a:spcAft>
+                <a:spcPts val="0"/>
+              </a:spcAft>
+            </a:pPr>
+            <a:r>
+              <a:rPr sz="1500" b="0">
+                <a:solidFill>
+                  <a:srgbClr val="1A1A1A"/>
+                </a:solidFill>
+                <a:latin typeface="Pretendard"/>
+              </a:rPr>
+              <a:t>교차검증 Q²</a:t>
+            </a:r>
+          </a:p>
+        </p:txBody>
+      </p:sp>
+      <p:sp>
+        <p:nvSpPr>
+          <p:cNvPr id="10" name="TextBox 9"/>
+          <p:cNvSpPr txBox="1"/>
+          <p:nvPr/>
+        </p:nvSpPr>
+        <p:spPr>
+          <a:xfrm>
+            <a:off x="720000" y="4140000"/>
+            <a:ext cx="3584400" cy="288000"/>
+          </a:xfrm>
+          <a:prstGeom prst="rect">
+            <a:avLst/>
+          </a:prstGeom>
+          <a:noFill/>
+        </p:spPr>
+        <p:txBody>
+          <a:bodyPr wrap="square" anchor="t" lIns="36000" rIns="36000" tIns="0" bIns="0">
+            <a:spAutoFit/>
+          </a:bodyPr>
+          <a:lstStyle/>
+          <a:p>
+            <a:pPr algn="ctr">
+              <a:spcAft>
+                <a:spcPts val="0"/>
+              </a:spcAft>
+            </a:pPr>
+            <a:r>
+              <a:rPr sz="1300" b="0">
+                <a:solidFill>
+                  <a:srgbClr val="5A636B"/>
+                </a:solidFill>
+                <a:latin typeface="Pretendard"/>
+              </a:rPr>
+              <a:t>기준 0.3  →  미달</a:t>
+            </a:r>
+          </a:p>
+        </p:txBody>
+      </p:sp>
+      <p:sp>
+        <p:nvSpPr>
+          <p:cNvPr id="11" name="TextBox 10"/>
+          <p:cNvSpPr txBox="1"/>
+          <p:nvPr/>
+        </p:nvSpPr>
+        <p:spPr>
+          <a:xfrm>
+            <a:off x="4304400" y="3024000"/>
+            <a:ext cx="3584400" cy="720000"/>
+          </a:xfrm>
+          <a:prstGeom prst="rect">
+            <a:avLst/>
+          </a:prstGeom>
+          <a:noFill/>
+        </p:spPr>
+        <p:txBody>
+          <a:bodyPr wrap="square" anchor="t" lIns="36000" rIns="36000" tIns="0" bIns="0">
+            <a:spAutoFit/>
+          </a:bodyPr>
+          <a:lstStyle/>
+          <a:p>
+            <a:pPr algn="ctr">
+              <a:spcAft>
+                <a:spcPts val="0"/>
+              </a:spcAft>
+            </a:pPr>
+            <a:r>
+              <a:rPr sz="4800" b="1">
+                <a:solidFill>
+                  <a:srgbClr val="D55E00"/>
+                </a:solidFill>
+                <a:latin typeface="Pretendard"/>
+              </a:rPr>
+              <a:t>0.574</a:t>
+            </a:r>
+          </a:p>
+        </p:txBody>
+      </p:sp>
+      <p:sp>
+        <p:nvSpPr>
+          <p:cNvPr id="12" name="TextBox 11"/>
+          <p:cNvSpPr txBox="1"/>
+          <p:nvPr/>
+        </p:nvSpPr>
+        <p:spPr>
+          <a:xfrm>
+            <a:off x="4304400" y="3816000"/>
+            <a:ext cx="3584400" cy="288000"/>
+          </a:xfrm>
+          <a:prstGeom prst="rect">
+            <a:avLst/>
+          </a:prstGeom>
+          <a:noFill/>
+        </p:spPr>
+        <p:txBody>
+          <a:bodyPr wrap="square" anchor="t" lIns="36000" rIns="36000" tIns="0" bIns="0">
+            <a:spAutoFit/>
+          </a:bodyPr>
+          <a:lstStyle/>
+          <a:p>
+            <a:pPr algn="ctr">
+              <a:spcAft>
+                <a:spcPts val="0"/>
+              </a:spcAft>
+            </a:pPr>
+            <a:r>
+              <a:rPr sz="1500" b="0">
+                <a:solidFill>
+                  <a:srgbClr val="1A1A1A"/>
+                </a:solidFill>
+                <a:latin typeface="Pretendard"/>
+              </a:rPr>
+              <a:t>ROC-AUC 전체</a:t>
+            </a:r>
+          </a:p>
+        </p:txBody>
+      </p:sp>
+      <p:sp>
+        <p:nvSpPr>
+          <p:cNvPr id="13" name="TextBox 12"/>
+          <p:cNvSpPr txBox="1"/>
+          <p:nvPr/>
+        </p:nvSpPr>
+        <p:spPr>
+          <a:xfrm>
+            <a:off x="4304400" y="4140000"/>
+            <a:ext cx="3584400" cy="288000"/>
+          </a:xfrm>
+          <a:prstGeom prst="rect">
+            <a:avLst/>
+          </a:prstGeom>
+          <a:noFill/>
+        </p:spPr>
+        <p:txBody>
+          <a:bodyPr wrap="square" anchor="t" lIns="36000" rIns="36000" tIns="0" bIns="0">
+            <a:spAutoFit/>
+          </a:bodyPr>
+          <a:lstStyle/>
+          <a:p>
+            <a:pPr algn="ctr">
+              <a:spcAft>
+                <a:spcPts val="0"/>
+              </a:spcAft>
+            </a:pPr>
+            <a:r>
+              <a:rPr sz="1300" b="0">
+                <a:solidFill>
+                  <a:srgbClr val="5A636B"/>
+                </a:solidFill>
+                <a:latin typeface="Pretendard"/>
+              </a:rPr>
+              <a:t>기준 0.7  →  미달</a:t>
+            </a:r>
+          </a:p>
+        </p:txBody>
+      </p:sp>
+      <p:sp>
+        <p:nvSpPr>
+          <p:cNvPr id="14" name="TextBox 13"/>
+          <p:cNvSpPr txBox="1"/>
+          <p:nvPr/>
+        </p:nvSpPr>
+        <p:spPr>
+          <a:xfrm>
+            <a:off x="7888800" y="3024000"/>
+            <a:ext cx="3584400" cy="720000"/>
+          </a:xfrm>
+          <a:prstGeom prst="rect">
+            <a:avLst/>
+          </a:prstGeom>
+          <a:noFill/>
+        </p:spPr>
+        <p:txBody>
+          <a:bodyPr wrap="square" anchor="t" lIns="36000" rIns="36000" tIns="0" bIns="0">
+            <a:spAutoFit/>
+          </a:bodyPr>
+          <a:lstStyle/>
+          <a:p>
+            <a:pPr algn="ctr">
+              <a:spcAft>
+                <a:spcPts val="0"/>
+              </a:spcAft>
+            </a:pPr>
+            <a:r>
+              <a:rPr sz="4800" b="1">
+                <a:solidFill>
+                  <a:srgbClr val="D55E00"/>
+                </a:solidFill>
+                <a:latin typeface="Pretendard"/>
+              </a:rPr>
+              <a:t>0.31878</a:t>
+            </a:r>
+          </a:p>
+        </p:txBody>
+      </p:sp>
+      <p:sp>
+        <p:nvSpPr>
+          <p:cNvPr id="15" name="TextBox 14"/>
+          <p:cNvSpPr txBox="1"/>
+          <p:nvPr/>
+        </p:nvSpPr>
+        <p:spPr>
+          <a:xfrm>
+            <a:off x="7888800" y="3816000"/>
+            <a:ext cx="3584400" cy="288000"/>
+          </a:xfrm>
+          <a:prstGeom prst="rect">
+            <a:avLst/>
+          </a:prstGeom>
+          <a:noFill/>
+        </p:spPr>
+        <p:txBody>
+          <a:bodyPr wrap="square" anchor="t" lIns="36000" rIns="36000" tIns="0" bIns="0">
+            <a:spAutoFit/>
+          </a:bodyPr>
+          <a:lstStyle/>
+          <a:p>
+            <a:pPr algn="ctr">
+              <a:spcAft>
+                <a:spcPts val="0"/>
+              </a:spcAft>
+            </a:pPr>
+            <a:r>
+              <a:rPr sz="1500" b="0">
+                <a:solidFill>
+                  <a:srgbClr val="1A1A1A"/>
+                </a:solidFill>
+                <a:latin typeface="Pretendard"/>
+              </a:rPr>
+              <a:t>순열 검정 p</a:t>
+            </a:r>
+          </a:p>
+        </p:txBody>
+      </p:sp>
+      <p:sp>
+        <p:nvSpPr>
+          <p:cNvPr id="16" name="TextBox 15"/>
+          <p:cNvSpPr txBox="1"/>
+          <p:nvPr/>
+        </p:nvSpPr>
+        <p:spPr>
+          <a:xfrm>
+            <a:off x="7888800" y="4140000"/>
+            <a:ext cx="3584400" cy="288000"/>
+          </a:xfrm>
+          <a:prstGeom prst="rect">
+            <a:avLst/>
+          </a:prstGeom>
+          <a:noFill/>
+        </p:spPr>
+        <p:txBody>
+          <a:bodyPr wrap="square" anchor="t" lIns="36000" rIns="36000" tIns="0" bIns="0">
+            <a:spAutoFit/>
+          </a:bodyPr>
+          <a:lstStyle/>
+          <a:p>
+            <a:pPr algn="ctr">
+              <a:spcAft>
+                <a:spcPts val="0"/>
+              </a:spcAft>
+            </a:pPr>
+            <a:r>
+              <a:rPr sz="1300" b="0">
+                <a:solidFill>
+                  <a:srgbClr val="5A636B"/>
+                </a:solidFill>
+                <a:latin typeface="Pretendard"/>
+              </a:rPr>
+              <a:t>기준 0.05  →  미달</a:t>
+            </a:r>
+          </a:p>
+        </p:txBody>
+      </p:sp>
+      <p:sp>
+        <p:nvSpPr>
+          <p:cNvPr id="17" name="Rounded Rectangle 16"/>
+          <p:cNvSpPr/>
+          <p:nvPr/>
+        </p:nvSpPr>
+        <p:spPr>
+          <a:xfrm>
+            <a:off x="720000" y="4680000"/>
+            <a:ext cx="10753200" cy="1080000"/>
+          </a:xfrm>
+          <a:prstGeom prst="roundRect">
+            <a:avLst/>
+          </a:prstGeom>
+          <a:solidFill>
+            <a:srgbClr val="F3F5F7"/>
+          </a:solidFill>
+          <a:ln w="17780">
+            <a:solidFill>
+              <a:srgbClr val="0B2A4A"/>
+            </a:solidFill>
+          </a:ln>
+          <a:effectLst/>
+        </p:spPr>
+        <p:style>
+          <a:lnRef idx="1">
+            <a:schemeClr val="accent1"/>
+          </a:lnRef>
+          <a:fillRef idx="3">
+            <a:schemeClr val="accent1"/>
+          </a:fillRef>
+          <a:effectRef idx="2">
+            <a:schemeClr val="accent1"/>
+          </a:effectRef>
+          <a:fontRef idx="minor">
+            <a:schemeClr val="lt1"/>
+          </a:fontRef>
+        </p:style>
+        <p:txBody>
+          <a:bodyPr rtlCol="0" anchor="ctr"/>
+          <a:lstStyle/>
+          <a:p>
+            <a:pPr algn="ctr"/>
+          </a:p>
+        </p:txBody>
+      </p:sp>
+      <p:sp>
+        <p:nvSpPr>
+          <p:cNvPr id="18" name="TextBox 17"/>
+          <p:cNvSpPr txBox="1"/>
+          <p:nvPr/>
+        </p:nvSpPr>
+        <p:spPr>
+          <a:xfrm>
+            <a:off x="936000" y="4860000"/>
+            <a:ext cx="10321200" cy="792000"/>
+          </a:xfrm>
+          <a:prstGeom prst="rect">
+            <a:avLst/>
+          </a:prstGeom>
+          <a:noFill/>
+        </p:spPr>
+        <p:txBody>
+          <a:bodyPr wrap="square" anchor="t" lIns="36000" rIns="36000" tIns="0" bIns="0">
+            <a:spAutoFit/>
+          </a:bodyPr>
+          <a:lstStyle/>
+          <a:p>
+            <a:pPr algn="l">
+              <a:spcAft>
                 <a:spcPts val="300"/>
               </a:spcAft>
             </a:pPr>
             <a:r>
+              <a:rPr sz="1900" b="1">
+                <a:solidFill>
+                  <a:srgbClr val="0B2A4A"/>
+                </a:solidFill>
+                <a:latin typeface="Pretendard"/>
+              </a:rPr>
+              <a:t>“신호 없음” 은 귀무를 채택한 것이 아니다</a:t>
+            </a:r>
+          </a:p>
+          <a:p>
+            <a:pPr algn="l">
+              <a:spcAft>
+                <a:spcPts val="300"/>
+              </a:spcAft>
+            </a:pPr>
+            <a:r>
               <a:rPr sz="1500" b="0">
                 <a:solidFill>
                   <a:srgbClr val="1A1A1A"/>
                 </a:solidFill>
                 <a:latin typeface="Pretendard"/>
               </a:rPr>
-              <a:t>ChEMBL PDE5A 활성 2538 레코드 전수 → 화합물당 중앙값 (2158종) → 9칸 격자 균등 추출 n = 163</a:t>
-            </a:r>
-          </a:p>
-          <a:p>
-            <a:pPr algn="ctr">
-              <a:spcAft>
-                <a:spcPts val="300"/>
-              </a:spcAft>
-            </a:pPr>
-            <a:r>
-              <a:rPr sz="1600" b="1">
-                <a:solidFill>
-                  <a:srgbClr val="009E73"/>
-                </a:solidFill>
-                <a:latin typeface="Pretendard"/>
-              </a:rPr>
-              <a:t>교란 상관 Pearson +0.175  (역가로만 층화한 옛 설계 +0.281)</a:t>
+              <a:t>신뢰구간 상한이 +0.08 이므로 |ρ| ≲ 0.23 인 관계는 이 데이터로 배제하지 못한다. 기각하지 못한 것이지 없다고 보인 것이 아니다.</a:t>
             </a:r>
           </a:p>
         </p:txBody>
@@ -7656,7 +9363,7 @@
                 </a:solidFill>
                 <a:latin typeface="Pretendard"/>
               </a:rPr>
-              <a:t>방법</a:t>
+              <a:t>설계</a:t>
             </a:r>
           </a:p>
         </p:txBody>
@@ -7695,7 +9402,7 @@
                 </a:solidFill>
                 <a:latin typeface="Pretendard"/>
               </a:rPr>
-              <a:t>재도킹 대조는 하나가 아니라 둘로 쪼개야 한다</a:t>
+              <a:t>역가와 골격 유사도를 9칸 격자로 직교화했다</a:t>
             </a:r>
           </a:p>
         </p:txBody>
@@ -7741,7 +9448,7 @@
       </p:sp>
       <p:pic>
         <p:nvPicPr>
-          <p:cNvPr id="6" name="Picture 5" descr="fig03_control.png"/>
+          <p:cNvPr id="6" name="Picture 5" descr="fig02_dataset.png"/>
           <p:cNvPicPr>
             <a:picLocks noChangeAspect="1"/>
           </p:cNvPicPr>
@@ -7755,8 +9462,8 @@
         </p:blipFill>
         <p:spPr>
           <a:xfrm>
-            <a:off x="2641278" y="1368000"/>
-            <a:ext cx="6910643" cy="3384000"/>
+            <a:off x="804465" y="1368000"/>
+            <a:ext cx="10584268" cy="3312000"/>
           </a:xfrm>
           <a:prstGeom prst="rect">
             <a:avLst/>
@@ -7765,58 +9472,14 @@
       </p:pic>
       <p:sp>
         <p:nvSpPr>
-          <p:cNvPr id="7" name="Rounded Rectangle 6"/>
-          <p:cNvSpPr/>
-          <p:nvPr/>
-        </p:nvSpPr>
-        <p:spPr>
-          <a:xfrm>
-            <a:off x="2160000" y="4968000"/>
-            <a:ext cx="3600000" cy="792000"/>
-          </a:xfrm>
-          <a:prstGeom prst="roundRect">
-            <a:avLst/>
-          </a:prstGeom>
-          <a:solidFill>
-            <a:srgbClr val="009E73"/>
-          </a:solidFill>
-          <a:ln>
-            <a:noFill/>
-          </a:ln>
-          <a:effectLst/>
-        </p:spPr>
-        <p:style>
-          <a:lnRef idx="1">
-            <a:schemeClr val="accent1"/>
-          </a:lnRef>
-          <a:fillRef idx="3">
-            <a:schemeClr val="accent1"/>
-          </a:fillRef>
-          <a:effectRef idx="2">
-            <a:schemeClr val="accent1"/>
-          </a:effectRef>
-          <a:fontRef idx="minor">
-            <a:schemeClr val="lt1"/>
-          </a:fontRef>
-        </p:style>
-        <p:txBody>
-          <a:bodyPr rtlCol="0" anchor="ctr"/>
-          <a:lstStyle/>
-          <a:p>
-            <a:pPr algn="ctr"/>
-          </a:p>
-        </p:txBody>
-      </p:sp>
-      <p:sp>
-        <p:nvSpPr>
-          <p:cNvPr id="8" name="TextBox 7"/>
-          <p:cNvSpPr txBox="1"/>
-          <p:nvPr/>
-        </p:nvSpPr>
-        <p:spPr>
-          <a:xfrm>
-            <a:off x="2376000" y="5112000"/>
-            <a:ext cx="3168000" cy="504000"/>
+          <p:cNvPr id="7" name="TextBox 6"/>
+          <p:cNvSpPr txBox="1"/>
+          <p:nvPr/>
+        </p:nvSpPr>
+        <p:spPr>
+          <a:xfrm>
+            <a:off x="720000" y="4896000"/>
+            <a:ext cx="10753200" cy="648000"/>
           </a:xfrm>
           <a:prstGeom prst="rect">
             <a:avLst/>
@@ -7831,100 +9494,33 @@
           <a:p>
             <a:pPr algn="ctr">
               <a:spcAft>
-                <a:spcPts val="0"/>
-              </a:spcAft>
-            </a:pPr>
-            <a:r>
-              <a:rPr sz="1900" b="1">
-                <a:solidFill>
-                  <a:srgbClr val="FFFFFF"/>
-                </a:solidFill>
-                <a:latin typeface="Pretendard"/>
-              </a:rPr>
-              <a:t>C1  샘플링   1.08 Å   PASS</a:t>
-            </a:r>
-          </a:p>
-        </p:txBody>
-      </p:sp>
-      <p:sp>
-        <p:nvSpPr>
-          <p:cNvPr id="9" name="Rounded Rectangle 8"/>
-          <p:cNvSpPr/>
-          <p:nvPr/>
-        </p:nvSpPr>
-        <p:spPr>
-          <a:xfrm>
-            <a:off x="6120000" y="4968000"/>
-            <a:ext cx="3600000" cy="792000"/>
-          </a:xfrm>
-          <a:prstGeom prst="roundRect">
-            <a:avLst/>
-          </a:prstGeom>
-          <a:solidFill>
-            <a:srgbClr val="D55E00"/>
-          </a:solidFill>
-          <a:ln>
-            <a:noFill/>
-          </a:ln>
-          <a:effectLst/>
-        </p:spPr>
-        <p:style>
-          <a:lnRef idx="1">
-            <a:schemeClr val="accent1"/>
-          </a:lnRef>
-          <a:fillRef idx="3">
-            <a:schemeClr val="accent1"/>
-          </a:fillRef>
-          <a:effectRef idx="2">
-            <a:schemeClr val="accent1"/>
-          </a:effectRef>
-          <a:fontRef idx="minor">
-            <a:schemeClr val="lt1"/>
-          </a:fontRef>
-        </p:style>
-        <p:txBody>
-          <a:bodyPr rtlCol="0" anchor="ctr"/>
-          <a:lstStyle/>
-          <a:p>
-            <a:pPr algn="ctr"/>
-          </a:p>
-        </p:txBody>
-      </p:sp>
-      <p:sp>
-        <p:nvSpPr>
-          <p:cNvPr id="10" name="TextBox 9"/>
-          <p:cNvSpPr txBox="1"/>
-          <p:nvPr/>
-        </p:nvSpPr>
-        <p:spPr>
-          <a:xfrm>
-            <a:off x="6336000" y="5112000"/>
-            <a:ext cx="3168000" cy="504000"/>
-          </a:xfrm>
-          <a:prstGeom prst="rect">
-            <a:avLst/>
-          </a:prstGeom>
-          <a:noFill/>
-        </p:spPr>
-        <p:txBody>
-          <a:bodyPr wrap="square" anchor="t" lIns="36000" rIns="36000" tIns="0" bIns="0">
-            <a:spAutoFit/>
-          </a:bodyPr>
-          <a:lstStyle/>
+                <a:spcPts val="300"/>
+              </a:spcAft>
+            </a:pPr>
+            <a:r>
+              <a:rPr sz="1500" b="0">
+                <a:solidFill>
+                  <a:srgbClr val="1A1A1A"/>
+                </a:solidFill>
+                <a:latin typeface="Pretendard"/>
+              </a:rPr>
+              <a:t>ChEMBL PDE5A 활성 2538 레코드 전수 → 화합물당 중앙값 (2158종) → 9칸 격자 균등 추출 n = 163</a:t>
+            </a:r>
+          </a:p>
           <a:p>
             <a:pPr algn="ctr">
               <a:spcAft>
-                <a:spcPts val="0"/>
-              </a:spcAft>
-            </a:pPr>
-            <a:r>
-              <a:rPr sz="1900" b="1">
-                <a:solidFill>
-                  <a:srgbClr val="FFFFFF"/>
-                </a:solidFill>
-                <a:latin typeface="Pretendard"/>
-              </a:rPr>
-              <a:t>C2  채점   8.37 Å   FAIL</a:t>
+                <a:spcPts val="300"/>
+              </a:spcAft>
+            </a:pPr>
+            <a:r>
+              <a:rPr sz="1700" b="1">
+                <a:solidFill>
+                  <a:srgbClr val="009E73"/>
+                </a:solidFill>
+                <a:latin typeface="Pretendard"/>
+              </a:rPr>
+              <a:t>교란 상관 Pearson +0.175   (역가로만 층화한 옛 설계 +0.281)</a:t>
             </a:r>
           </a:p>
         </p:txBody>
@@ -8025,7 +9621,7 @@
                 </a:solidFill>
                 <a:latin typeface="Pretendard"/>
               </a:rPr>
-              <a:t>원인 배제 ①</a:t>
+              <a:t>해석의 상한</a:t>
             </a:r>
           </a:p>
         </p:txBody>
@@ -8064,7 +9660,7 @@
                 </a:solidFill>
                 <a:latin typeface="Pretendard"/>
               </a:rPr>
-              <a:t>탐색을 32배 늘려도 채점은 미동도 없었다</a:t>
+              <a:t>재도킹 대조를 쪼개니 채점이 실패했다 — 163개 중 81%가 같은 실패다</a:t>
             </a:r>
           </a:p>
         </p:txBody>
@@ -8110,7 +9706,7 @@
       </p:sp>
       <p:pic>
         <p:nvPicPr>
-          <p:cNvPr id="6" name="Picture 5" descr="fig08_exhaustiveness.png"/>
+          <p:cNvPr id="6" name="Picture 5" descr="fig03_control.png"/>
           <p:cNvPicPr>
             <a:picLocks noChangeAspect="1"/>
           </p:cNvPicPr>
@@ -8124,8 +9720,8 @@
         </p:blipFill>
         <p:spPr>
           <a:xfrm>
-            <a:off x="985768" y="1368000"/>
-            <a:ext cx="10221664" cy="3744000"/>
+            <a:off x="360000" y="1296000"/>
+            <a:ext cx="6336000" cy="3102609"/>
           </a:xfrm>
           <a:prstGeom prst="rect">
             <a:avLst/>
@@ -8134,14 +9730,58 @@
       </p:pic>
       <p:sp>
         <p:nvSpPr>
-          <p:cNvPr id="7" name="TextBox 6"/>
-          <p:cNvSpPr txBox="1"/>
-          <p:nvPr/>
-        </p:nvSpPr>
-        <p:spPr>
-          <a:xfrm>
-            <a:off x="720000" y="5328000"/>
-            <a:ext cx="10753200" cy="432000"/>
+          <p:cNvPr id="7" name="Rounded Rectangle 6"/>
+          <p:cNvSpPr/>
+          <p:nvPr/>
+        </p:nvSpPr>
+        <p:spPr>
+          <a:xfrm>
+            <a:off x="7056000" y="1440000"/>
+            <a:ext cx="4752000" cy="684000"/>
+          </a:xfrm>
+          <a:prstGeom prst="roundRect">
+            <a:avLst/>
+          </a:prstGeom>
+          <a:solidFill>
+            <a:srgbClr val="009E73"/>
+          </a:solidFill>
+          <a:ln>
+            <a:noFill/>
+          </a:ln>
+          <a:effectLst/>
+        </p:spPr>
+        <p:style>
+          <a:lnRef idx="1">
+            <a:schemeClr val="accent1"/>
+          </a:lnRef>
+          <a:fillRef idx="3">
+            <a:schemeClr val="accent1"/>
+          </a:fillRef>
+          <a:effectRef idx="2">
+            <a:schemeClr val="accent1"/>
+          </a:effectRef>
+          <a:fontRef idx="minor">
+            <a:schemeClr val="lt1"/>
+          </a:fontRef>
+        </p:style>
+        <p:txBody>
+          <a:bodyPr rtlCol="0" anchor="ctr"/>
+          <a:lstStyle/>
+          <a:p>
+            <a:pPr algn="ctr"/>
+          </a:p>
+        </p:txBody>
+      </p:sp>
+      <p:sp>
+        <p:nvSpPr>
+          <p:cNvPr id="8" name="TextBox 7"/>
+          <p:cNvSpPr txBox="1"/>
+          <p:nvPr/>
+        </p:nvSpPr>
+        <p:spPr>
+          <a:xfrm>
+            <a:off x="7200000" y="1548000"/>
+            <a:ext cx="4464000" cy="468000"/>
           </a:xfrm>
           <a:prstGeom prst="rect">
             <a:avLst/>
@@ -8160,49 +9800,252 @@
               </a:spcAft>
             </a:pPr>
             <a:r>
-              <a:rPr sz="1700" b="1">
-                <a:solidFill>
-                  <a:srgbClr val="009E73"/>
-                </a:solidFill>
-                <a:latin typeface="Pretendard"/>
-              </a:rPr>
-              <a:t>C1 통과율 0% → 100%</a:t>
-            </a:r>
-            <a:r>
-              <a:rPr sz="1700" b="0">
+              <a:rPr sz="1800" b="1">
+                <a:solidFill>
+                  <a:srgbClr val="FFFFFF"/>
+                </a:solidFill>
+                <a:latin typeface="Pretendard"/>
+              </a:rPr>
+              <a:t>C1  샘플링   1.08 Å   PASS</a:t>
+            </a:r>
+          </a:p>
+        </p:txBody>
+      </p:sp>
+      <p:sp>
+        <p:nvSpPr>
+          <p:cNvPr id="9" name="Rounded Rectangle 8"/>
+          <p:cNvSpPr/>
+          <p:nvPr/>
+        </p:nvSpPr>
+        <p:spPr>
+          <a:xfrm>
+            <a:off x="7056000" y="2232000"/>
+            <a:ext cx="4752000" cy="684000"/>
+          </a:xfrm>
+          <a:prstGeom prst="roundRect">
+            <a:avLst/>
+          </a:prstGeom>
+          <a:solidFill>
+            <a:srgbClr val="D55E00"/>
+          </a:solidFill>
+          <a:ln>
+            <a:noFill/>
+          </a:ln>
+          <a:effectLst/>
+        </p:spPr>
+        <p:style>
+          <a:lnRef idx="1">
+            <a:schemeClr val="accent1"/>
+          </a:lnRef>
+          <a:fillRef idx="3">
+            <a:schemeClr val="accent1"/>
+          </a:fillRef>
+          <a:effectRef idx="2">
+            <a:schemeClr val="accent1"/>
+          </a:effectRef>
+          <a:fontRef idx="minor">
+            <a:schemeClr val="lt1"/>
+          </a:fontRef>
+        </p:style>
+        <p:txBody>
+          <a:bodyPr rtlCol="0" anchor="ctr"/>
+          <a:lstStyle/>
+          <a:p>
+            <a:pPr algn="ctr"/>
+          </a:p>
+        </p:txBody>
+      </p:sp>
+      <p:sp>
+        <p:nvSpPr>
+          <p:cNvPr id="10" name="TextBox 9"/>
+          <p:cNvSpPr txBox="1"/>
+          <p:nvPr/>
+        </p:nvSpPr>
+        <p:spPr>
+          <a:xfrm>
+            <a:off x="7200000" y="2340000"/>
+            <a:ext cx="4464000" cy="468000"/>
+          </a:xfrm>
+          <a:prstGeom prst="rect">
+            <a:avLst/>
+          </a:prstGeom>
+          <a:noFill/>
+        </p:spPr>
+        <p:txBody>
+          <a:bodyPr wrap="square" anchor="t" lIns="36000" rIns="36000" tIns="0" bIns="0">
+            <a:spAutoFit/>
+          </a:bodyPr>
+          <a:lstStyle/>
+          <a:p>
+            <a:pPr algn="ctr">
+              <a:spcAft>
+                <a:spcPts val="0"/>
+              </a:spcAft>
+            </a:pPr>
+            <a:r>
+              <a:rPr sz="1800" b="1">
+                <a:solidFill>
+                  <a:srgbClr val="FFFFFF"/>
+                </a:solidFill>
+                <a:latin typeface="Pretendard"/>
+              </a:rPr>
+              <a:t>C2  채점   8.37 Å   FAIL</a:t>
+            </a:r>
+          </a:p>
+        </p:txBody>
+      </p:sp>
+      <p:sp>
+        <p:nvSpPr>
+          <p:cNvPr id="11" name="Rounded Rectangle 10"/>
+          <p:cNvSpPr/>
+          <p:nvPr/>
+        </p:nvSpPr>
+        <p:spPr>
+          <a:xfrm>
+            <a:off x="7056000" y="3168000"/>
+            <a:ext cx="4752000" cy="1656000"/>
+          </a:xfrm>
+          <a:prstGeom prst="roundRect">
+            <a:avLst/>
+          </a:prstGeom>
+          <a:solidFill>
+            <a:srgbClr val="FDF0E6"/>
+          </a:solidFill>
+          <a:ln w="20320">
+            <a:solidFill>
+              <a:srgbClr val="D55E00"/>
+            </a:solidFill>
+          </a:ln>
+          <a:effectLst/>
+        </p:spPr>
+        <p:style>
+          <a:lnRef idx="1">
+            <a:schemeClr val="accent1"/>
+          </a:lnRef>
+          <a:fillRef idx="3">
+            <a:schemeClr val="accent1"/>
+          </a:fillRef>
+          <a:effectRef idx="2">
+            <a:schemeClr val="accent1"/>
+          </a:effectRef>
+          <a:fontRef idx="minor">
+            <a:schemeClr val="lt1"/>
+          </a:fontRef>
+        </p:style>
+        <p:txBody>
+          <a:bodyPr rtlCol="0" anchor="ctr"/>
+          <a:lstStyle/>
+          <a:p>
+            <a:pPr algn="ctr"/>
+          </a:p>
+        </p:txBody>
+      </p:sp>
+      <p:sp>
+        <p:nvSpPr>
+          <p:cNvPr id="12" name="TextBox 11"/>
+          <p:cNvSpPr txBox="1"/>
+          <p:nvPr/>
+        </p:nvSpPr>
+        <p:spPr>
+          <a:xfrm>
+            <a:off x="7200000" y="3312000"/>
+            <a:ext cx="4464000" cy="1440000"/>
+          </a:xfrm>
+          <a:prstGeom prst="rect">
+            <a:avLst/>
+          </a:prstGeom>
+          <a:noFill/>
+        </p:spPr>
+        <p:txBody>
+          <a:bodyPr wrap="square" anchor="t" lIns="36000" rIns="36000" tIns="0" bIns="0">
+            <a:spAutoFit/>
+          </a:bodyPr>
+          <a:lstStyle/>
+          <a:p>
+            <a:pPr algn="l">
+              <a:spcAft>
+                <a:spcPts val="300"/>
+              </a:spcAft>
+            </a:pPr>
+            <a:r>
+              <a:rPr sz="1600" b="1">
+                <a:solidFill>
+                  <a:srgbClr val="D55E00"/>
+                </a:solidFill>
+                <a:latin typeface="Pretendard"/>
+              </a:rPr>
+              <a:t>그리고 이건 n=1 이 아니다</a:t>
+            </a:r>
+          </a:p>
+          <a:p>
+            <a:pPr algn="l">
+              <a:spcAft>
+                <a:spcPts val="300"/>
+              </a:spcAft>
+            </a:pPr>
+            <a:r>
+              <a:rPr sz="1400" b="0">
                 <a:solidFill>
                   <a:srgbClr val="1A1A1A"/>
                 </a:solidFill>
                 <a:latin typeface="Pretendard"/>
               </a:rPr>
-              <a:t>      </a:t>
-            </a:r>
-            <a:r>
-              <a:rPr sz="1700" b="1">
+              <a:t>163개 전체 1위 자세의 MCS-RMSD 중앙값 4.50 Å, 2 Å 기준 통과 19.0%</a:t>
+            </a:r>
+          </a:p>
+          <a:p>
+            <a:pPr algn="l">
+              <a:spcAft>
+                <a:spcPts val="300"/>
+              </a:spcAft>
+            </a:pPr>
+            <a:r>
+              <a:rPr sz="1400" b="1">
                 <a:solidFill>
                   <a:srgbClr val="D55E00"/>
                 </a:solidFill>
                 <a:latin typeface="Pretendard"/>
               </a:rPr>
-              <a:t>C2 전 구간 0%, 변동 0.025 Å</a:t>
-            </a:r>
-            <a:r>
-              <a:rPr sz="1700" b="0">
-                <a:solidFill>
-                  <a:srgbClr val="1A1A1A"/>
-                </a:solidFill>
-                <a:latin typeface="Pretendard"/>
-              </a:rPr>
-              <a:t>      </a:t>
-            </a:r>
-            <a:r>
-              <a:rPr sz="1700" b="1">
-                <a:solidFill>
-                  <a:srgbClr val="D55E00"/>
-                </a:solidFill>
-                <a:latin typeface="Pretendard"/>
-              </a:rPr>
-              <a:t>최고 점수 변동 0.0 kcal/mol</a:t>
+              <a:t>→ 뒤에 나오는 상관은 대부분 틀린 자세에 매긴 점수에 대한 것이다</a:t>
+            </a:r>
+          </a:p>
+        </p:txBody>
+      </p:sp>
+      <p:sp>
+        <p:nvSpPr>
+          <p:cNvPr id="13" name="TextBox 12"/>
+          <p:cNvSpPr txBox="1"/>
+          <p:nvPr/>
+        </p:nvSpPr>
+        <p:spPr>
+          <a:xfrm>
+            <a:off x="360000" y="5040000"/>
+            <a:ext cx="11473200" cy="504000"/>
+          </a:xfrm>
+          <a:prstGeom prst="rect">
+            <a:avLst/>
+          </a:prstGeom>
+          <a:noFill/>
+        </p:spPr>
+        <p:txBody>
+          <a:bodyPr wrap="square" anchor="t" lIns="36000" rIns="36000" tIns="0" bIns="0">
+            <a:spAutoFit/>
+          </a:bodyPr>
+          <a:lstStyle/>
+          <a:p>
+            <a:pPr algn="ctr">
+              <a:spcAft>
+                <a:spcPts val="0"/>
+              </a:spcAft>
+            </a:pPr>
+            <a:r>
+              <a:rPr sz="1500" b="1">
+                <a:solidFill>
+                  <a:srgbClr val="0B2A4A"/>
+                </a:solidFill>
+                <a:latin typeface="Pretendard"/>
+              </a:rPr>
+              <a:t>공결정 리간드 재도킹의 C2 실패는 예외가 아니라 전체의 축소판이다 — 같은 기준, 같은 실패, 163배 규모</a:t>
             </a:r>
           </a:p>
         </p:txBody>
@@ -8303,7 +10146,7 @@
                 </a:solidFill>
                 <a:latin typeface="Pretendard"/>
               </a:rPr>
-              <a:t>원인 배제 ②</a:t>
+              <a:t>C2 실패 원인 배제 ①</a:t>
             </a:r>
           </a:p>
         </p:txBody>
@@ -8342,7 +10185,7 @@
                 </a:solidFill>
                 <a:latin typeface="Pretendard"/>
               </a:rPr>
-              <a:t>프로토네이션도 원인이 아니었다 — 그리고 그럴 수 없었다</a:t>
+              <a:t>탐색을 32배 늘려도 채점은 미동도 없었다</a:t>
             </a:r>
           </a:p>
         </p:txBody>
@@ -8386,16 +10229,40 @@
           </a:p>
         </p:txBody>
       </p:sp>
-      <p:sp>
-        <p:nvSpPr>
-          <p:cNvPr id="6" name="TextBox 5"/>
-          <p:cNvSpPr txBox="1"/>
-          <p:nvPr/>
-        </p:nvSpPr>
-        <p:spPr>
-          <a:xfrm>
-            <a:off x="792000" y="1440000"/>
-            <a:ext cx="5400000" cy="288000"/>
+      <p:pic>
+        <p:nvPicPr>
+          <p:cNvPr id="6" name="Picture 5" descr="fig08_exhaustiveness.png"/>
+          <p:cNvPicPr>
+            <a:picLocks noChangeAspect="1"/>
+          </p:cNvPicPr>
+          <p:nvPr/>
+        </p:nvPicPr>
+        <p:blipFill>
+          <a:blip r:embed="rId3"/>
+          <a:stretch>
+            <a:fillRect/>
+          </a:stretch>
+        </p:blipFill>
+        <p:spPr>
+          <a:xfrm>
+            <a:off x="985768" y="1368000"/>
+            <a:ext cx="10221664" cy="3744000"/>
+          </a:xfrm>
+          <a:prstGeom prst="rect">
+            <a:avLst/>
+          </a:prstGeom>
+        </p:spPr>
+      </p:pic>
+      <p:sp>
+        <p:nvSpPr>
+          <p:cNvPr id="7" name="TextBox 6"/>
+          <p:cNvSpPr txBox="1"/>
+          <p:nvPr/>
+        </p:nvSpPr>
+        <p:spPr>
+          <a:xfrm>
+            <a:off x="720000" y="5328000"/>
+            <a:ext cx="10753200" cy="432000"/>
           </a:xfrm>
           <a:prstGeom prst="rect">
             <a:avLst/>
@@ -8408,1232 +10275,55 @@
           </a:bodyPr>
           <a:lstStyle/>
           <a:p>
-            <a:pPr algn="l">
+            <a:pPr algn="ctr">
               <a:spcAft>
                 <a:spcPts val="0"/>
               </a:spcAft>
             </a:pPr>
             <a:r>
-              <a:rPr sz="1400" b="1">
-                <a:solidFill>
-                  <a:srgbClr val="5A636B"/>
-                </a:solidFill>
-                <a:latin typeface="Pretendard"/>
-              </a:rPr>
-              <a:t>조건</a:t>
-            </a:r>
-          </a:p>
-        </p:txBody>
-      </p:sp>
-      <p:sp>
-        <p:nvSpPr>
-          <p:cNvPr id="7" name="TextBox 6"/>
-          <p:cNvSpPr txBox="1"/>
-          <p:nvPr/>
-        </p:nvSpPr>
-        <p:spPr>
-          <a:xfrm>
-            <a:off x="6480000" y="1440000"/>
-            <a:ext cx="1296000" cy="288000"/>
-          </a:xfrm>
-          <a:prstGeom prst="rect">
-            <a:avLst/>
-          </a:prstGeom>
-          <a:noFill/>
-        </p:spPr>
-        <p:txBody>
-          <a:bodyPr wrap="square" anchor="t" lIns="36000" rIns="36000" tIns="0" bIns="0">
-            <a:spAutoFit/>
-          </a:bodyPr>
-          <a:lstStyle/>
-          <a:p>
-            <a:pPr algn="ctr">
-              <a:spcAft>
-                <a:spcPts val="0"/>
-              </a:spcAft>
-            </a:pPr>
-            <a:r>
-              <a:rPr sz="1400" b="1">
-                <a:solidFill>
-                  <a:srgbClr val="5A636B"/>
-                </a:solidFill>
-                <a:latin typeface="Pretendard"/>
-              </a:rPr>
-              <a:t>C1 (Å)</a:t>
-            </a:r>
-          </a:p>
-        </p:txBody>
-      </p:sp>
-      <p:sp>
-        <p:nvSpPr>
-          <p:cNvPr id="8" name="TextBox 7"/>
-          <p:cNvSpPr txBox="1"/>
-          <p:nvPr/>
-        </p:nvSpPr>
-        <p:spPr>
-          <a:xfrm>
-            <a:off x="7848000" y="1440000"/>
-            <a:ext cx="1296000" cy="288000"/>
-          </a:xfrm>
-          <a:prstGeom prst="rect">
-            <a:avLst/>
-          </a:prstGeom>
-          <a:noFill/>
-        </p:spPr>
-        <p:txBody>
-          <a:bodyPr wrap="square" anchor="t" lIns="36000" rIns="36000" tIns="0" bIns="0">
-            <a:spAutoFit/>
-          </a:bodyPr>
-          <a:lstStyle/>
-          <a:p>
-            <a:pPr algn="ctr">
-              <a:spcAft>
-                <a:spcPts val="0"/>
-              </a:spcAft>
-            </a:pPr>
-            <a:r>
-              <a:rPr sz="1400" b="1">
-                <a:solidFill>
-                  <a:srgbClr val="5A636B"/>
-                </a:solidFill>
-                <a:latin typeface="Pretendard"/>
-              </a:rPr>
-              <a:t>C2 (Å)</a:t>
-            </a:r>
-          </a:p>
-        </p:txBody>
-      </p:sp>
-      <p:sp>
-        <p:nvSpPr>
-          <p:cNvPr id="9" name="TextBox 8"/>
-          <p:cNvSpPr txBox="1"/>
-          <p:nvPr/>
-        </p:nvSpPr>
-        <p:spPr>
-          <a:xfrm>
-            <a:off x="9216000" y="1440000"/>
-            <a:ext cx="1296000" cy="288000"/>
-          </a:xfrm>
-          <a:prstGeom prst="rect">
-            <a:avLst/>
-          </a:prstGeom>
-          <a:noFill/>
-        </p:spPr>
-        <p:txBody>
-          <a:bodyPr wrap="square" anchor="t" lIns="36000" rIns="36000" tIns="0" bIns="0">
-            <a:spAutoFit/>
-          </a:bodyPr>
-          <a:lstStyle/>
-          <a:p>
-            <a:pPr algn="ctr">
-              <a:spcAft>
-                <a:spcPts val="0"/>
-              </a:spcAft>
-            </a:pPr>
-            <a:r>
-              <a:rPr sz="1400" b="1">
-                <a:solidFill>
-                  <a:srgbClr val="5A636B"/>
-                </a:solidFill>
-                <a:latin typeface="Pretendard"/>
-              </a:rPr>
-              <a:t>점수</a:t>
-            </a:r>
-          </a:p>
-        </p:txBody>
-      </p:sp>
-      <p:sp>
-        <p:nvSpPr>
-          <p:cNvPr id="10" name="TextBox 9"/>
-          <p:cNvSpPr txBox="1"/>
-          <p:nvPr/>
-        </p:nvSpPr>
-        <p:spPr>
-          <a:xfrm>
-            <a:off x="10584000" y="1440000"/>
-            <a:ext cx="1296000" cy="288000"/>
-          </a:xfrm>
-          <a:prstGeom prst="rect">
-            <a:avLst/>
-          </a:prstGeom>
-          <a:noFill/>
-        </p:spPr>
-        <p:txBody>
-          <a:bodyPr wrap="square" anchor="t" lIns="36000" rIns="36000" tIns="0" bIns="0">
-            <a:spAutoFit/>
-          </a:bodyPr>
-          <a:lstStyle/>
-          <a:p>
-            <a:pPr algn="ctr">
-              <a:spcAft>
-                <a:spcPts val="0"/>
-              </a:spcAft>
-            </a:pPr>
-            <a:r>
-              <a:rPr sz="1400" b="1">
-                <a:solidFill>
-                  <a:srgbClr val="5A636B"/>
-                </a:solidFill>
-                <a:latin typeface="Pretendard"/>
-              </a:rPr>
-              <a:t>C2 통과</a:t>
-            </a:r>
-          </a:p>
-        </p:txBody>
-      </p:sp>
-      <p:sp>
-        <p:nvSpPr>
-          <p:cNvPr id="11" name="Rectangle 10"/>
-          <p:cNvSpPr/>
-          <p:nvPr/>
-        </p:nvSpPr>
-        <p:spPr>
-          <a:xfrm>
-            <a:off x="720000" y="1800000"/>
-            <a:ext cx="10753200" cy="486000"/>
-          </a:xfrm>
-          <a:prstGeom prst="rect">
-            <a:avLst/>
-          </a:prstGeom>
-          <a:solidFill>
-            <a:srgbClr val="F3F5F7"/>
-          </a:solidFill>
-          <a:ln>
-            <a:noFill/>
-          </a:ln>
-          <a:effectLst/>
-        </p:spPr>
-        <p:style>
-          <a:lnRef idx="1">
-            <a:schemeClr val="accent1"/>
-          </a:lnRef>
-          <a:fillRef idx="3">
-            <a:schemeClr val="accent1"/>
-          </a:fillRef>
-          <a:effectRef idx="2">
-            <a:schemeClr val="accent1"/>
-          </a:effectRef>
-          <a:fontRef idx="minor">
-            <a:schemeClr val="lt1"/>
-          </a:fontRef>
-        </p:style>
-        <p:txBody>
-          <a:bodyPr rtlCol="0" anchor="ctr"/>
-          <a:lstStyle/>
-          <a:p>
-            <a:pPr algn="ctr"/>
-          </a:p>
-        </p:txBody>
-      </p:sp>
-      <p:sp>
-        <p:nvSpPr>
-          <p:cNvPr id="12" name="TextBox 11"/>
-          <p:cNvSpPr txBox="1"/>
-          <p:nvPr/>
-        </p:nvSpPr>
-        <p:spPr>
-          <a:xfrm>
-            <a:off x="864000" y="1854000"/>
-            <a:ext cx="5544000" cy="396000"/>
-          </a:xfrm>
-          <a:prstGeom prst="rect">
-            <a:avLst/>
-          </a:prstGeom>
-          <a:noFill/>
-        </p:spPr>
-        <p:txBody>
-          <a:bodyPr wrap="square" anchor="ctr" lIns="36000" rIns="36000" tIns="0" bIns="0">
-            <a:spAutoFit/>
-          </a:bodyPr>
-          <a:lstStyle/>
-          <a:p>
-            <a:pPr algn="l">
-              <a:spcAft>
-                <a:spcPts val="0"/>
-              </a:spcAft>
-            </a:pPr>
-            <a:r>
-              <a:rPr sz="1500" b="1">
+              <a:rPr sz="1700" b="1">
+                <a:solidFill>
+                  <a:srgbClr val="009E73"/>
+                </a:solidFill>
+                <a:latin typeface="Pretendard"/>
+              </a:rPr>
+              <a:t>C1 통과율 0% → 100%</a:t>
+            </a:r>
+            <a:r>
+              <a:rPr sz="1700" b="0">
                 <a:solidFill>
                   <a:srgbClr val="1A1A1A"/>
                 </a:solidFill>
                 <a:latin typeface="Pretendard"/>
               </a:rPr>
-              <a:t>수용체 pH7.4 · 리간드 pH7.4  (옳은 짝)</a:t>
-            </a:r>
-          </a:p>
-        </p:txBody>
-      </p:sp>
-      <p:sp>
-        <p:nvSpPr>
-          <p:cNvPr id="13" name="TextBox 12"/>
-          <p:cNvSpPr txBox="1"/>
-          <p:nvPr/>
-        </p:nvSpPr>
-        <p:spPr>
-          <a:xfrm>
-            <a:off x="6480000" y="1854000"/>
-            <a:ext cx="1296000" cy="396000"/>
-          </a:xfrm>
-          <a:prstGeom prst="rect">
-            <a:avLst/>
-          </a:prstGeom>
-          <a:noFill/>
-        </p:spPr>
-        <p:txBody>
-          <a:bodyPr wrap="square" anchor="ctr" lIns="36000" rIns="36000" tIns="0" bIns="0">
-            <a:spAutoFit/>
-          </a:bodyPr>
-          <a:lstStyle/>
-          <a:p>
-            <a:pPr algn="ctr">
-              <a:spcAft>
-                <a:spcPts val="0"/>
-              </a:spcAft>
-            </a:pPr>
-            <a:r>
-              <a:rPr sz="1600" b="1">
+              <a:t>        </a:t>
+            </a:r>
+            <a:r>
+              <a:rPr sz="1700" b="1">
+                <a:solidFill>
+                  <a:srgbClr val="D55E00"/>
+                </a:solidFill>
+                <a:latin typeface="Pretendard"/>
+              </a:rPr>
+              <a:t>C2 전 구간 0%, 변동 0.025 Å</a:t>
+            </a:r>
+            <a:r>
+              <a:rPr sz="1700" b="0">
                 <a:solidFill>
                   <a:srgbClr val="1A1A1A"/>
                 </a:solidFill>
                 <a:latin typeface="Pretendard"/>
               </a:rPr>
-              <a:t>1.10</a:t>
-            </a:r>
-          </a:p>
-        </p:txBody>
-      </p:sp>
-      <p:sp>
-        <p:nvSpPr>
-          <p:cNvPr id="14" name="TextBox 13"/>
-          <p:cNvSpPr txBox="1"/>
-          <p:nvPr/>
-        </p:nvSpPr>
-        <p:spPr>
-          <a:xfrm>
-            <a:off x="7848000" y="1854000"/>
-            <a:ext cx="1296000" cy="396000"/>
-          </a:xfrm>
-          <a:prstGeom prst="rect">
-            <a:avLst/>
-          </a:prstGeom>
-          <a:noFill/>
-        </p:spPr>
-        <p:txBody>
-          <a:bodyPr wrap="square" anchor="ctr" lIns="36000" rIns="36000" tIns="0" bIns="0">
-            <a:spAutoFit/>
-          </a:bodyPr>
-          <a:lstStyle/>
-          <a:p>
-            <a:pPr algn="ctr">
-              <a:spcAft>
-                <a:spcPts val="0"/>
-              </a:spcAft>
-            </a:pPr>
-            <a:r>
-              <a:rPr sz="1600" b="1">
-                <a:solidFill>
-                  <a:srgbClr val="1A1A1A"/>
-                </a:solidFill>
-                <a:latin typeface="Pretendard"/>
-              </a:rPr>
-              <a:t>8.37</a:t>
-            </a:r>
-          </a:p>
-        </p:txBody>
-      </p:sp>
-      <p:sp>
-        <p:nvSpPr>
-          <p:cNvPr id="15" name="TextBox 14"/>
-          <p:cNvSpPr txBox="1"/>
-          <p:nvPr/>
-        </p:nvSpPr>
-        <p:spPr>
-          <a:xfrm>
-            <a:off x="9216000" y="1854000"/>
-            <a:ext cx="1296000" cy="396000"/>
-          </a:xfrm>
-          <a:prstGeom prst="rect">
-            <a:avLst/>
-          </a:prstGeom>
-          <a:noFill/>
-        </p:spPr>
-        <p:txBody>
-          <a:bodyPr wrap="square" anchor="ctr" lIns="36000" rIns="36000" tIns="0" bIns="0">
-            <a:spAutoFit/>
-          </a:bodyPr>
-          <a:lstStyle/>
-          <a:p>
-            <a:pPr algn="ctr">
-              <a:spcAft>
-                <a:spcPts val="0"/>
-              </a:spcAft>
-            </a:pPr>
-            <a:r>
-              <a:rPr sz="1600" b="1">
-                <a:solidFill>
-                  <a:srgbClr val="1A1A1A"/>
-                </a:solidFill>
-                <a:latin typeface="Pretendard"/>
-              </a:rPr>
-              <a:t>-9.60</a:t>
-            </a:r>
-          </a:p>
-        </p:txBody>
-      </p:sp>
-      <p:sp>
-        <p:nvSpPr>
-          <p:cNvPr id="16" name="TextBox 15"/>
-          <p:cNvSpPr txBox="1"/>
-          <p:nvPr/>
-        </p:nvSpPr>
-        <p:spPr>
-          <a:xfrm>
-            <a:off x="10584000" y="1854000"/>
-            <a:ext cx="1296000" cy="396000"/>
-          </a:xfrm>
-          <a:prstGeom prst="rect">
-            <a:avLst/>
-          </a:prstGeom>
-          <a:noFill/>
-        </p:spPr>
-        <p:txBody>
-          <a:bodyPr wrap="square" anchor="ctr" lIns="36000" rIns="36000" tIns="0" bIns="0">
-            <a:spAutoFit/>
-          </a:bodyPr>
-          <a:lstStyle/>
-          <a:p>
-            <a:pPr algn="ctr">
-              <a:spcAft>
-                <a:spcPts val="0"/>
-              </a:spcAft>
-            </a:pPr>
-            <a:r>
-              <a:rPr sz="1600" b="1">
+              <a:t>        </a:t>
+            </a:r>
+            <a:r>
+              <a:rPr sz="1700" b="1">
                 <a:solidFill>
                   <a:srgbClr val="D55E00"/>
                 </a:solidFill>
                 <a:latin typeface="Pretendard"/>
               </a:rPr>
-              <a:t>0%</a:t>
-            </a:r>
-          </a:p>
-        </p:txBody>
-      </p:sp>
-      <p:sp>
-        <p:nvSpPr>
-          <p:cNvPr id="17" name="Rectangle 16"/>
-          <p:cNvSpPr/>
-          <p:nvPr/>
-        </p:nvSpPr>
-        <p:spPr>
-          <a:xfrm>
-            <a:off x="720000" y="2340000"/>
-            <a:ext cx="10753200" cy="486000"/>
-          </a:xfrm>
-          <a:prstGeom prst="rect">
-            <a:avLst/>
-          </a:prstGeom>
-          <a:solidFill>
-            <a:srgbClr val="FFFFFF"/>
-          </a:solidFill>
-          <a:ln>
-            <a:noFill/>
-          </a:ln>
-          <a:effectLst/>
-        </p:spPr>
-        <p:style>
-          <a:lnRef idx="1">
-            <a:schemeClr val="accent1"/>
-          </a:lnRef>
-          <a:fillRef idx="3">
-            <a:schemeClr val="accent1"/>
-          </a:fillRef>
-          <a:effectRef idx="2">
-            <a:schemeClr val="accent1"/>
-          </a:effectRef>
-          <a:fontRef idx="minor">
-            <a:schemeClr val="lt1"/>
-          </a:fontRef>
-        </p:style>
-        <p:txBody>
-          <a:bodyPr rtlCol="0" anchor="ctr"/>
-          <a:lstStyle/>
-          <a:p>
-            <a:pPr algn="ctr"/>
-          </a:p>
-        </p:txBody>
-      </p:sp>
-      <p:sp>
-        <p:nvSpPr>
-          <p:cNvPr id="18" name="TextBox 17"/>
-          <p:cNvSpPr txBox="1"/>
-          <p:nvPr/>
-        </p:nvSpPr>
-        <p:spPr>
-          <a:xfrm>
-            <a:off x="864000" y="2394000"/>
-            <a:ext cx="5544000" cy="396000"/>
-          </a:xfrm>
-          <a:prstGeom prst="rect">
-            <a:avLst/>
-          </a:prstGeom>
-          <a:noFill/>
-        </p:spPr>
-        <p:txBody>
-          <a:bodyPr wrap="square" anchor="ctr" lIns="36000" rIns="36000" tIns="0" bIns="0">
-            <a:spAutoFit/>
-          </a:bodyPr>
-          <a:lstStyle/>
-          <a:p>
-            <a:pPr algn="l">
-              <a:spcAft>
-                <a:spcPts val="0"/>
-              </a:spcAft>
-            </a:pPr>
-            <a:r>
-              <a:rPr sz="1500" b="0">
-                <a:solidFill>
-                  <a:srgbClr val="1A1A1A"/>
-                </a:solidFill>
-                <a:latin typeface="Pretendard"/>
-              </a:rPr>
-              <a:t>수용체 pH7.4 · 리간드 중성  (현행)</a:t>
-            </a:r>
-          </a:p>
-        </p:txBody>
-      </p:sp>
-      <p:sp>
-        <p:nvSpPr>
-          <p:cNvPr id="19" name="TextBox 18"/>
-          <p:cNvSpPr txBox="1"/>
-          <p:nvPr/>
-        </p:nvSpPr>
-        <p:spPr>
-          <a:xfrm>
-            <a:off x="6480000" y="2394000"/>
-            <a:ext cx="1296000" cy="396000"/>
-          </a:xfrm>
-          <a:prstGeom prst="rect">
-            <a:avLst/>
-          </a:prstGeom>
-          <a:noFill/>
-        </p:spPr>
-        <p:txBody>
-          <a:bodyPr wrap="square" anchor="ctr" lIns="36000" rIns="36000" tIns="0" bIns="0">
-            <a:spAutoFit/>
-          </a:bodyPr>
-          <a:lstStyle/>
-          <a:p>
-            <a:pPr algn="ctr">
-              <a:spcAft>
-                <a:spcPts val="0"/>
-              </a:spcAft>
-            </a:pPr>
-            <a:r>
-              <a:rPr sz="1600" b="1">
-                <a:solidFill>
-                  <a:srgbClr val="1A1A1A"/>
-                </a:solidFill>
-                <a:latin typeface="Pretendard"/>
-              </a:rPr>
-              <a:t>1.07</a:t>
-            </a:r>
-          </a:p>
-        </p:txBody>
-      </p:sp>
-      <p:sp>
-        <p:nvSpPr>
-          <p:cNvPr id="20" name="TextBox 19"/>
-          <p:cNvSpPr txBox="1"/>
-          <p:nvPr/>
-        </p:nvSpPr>
-        <p:spPr>
-          <a:xfrm>
-            <a:off x="7848000" y="2394000"/>
-            <a:ext cx="1296000" cy="396000"/>
-          </a:xfrm>
-          <a:prstGeom prst="rect">
-            <a:avLst/>
-          </a:prstGeom>
-          <a:noFill/>
-        </p:spPr>
-        <p:txBody>
-          <a:bodyPr wrap="square" anchor="ctr" lIns="36000" rIns="36000" tIns="0" bIns="0">
-            <a:spAutoFit/>
-          </a:bodyPr>
-          <a:lstStyle/>
-          <a:p>
-            <a:pPr algn="ctr">
-              <a:spcAft>
-                <a:spcPts val="0"/>
-              </a:spcAft>
-            </a:pPr>
-            <a:r>
-              <a:rPr sz="1600" b="1">
-                <a:solidFill>
-                  <a:srgbClr val="1A1A1A"/>
-                </a:solidFill>
-                <a:latin typeface="Pretendard"/>
-              </a:rPr>
-              <a:t>8.36</a:t>
-            </a:r>
-          </a:p>
-        </p:txBody>
-      </p:sp>
-      <p:sp>
-        <p:nvSpPr>
-          <p:cNvPr id="21" name="TextBox 20"/>
-          <p:cNvSpPr txBox="1"/>
-          <p:nvPr/>
-        </p:nvSpPr>
-        <p:spPr>
-          <a:xfrm>
-            <a:off x="9216000" y="2394000"/>
-            <a:ext cx="1296000" cy="396000"/>
-          </a:xfrm>
-          <a:prstGeom prst="rect">
-            <a:avLst/>
-          </a:prstGeom>
-          <a:noFill/>
-        </p:spPr>
-        <p:txBody>
-          <a:bodyPr wrap="square" anchor="ctr" lIns="36000" rIns="36000" tIns="0" bIns="0">
-            <a:spAutoFit/>
-          </a:bodyPr>
-          <a:lstStyle/>
-          <a:p>
-            <a:pPr algn="ctr">
-              <a:spcAft>
-                <a:spcPts val="0"/>
-              </a:spcAft>
-            </a:pPr>
-            <a:r>
-              <a:rPr sz="1600" b="1">
-                <a:solidFill>
-                  <a:srgbClr val="1A1A1A"/>
-                </a:solidFill>
-                <a:latin typeface="Pretendard"/>
-              </a:rPr>
-              <a:t>-9.60</a:t>
-            </a:r>
-          </a:p>
-        </p:txBody>
-      </p:sp>
-      <p:sp>
-        <p:nvSpPr>
-          <p:cNvPr id="22" name="TextBox 21"/>
-          <p:cNvSpPr txBox="1"/>
-          <p:nvPr/>
-        </p:nvSpPr>
-        <p:spPr>
-          <a:xfrm>
-            <a:off x="10584000" y="2394000"/>
-            <a:ext cx="1296000" cy="396000"/>
-          </a:xfrm>
-          <a:prstGeom prst="rect">
-            <a:avLst/>
-          </a:prstGeom>
-          <a:noFill/>
-        </p:spPr>
-        <p:txBody>
-          <a:bodyPr wrap="square" anchor="ctr" lIns="36000" rIns="36000" tIns="0" bIns="0">
-            <a:spAutoFit/>
-          </a:bodyPr>
-          <a:lstStyle/>
-          <a:p>
-            <a:pPr algn="ctr">
-              <a:spcAft>
-                <a:spcPts val="0"/>
-              </a:spcAft>
-            </a:pPr>
-            <a:r>
-              <a:rPr sz="1600" b="1">
-                <a:solidFill>
-                  <a:srgbClr val="D55E00"/>
-                </a:solidFill>
-                <a:latin typeface="Pretendard"/>
-              </a:rPr>
-              <a:t>0%</a:t>
-            </a:r>
-          </a:p>
-        </p:txBody>
-      </p:sp>
-      <p:sp>
-        <p:nvSpPr>
-          <p:cNvPr id="23" name="Rectangle 22"/>
-          <p:cNvSpPr/>
-          <p:nvPr/>
-        </p:nvSpPr>
-        <p:spPr>
-          <a:xfrm>
-            <a:off x="720000" y="2880000"/>
-            <a:ext cx="10753200" cy="486000"/>
-          </a:xfrm>
-          <a:prstGeom prst="rect">
-            <a:avLst/>
-          </a:prstGeom>
-          <a:solidFill>
-            <a:srgbClr val="F3F5F7"/>
-          </a:solidFill>
-          <a:ln>
-            <a:noFill/>
-          </a:ln>
-          <a:effectLst/>
-        </p:spPr>
-        <p:style>
-          <a:lnRef idx="1">
-            <a:schemeClr val="accent1"/>
-          </a:lnRef>
-          <a:fillRef idx="3">
-            <a:schemeClr val="accent1"/>
-          </a:fillRef>
-          <a:effectRef idx="2">
-            <a:schemeClr val="accent1"/>
-          </a:effectRef>
-          <a:fontRef idx="minor">
-            <a:schemeClr val="lt1"/>
-          </a:fontRef>
-        </p:style>
-        <p:txBody>
-          <a:bodyPr rtlCol="0" anchor="ctr"/>
-          <a:lstStyle/>
-          <a:p>
-            <a:pPr algn="ctr"/>
-          </a:p>
-        </p:txBody>
-      </p:sp>
-      <p:sp>
-        <p:nvSpPr>
-          <p:cNvPr id="24" name="TextBox 23"/>
-          <p:cNvSpPr txBox="1"/>
-          <p:nvPr/>
-        </p:nvSpPr>
-        <p:spPr>
-          <a:xfrm>
-            <a:off x="864000" y="2934000"/>
-            <a:ext cx="5544000" cy="396000"/>
-          </a:xfrm>
-          <a:prstGeom prst="rect">
-            <a:avLst/>
-          </a:prstGeom>
-          <a:noFill/>
-        </p:spPr>
-        <p:txBody>
-          <a:bodyPr wrap="square" anchor="ctr" lIns="36000" rIns="36000" tIns="0" bIns="0">
-            <a:spAutoFit/>
-          </a:bodyPr>
-          <a:lstStyle/>
-          <a:p>
-            <a:pPr algn="l">
-              <a:spcAft>
-                <a:spcPts val="0"/>
-              </a:spcAft>
-            </a:pPr>
-            <a:r>
-              <a:rPr sz="1500" b="0">
-                <a:solidFill>
-                  <a:srgbClr val="1A1A1A"/>
-                </a:solidFill>
-                <a:latin typeface="Pretendard"/>
-              </a:rPr>
-              <a:t>수용체 중성 · 리간드 중성</a:t>
-            </a:r>
-          </a:p>
-        </p:txBody>
-      </p:sp>
-      <p:sp>
-        <p:nvSpPr>
-          <p:cNvPr id="25" name="TextBox 24"/>
-          <p:cNvSpPr txBox="1"/>
-          <p:nvPr/>
-        </p:nvSpPr>
-        <p:spPr>
-          <a:xfrm>
-            <a:off x="6480000" y="2934000"/>
-            <a:ext cx="1296000" cy="396000"/>
-          </a:xfrm>
-          <a:prstGeom prst="rect">
-            <a:avLst/>
-          </a:prstGeom>
-          <a:noFill/>
-        </p:spPr>
-        <p:txBody>
-          <a:bodyPr wrap="square" anchor="ctr" lIns="36000" rIns="36000" tIns="0" bIns="0">
-            <a:spAutoFit/>
-          </a:bodyPr>
-          <a:lstStyle/>
-          <a:p>
-            <a:pPr algn="ctr">
-              <a:spcAft>
-                <a:spcPts val="0"/>
-              </a:spcAft>
-            </a:pPr>
-            <a:r>
-              <a:rPr sz="1600" b="1">
-                <a:solidFill>
-                  <a:srgbClr val="1A1A1A"/>
-                </a:solidFill>
-                <a:latin typeface="Pretendard"/>
-              </a:rPr>
-              <a:t>1.22</a:t>
-            </a:r>
-          </a:p>
-        </p:txBody>
-      </p:sp>
-      <p:sp>
-        <p:nvSpPr>
-          <p:cNvPr id="26" name="TextBox 25"/>
-          <p:cNvSpPr txBox="1"/>
-          <p:nvPr/>
-        </p:nvSpPr>
-        <p:spPr>
-          <a:xfrm>
-            <a:off x="7848000" y="2934000"/>
-            <a:ext cx="1296000" cy="396000"/>
-          </a:xfrm>
-          <a:prstGeom prst="rect">
-            <a:avLst/>
-          </a:prstGeom>
-          <a:noFill/>
-        </p:spPr>
-        <p:txBody>
-          <a:bodyPr wrap="square" anchor="ctr" lIns="36000" rIns="36000" tIns="0" bIns="0">
-            <a:spAutoFit/>
-          </a:bodyPr>
-          <a:lstStyle/>
-          <a:p>
-            <a:pPr algn="ctr">
-              <a:spcAft>
-                <a:spcPts val="0"/>
-              </a:spcAft>
-            </a:pPr>
-            <a:r>
-              <a:rPr sz="1600" b="1">
-                <a:solidFill>
-                  <a:srgbClr val="1A1A1A"/>
-                </a:solidFill>
-                <a:latin typeface="Pretendard"/>
-              </a:rPr>
-              <a:t>8.37</a:t>
-            </a:r>
-          </a:p>
-        </p:txBody>
-      </p:sp>
-      <p:sp>
-        <p:nvSpPr>
-          <p:cNvPr id="27" name="TextBox 26"/>
-          <p:cNvSpPr txBox="1"/>
-          <p:nvPr/>
-        </p:nvSpPr>
-        <p:spPr>
-          <a:xfrm>
-            <a:off x="9216000" y="2934000"/>
-            <a:ext cx="1296000" cy="396000"/>
-          </a:xfrm>
-          <a:prstGeom prst="rect">
-            <a:avLst/>
-          </a:prstGeom>
-          <a:noFill/>
-        </p:spPr>
-        <p:txBody>
-          <a:bodyPr wrap="square" anchor="ctr" lIns="36000" rIns="36000" tIns="0" bIns="0">
-            <a:spAutoFit/>
-          </a:bodyPr>
-          <a:lstStyle/>
-          <a:p>
-            <a:pPr algn="ctr">
-              <a:spcAft>
-                <a:spcPts val="0"/>
-              </a:spcAft>
-            </a:pPr>
-            <a:r>
-              <a:rPr sz="1600" b="1">
-                <a:solidFill>
-                  <a:srgbClr val="1A1A1A"/>
-                </a:solidFill>
-                <a:latin typeface="Pretendard"/>
-              </a:rPr>
-              <a:t>-9.60</a:t>
-            </a:r>
-          </a:p>
-        </p:txBody>
-      </p:sp>
-      <p:sp>
-        <p:nvSpPr>
-          <p:cNvPr id="28" name="TextBox 27"/>
-          <p:cNvSpPr txBox="1"/>
-          <p:nvPr/>
-        </p:nvSpPr>
-        <p:spPr>
-          <a:xfrm>
-            <a:off x="10584000" y="2934000"/>
-            <a:ext cx="1296000" cy="396000"/>
-          </a:xfrm>
-          <a:prstGeom prst="rect">
-            <a:avLst/>
-          </a:prstGeom>
-          <a:noFill/>
-        </p:spPr>
-        <p:txBody>
-          <a:bodyPr wrap="square" anchor="ctr" lIns="36000" rIns="36000" tIns="0" bIns="0">
-            <a:spAutoFit/>
-          </a:bodyPr>
-          <a:lstStyle/>
-          <a:p>
-            <a:pPr algn="ctr">
-              <a:spcAft>
-                <a:spcPts val="0"/>
-              </a:spcAft>
-            </a:pPr>
-            <a:r>
-              <a:rPr sz="1600" b="1">
-                <a:solidFill>
-                  <a:srgbClr val="D55E00"/>
-                </a:solidFill>
-                <a:latin typeface="Pretendard"/>
-              </a:rPr>
-              <a:t>0%</a:t>
-            </a:r>
-          </a:p>
-        </p:txBody>
-      </p:sp>
-      <p:sp>
-        <p:nvSpPr>
-          <p:cNvPr id="29" name="Rectangle 28"/>
-          <p:cNvSpPr/>
-          <p:nvPr/>
-        </p:nvSpPr>
-        <p:spPr>
-          <a:xfrm>
-            <a:off x="720000" y="3420000"/>
-            <a:ext cx="10753200" cy="486000"/>
-          </a:xfrm>
-          <a:prstGeom prst="rect">
-            <a:avLst/>
-          </a:prstGeom>
-          <a:solidFill>
-            <a:srgbClr val="FFFFFF"/>
-          </a:solidFill>
-          <a:ln>
-            <a:noFill/>
-          </a:ln>
-          <a:effectLst/>
-        </p:spPr>
-        <p:style>
-          <a:lnRef idx="1">
-            <a:schemeClr val="accent1"/>
-          </a:lnRef>
-          <a:fillRef idx="3">
-            <a:schemeClr val="accent1"/>
-          </a:fillRef>
-          <a:effectRef idx="2">
-            <a:schemeClr val="accent1"/>
-          </a:effectRef>
-          <a:fontRef idx="minor">
-            <a:schemeClr val="lt1"/>
-          </a:fontRef>
-        </p:style>
-        <p:txBody>
-          <a:bodyPr rtlCol="0" anchor="ctr"/>
-          <a:lstStyle/>
-          <a:p>
-            <a:pPr algn="ctr"/>
-          </a:p>
-        </p:txBody>
-      </p:sp>
-      <p:sp>
-        <p:nvSpPr>
-          <p:cNvPr id="30" name="TextBox 29"/>
-          <p:cNvSpPr txBox="1"/>
-          <p:nvPr/>
-        </p:nvSpPr>
-        <p:spPr>
-          <a:xfrm>
-            <a:off x="864000" y="3474000"/>
-            <a:ext cx="5544000" cy="396000"/>
-          </a:xfrm>
-          <a:prstGeom prst="rect">
-            <a:avLst/>
-          </a:prstGeom>
-          <a:noFill/>
-        </p:spPr>
-        <p:txBody>
-          <a:bodyPr wrap="square" anchor="ctr" lIns="36000" rIns="36000" tIns="0" bIns="0">
-            <a:spAutoFit/>
-          </a:bodyPr>
-          <a:lstStyle/>
-          <a:p>
-            <a:pPr algn="l">
-              <a:spcAft>
-                <a:spcPts val="0"/>
-              </a:spcAft>
-            </a:pPr>
-            <a:r>
-              <a:rPr sz="1500" b="0">
-                <a:solidFill>
-                  <a:srgbClr val="1A1A1A"/>
-                </a:solidFill>
-                <a:latin typeface="Pretendard"/>
-              </a:rPr>
-              <a:t>수용체 중성 · 리간드 pH7.4</a:t>
-            </a:r>
-          </a:p>
-        </p:txBody>
-      </p:sp>
-      <p:sp>
-        <p:nvSpPr>
-          <p:cNvPr id="31" name="TextBox 30"/>
-          <p:cNvSpPr txBox="1"/>
-          <p:nvPr/>
-        </p:nvSpPr>
-        <p:spPr>
-          <a:xfrm>
-            <a:off x="6480000" y="3474000"/>
-            <a:ext cx="1296000" cy="396000"/>
-          </a:xfrm>
-          <a:prstGeom prst="rect">
-            <a:avLst/>
-          </a:prstGeom>
-          <a:noFill/>
-        </p:spPr>
-        <p:txBody>
-          <a:bodyPr wrap="square" anchor="ctr" lIns="36000" rIns="36000" tIns="0" bIns="0">
-            <a:spAutoFit/>
-          </a:bodyPr>
-          <a:lstStyle/>
-          <a:p>
-            <a:pPr algn="ctr">
-              <a:spcAft>
-                <a:spcPts val="0"/>
-              </a:spcAft>
-            </a:pPr>
-            <a:r>
-              <a:rPr sz="1600" b="1">
-                <a:solidFill>
-                  <a:srgbClr val="1A1A1A"/>
-                </a:solidFill>
-                <a:latin typeface="Pretendard"/>
-              </a:rPr>
-              <a:t>1.22</a:t>
-            </a:r>
-          </a:p>
-        </p:txBody>
-      </p:sp>
-      <p:sp>
-        <p:nvSpPr>
-          <p:cNvPr id="32" name="TextBox 31"/>
-          <p:cNvSpPr txBox="1"/>
-          <p:nvPr/>
-        </p:nvSpPr>
-        <p:spPr>
-          <a:xfrm>
-            <a:off x="7848000" y="3474000"/>
-            <a:ext cx="1296000" cy="396000"/>
-          </a:xfrm>
-          <a:prstGeom prst="rect">
-            <a:avLst/>
-          </a:prstGeom>
-          <a:noFill/>
-        </p:spPr>
-        <p:txBody>
-          <a:bodyPr wrap="square" anchor="ctr" lIns="36000" rIns="36000" tIns="0" bIns="0">
-            <a:spAutoFit/>
-          </a:bodyPr>
-          <a:lstStyle/>
-          <a:p>
-            <a:pPr algn="ctr">
-              <a:spcAft>
-                <a:spcPts val="0"/>
-              </a:spcAft>
-            </a:pPr>
-            <a:r>
-              <a:rPr sz="1600" b="1">
-                <a:solidFill>
-                  <a:srgbClr val="1A1A1A"/>
-                </a:solidFill>
-                <a:latin typeface="Pretendard"/>
-              </a:rPr>
-              <a:t>8.37</a:t>
-            </a:r>
-          </a:p>
-        </p:txBody>
-      </p:sp>
-      <p:sp>
-        <p:nvSpPr>
-          <p:cNvPr id="33" name="TextBox 32"/>
-          <p:cNvSpPr txBox="1"/>
-          <p:nvPr/>
-        </p:nvSpPr>
-        <p:spPr>
-          <a:xfrm>
-            <a:off x="9216000" y="3474000"/>
-            <a:ext cx="1296000" cy="396000"/>
-          </a:xfrm>
-          <a:prstGeom prst="rect">
-            <a:avLst/>
-          </a:prstGeom>
-          <a:noFill/>
-        </p:spPr>
-        <p:txBody>
-          <a:bodyPr wrap="square" anchor="ctr" lIns="36000" rIns="36000" tIns="0" bIns="0">
-            <a:spAutoFit/>
-          </a:bodyPr>
-          <a:lstStyle/>
-          <a:p>
-            <a:pPr algn="ctr">
-              <a:spcAft>
-                <a:spcPts val="0"/>
-              </a:spcAft>
-            </a:pPr>
-            <a:r>
-              <a:rPr sz="1600" b="1">
-                <a:solidFill>
-                  <a:srgbClr val="1A1A1A"/>
-                </a:solidFill>
-                <a:latin typeface="Pretendard"/>
-              </a:rPr>
-              <a:t>-9.60</a:t>
-            </a:r>
-          </a:p>
-        </p:txBody>
-      </p:sp>
-      <p:sp>
-        <p:nvSpPr>
-          <p:cNvPr id="34" name="TextBox 33"/>
-          <p:cNvSpPr txBox="1"/>
-          <p:nvPr/>
-        </p:nvSpPr>
-        <p:spPr>
-          <a:xfrm>
-            <a:off x="10584000" y="3474000"/>
-            <a:ext cx="1296000" cy="396000"/>
-          </a:xfrm>
-          <a:prstGeom prst="rect">
-            <a:avLst/>
-          </a:prstGeom>
-          <a:noFill/>
-        </p:spPr>
-        <p:txBody>
-          <a:bodyPr wrap="square" anchor="ctr" lIns="36000" rIns="36000" tIns="0" bIns="0">
-            <a:spAutoFit/>
-          </a:bodyPr>
-          <a:lstStyle/>
-          <a:p>
-            <a:pPr algn="ctr">
-              <a:spcAft>
-                <a:spcPts val="0"/>
-              </a:spcAft>
-            </a:pPr>
-            <a:r>
-              <a:rPr sz="1600" b="1">
-                <a:solidFill>
-                  <a:srgbClr val="D55E00"/>
-                </a:solidFill>
-                <a:latin typeface="Pretendard"/>
-              </a:rPr>
-              <a:t>0%</a:t>
-            </a:r>
-          </a:p>
-        </p:txBody>
-      </p:sp>
-      <p:sp>
-        <p:nvSpPr>
-          <p:cNvPr id="35" name="Rounded Rectangle 34"/>
-          <p:cNvSpPr/>
-          <p:nvPr/>
-        </p:nvSpPr>
-        <p:spPr>
-          <a:xfrm>
-            <a:off x="720000" y="4248000"/>
-            <a:ext cx="10753200" cy="936000"/>
-          </a:xfrm>
-          <a:prstGeom prst="roundRect">
-            <a:avLst/>
-          </a:prstGeom>
-          <a:solidFill>
-            <a:srgbClr val="FDF0E6"/>
-          </a:solidFill>
-          <a:ln w="17780">
-            <a:solidFill>
-              <a:srgbClr val="D55E00"/>
-            </a:solidFill>
-          </a:ln>
-          <a:effectLst/>
-        </p:spPr>
-        <p:style>
-          <a:lnRef idx="1">
-            <a:schemeClr val="accent1"/>
-          </a:lnRef>
-          <a:fillRef idx="3">
-            <a:schemeClr val="accent1"/>
-          </a:fillRef>
-          <a:effectRef idx="2">
-            <a:schemeClr val="accent1"/>
-          </a:effectRef>
-          <a:fontRef idx="minor">
-            <a:schemeClr val="lt1"/>
-          </a:fontRef>
-        </p:style>
-        <p:txBody>
-          <a:bodyPr rtlCol="0" anchor="ctr"/>
-          <a:lstStyle/>
-          <a:p>
-            <a:pPr algn="ctr"/>
-          </a:p>
-        </p:txBody>
-      </p:sp>
-      <p:sp>
-        <p:nvSpPr>
-          <p:cNvPr id="36" name="TextBox 35"/>
-          <p:cNvSpPr txBox="1"/>
-          <p:nvPr/>
-        </p:nvSpPr>
-        <p:spPr>
-          <a:xfrm>
-            <a:off x="936000" y="4428000"/>
-            <a:ext cx="10321200" cy="648000"/>
-          </a:xfrm>
-          <a:prstGeom prst="rect">
-            <a:avLst/>
-          </a:prstGeom>
-          <a:noFill/>
-        </p:spPr>
-        <p:txBody>
-          <a:bodyPr wrap="square" anchor="t" lIns="36000" rIns="36000" tIns="0" bIns="0">
-            <a:spAutoFit/>
-          </a:bodyPr>
-          <a:lstStyle/>
-          <a:p>
-            <a:pPr algn="l">
-              <a:spcAft>
-                <a:spcPts val="300"/>
-              </a:spcAft>
-            </a:pPr>
-            <a:r>
-              <a:rPr sz="1800" b="1">
-                <a:solidFill>
-                  <a:srgbClr val="D55E00"/>
-                </a:solidFill>
-                <a:latin typeface="Pretendard"/>
-              </a:rPr>
-              <a:t>기본 Vina 채점 함수에는 정전기 항이 없다.</a:t>
-            </a:r>
-          </a:p>
-          <a:p>
-            <a:pPr algn="l">
-              <a:spcAft>
-                <a:spcPts val="300"/>
-              </a:spcAft>
-            </a:pPr>
-            <a:r>
-              <a:rPr sz="1500" b="0">
-                <a:solidFill>
-                  <a:srgbClr val="1A1A1A"/>
-                </a:solidFill>
-                <a:latin typeface="Pretendard"/>
-              </a:rPr>
-              <a:t>형식전하는 점수에 닿지 못하고, 바뀐 수소결합 타이핑도 그 질소가 결합 거리 밖이라 항 값이 움직이지 않았다.</a:t>
+              <a:t>최고 점수 변동 0.0 kcal/mol</a:t>
             </a:r>
           </a:p>
         </p:txBody>
@@ -9734,7 +10424,7 @@
                 </a:solidFill>
                 <a:latin typeface="Pretendard"/>
               </a:rPr>
-              <a:t>원인 배제 ③</a:t>
+              <a:t>C2 실패 원인 배제 ②</a:t>
             </a:r>
           </a:p>
         </p:txBody>
@@ -9773,7 +10463,7 @@
                 </a:solidFill>
                 <a:latin typeface="Pretendard"/>
               </a:rPr>
-              <a:t>무너진 원인은 골격도, 설계도, 프로토콜도 아니었다</a:t>
+              <a:t>프로토네이션도 원인이 아니었다 — 그리고 그럴 수 없었다</a:t>
             </a:r>
           </a:p>
         </p:txBody>
@@ -9819,14 +10509,209 @@
       </p:sp>
       <p:sp>
         <p:nvSpPr>
-          <p:cNvPr id="6" name="Rectangle 5"/>
+          <p:cNvPr id="6" name="TextBox 5"/>
+          <p:cNvSpPr txBox="1"/>
+          <p:nvPr/>
+        </p:nvSpPr>
+        <p:spPr>
+          <a:xfrm>
+            <a:off x="792000" y="1368000"/>
+            <a:ext cx="5400000" cy="288000"/>
+          </a:xfrm>
+          <a:prstGeom prst="rect">
+            <a:avLst/>
+          </a:prstGeom>
+          <a:noFill/>
+        </p:spPr>
+        <p:txBody>
+          <a:bodyPr wrap="square" anchor="t" lIns="36000" rIns="36000" tIns="0" bIns="0">
+            <a:spAutoFit/>
+          </a:bodyPr>
+          <a:lstStyle/>
+          <a:p>
+            <a:pPr algn="l">
+              <a:spcAft>
+                <a:spcPts val="0"/>
+              </a:spcAft>
+            </a:pPr>
+            <a:r>
+              <a:rPr sz="1400" b="1">
+                <a:solidFill>
+                  <a:srgbClr val="5A636B"/>
+                </a:solidFill>
+                <a:latin typeface="Pretendard"/>
+              </a:rPr>
+              <a:t>조건</a:t>
+            </a:r>
+          </a:p>
+        </p:txBody>
+      </p:sp>
+      <p:sp>
+        <p:nvSpPr>
+          <p:cNvPr id="7" name="TextBox 6"/>
+          <p:cNvSpPr txBox="1"/>
+          <p:nvPr/>
+        </p:nvSpPr>
+        <p:spPr>
+          <a:xfrm>
+            <a:off x="6480000" y="1368000"/>
+            <a:ext cx="1296000" cy="288000"/>
+          </a:xfrm>
+          <a:prstGeom prst="rect">
+            <a:avLst/>
+          </a:prstGeom>
+          <a:noFill/>
+        </p:spPr>
+        <p:txBody>
+          <a:bodyPr wrap="square" anchor="t" lIns="36000" rIns="36000" tIns="0" bIns="0">
+            <a:spAutoFit/>
+          </a:bodyPr>
+          <a:lstStyle/>
+          <a:p>
+            <a:pPr algn="ctr">
+              <a:spcAft>
+                <a:spcPts val="0"/>
+              </a:spcAft>
+            </a:pPr>
+            <a:r>
+              <a:rPr sz="1400" b="1">
+                <a:solidFill>
+                  <a:srgbClr val="5A636B"/>
+                </a:solidFill>
+                <a:latin typeface="Pretendard"/>
+              </a:rPr>
+              <a:t>C1 (Å)</a:t>
+            </a:r>
+          </a:p>
+        </p:txBody>
+      </p:sp>
+      <p:sp>
+        <p:nvSpPr>
+          <p:cNvPr id="8" name="TextBox 7"/>
+          <p:cNvSpPr txBox="1"/>
+          <p:nvPr/>
+        </p:nvSpPr>
+        <p:spPr>
+          <a:xfrm>
+            <a:off x="7848000" y="1368000"/>
+            <a:ext cx="1296000" cy="288000"/>
+          </a:xfrm>
+          <a:prstGeom prst="rect">
+            <a:avLst/>
+          </a:prstGeom>
+          <a:noFill/>
+        </p:spPr>
+        <p:txBody>
+          <a:bodyPr wrap="square" anchor="t" lIns="36000" rIns="36000" tIns="0" bIns="0">
+            <a:spAutoFit/>
+          </a:bodyPr>
+          <a:lstStyle/>
+          <a:p>
+            <a:pPr algn="ctr">
+              <a:spcAft>
+                <a:spcPts val="0"/>
+              </a:spcAft>
+            </a:pPr>
+            <a:r>
+              <a:rPr sz="1400" b="1">
+                <a:solidFill>
+                  <a:srgbClr val="5A636B"/>
+                </a:solidFill>
+                <a:latin typeface="Pretendard"/>
+              </a:rPr>
+              <a:t>C2 (Å)</a:t>
+            </a:r>
+          </a:p>
+        </p:txBody>
+      </p:sp>
+      <p:sp>
+        <p:nvSpPr>
+          <p:cNvPr id="9" name="TextBox 8"/>
+          <p:cNvSpPr txBox="1"/>
+          <p:nvPr/>
+        </p:nvSpPr>
+        <p:spPr>
+          <a:xfrm>
+            <a:off x="9216000" y="1368000"/>
+            <a:ext cx="1296000" cy="288000"/>
+          </a:xfrm>
+          <a:prstGeom prst="rect">
+            <a:avLst/>
+          </a:prstGeom>
+          <a:noFill/>
+        </p:spPr>
+        <p:txBody>
+          <a:bodyPr wrap="square" anchor="t" lIns="36000" rIns="36000" tIns="0" bIns="0">
+            <a:spAutoFit/>
+          </a:bodyPr>
+          <a:lstStyle/>
+          <a:p>
+            <a:pPr algn="ctr">
+              <a:spcAft>
+                <a:spcPts val="0"/>
+              </a:spcAft>
+            </a:pPr>
+            <a:r>
+              <a:rPr sz="1400" b="1">
+                <a:solidFill>
+                  <a:srgbClr val="5A636B"/>
+                </a:solidFill>
+                <a:latin typeface="Pretendard"/>
+              </a:rPr>
+              <a:t>점수</a:t>
+            </a:r>
+          </a:p>
+        </p:txBody>
+      </p:sp>
+      <p:sp>
+        <p:nvSpPr>
+          <p:cNvPr id="10" name="TextBox 9"/>
+          <p:cNvSpPr txBox="1"/>
+          <p:nvPr/>
+        </p:nvSpPr>
+        <p:spPr>
+          <a:xfrm>
+            <a:off x="10584000" y="1368000"/>
+            <a:ext cx="1296000" cy="288000"/>
+          </a:xfrm>
+          <a:prstGeom prst="rect">
+            <a:avLst/>
+          </a:prstGeom>
+          <a:noFill/>
+        </p:spPr>
+        <p:txBody>
+          <a:bodyPr wrap="square" anchor="t" lIns="36000" rIns="36000" tIns="0" bIns="0">
+            <a:spAutoFit/>
+          </a:bodyPr>
+          <a:lstStyle/>
+          <a:p>
+            <a:pPr algn="ctr">
+              <a:spcAft>
+                <a:spcPts val="0"/>
+              </a:spcAft>
+            </a:pPr>
+            <a:r>
+              <a:rPr sz="1400" b="1">
+                <a:solidFill>
+                  <a:srgbClr val="5A636B"/>
+                </a:solidFill>
+                <a:latin typeface="Pretendard"/>
+              </a:rPr>
+              <a:t>C2 통과</a:t>
+            </a:r>
+          </a:p>
+        </p:txBody>
+      </p:sp>
+      <p:sp>
+        <p:nvSpPr>
+          <p:cNvPr id="11" name="Rectangle 10"/>
           <p:cNvSpPr/>
           <p:nvPr/>
         </p:nvSpPr>
         <p:spPr>
           <a:xfrm>
-            <a:off x="720000" y="1512000"/>
-            <a:ext cx="10753200" cy="648000"/>
+            <a:off x="720000" y="1728000"/>
+            <a:ext cx="10753200" cy="486000"/>
           </a:xfrm>
           <a:prstGeom prst="rect">
             <a:avLst/>
@@ -9863,14 +10748,14 @@
       </p:sp>
       <p:sp>
         <p:nvSpPr>
-          <p:cNvPr id="7" name="TextBox 6"/>
-          <p:cNvSpPr txBox="1"/>
-          <p:nvPr/>
-        </p:nvSpPr>
-        <p:spPr>
-          <a:xfrm>
-            <a:off x="900000" y="1584000"/>
-            <a:ext cx="4680000" cy="504000"/>
+          <p:cNvPr id="12" name="TextBox 11"/>
+          <p:cNvSpPr txBox="1"/>
+          <p:nvPr/>
+        </p:nvSpPr>
+        <p:spPr>
+          <a:xfrm>
+            <a:off x="864000" y="1782000"/>
+            <a:ext cx="5544000" cy="396000"/>
           </a:xfrm>
           <a:prstGeom prst="rect">
             <a:avLst/>
@@ -9889,27 +10774,27 @@
               </a:spcAft>
             </a:pPr>
             <a:r>
-              <a:rPr sz="1600" b="0">
+              <a:rPr sz="1500" b="1">
                 <a:solidFill>
                   <a:srgbClr val="1A1A1A"/>
                 </a:solidFill>
                 <a:latin typeface="Pretendard"/>
               </a:rPr>
-              <a:t>① 옛 데이터에 골격 통제</a:t>
-            </a:r>
-          </a:p>
-        </p:txBody>
-      </p:sp>
-      <p:sp>
-        <p:nvSpPr>
-          <p:cNvPr id="8" name="TextBox 7"/>
-          <p:cNvSpPr txBox="1"/>
-          <p:nvPr/>
-        </p:nvSpPr>
-        <p:spPr>
-          <a:xfrm>
-            <a:off x="5688000" y="1584000"/>
-            <a:ext cx="2952000" cy="504000"/>
+              <a:t>수용체 pH7.4 · 리간드 pH7.4  (옳은 짝)</a:t>
+            </a:r>
+          </a:p>
+        </p:txBody>
+      </p:sp>
+      <p:sp>
+        <p:nvSpPr>
+          <p:cNvPr id="13" name="TextBox 12"/>
+          <p:cNvSpPr txBox="1"/>
+          <p:nvPr/>
+        </p:nvSpPr>
+        <p:spPr>
+          <a:xfrm>
+            <a:off x="6480000" y="1782000"/>
+            <a:ext cx="1296000" cy="396000"/>
           </a:xfrm>
           <a:prstGeom prst="rect">
             <a:avLst/>
@@ -9928,66 +10813,144 @@
               </a:spcAft>
             </a:pPr>
             <a:r>
-              <a:rPr sz="1800" b="1">
+              <a:rPr sz="1600" b="1">
+                <a:solidFill>
+                  <a:srgbClr val="1A1A1A"/>
+                </a:solidFill>
+                <a:latin typeface="Pretendard"/>
+              </a:rPr>
+              <a:t>1.10</a:t>
+            </a:r>
+          </a:p>
+        </p:txBody>
+      </p:sp>
+      <p:sp>
+        <p:nvSpPr>
+          <p:cNvPr id="14" name="TextBox 13"/>
+          <p:cNvSpPr txBox="1"/>
+          <p:nvPr/>
+        </p:nvSpPr>
+        <p:spPr>
+          <a:xfrm>
+            <a:off x="7848000" y="1782000"/>
+            <a:ext cx="1296000" cy="396000"/>
+          </a:xfrm>
+          <a:prstGeom prst="rect">
+            <a:avLst/>
+          </a:prstGeom>
+          <a:noFill/>
+        </p:spPr>
+        <p:txBody>
+          <a:bodyPr wrap="square" anchor="ctr" lIns="36000" rIns="36000" tIns="0" bIns="0">
+            <a:spAutoFit/>
+          </a:bodyPr>
+          <a:lstStyle/>
+          <a:p>
+            <a:pPr algn="ctr">
+              <a:spcAft>
+                <a:spcPts val="0"/>
+              </a:spcAft>
+            </a:pPr>
+            <a:r>
+              <a:rPr sz="1600" b="1">
+                <a:solidFill>
+                  <a:srgbClr val="1A1A1A"/>
+                </a:solidFill>
+                <a:latin typeface="Pretendard"/>
+              </a:rPr>
+              <a:t>8.37</a:t>
+            </a:r>
+          </a:p>
+        </p:txBody>
+      </p:sp>
+      <p:sp>
+        <p:nvSpPr>
+          <p:cNvPr id="15" name="TextBox 14"/>
+          <p:cNvSpPr txBox="1"/>
+          <p:nvPr/>
+        </p:nvSpPr>
+        <p:spPr>
+          <a:xfrm>
+            <a:off x="9216000" y="1782000"/>
+            <a:ext cx="1296000" cy="396000"/>
+          </a:xfrm>
+          <a:prstGeom prst="rect">
+            <a:avLst/>
+          </a:prstGeom>
+          <a:noFill/>
+        </p:spPr>
+        <p:txBody>
+          <a:bodyPr wrap="square" anchor="ctr" lIns="36000" rIns="36000" tIns="0" bIns="0">
+            <a:spAutoFit/>
+          </a:bodyPr>
+          <a:lstStyle/>
+          <a:p>
+            <a:pPr algn="ctr">
+              <a:spcAft>
+                <a:spcPts val="0"/>
+              </a:spcAft>
+            </a:pPr>
+            <a:r>
+              <a:rPr sz="1600" b="1">
+                <a:solidFill>
+                  <a:srgbClr val="1A1A1A"/>
+                </a:solidFill>
+                <a:latin typeface="Pretendard"/>
+              </a:rPr>
+              <a:t>-9.60</a:t>
+            </a:r>
+          </a:p>
+        </p:txBody>
+      </p:sp>
+      <p:sp>
+        <p:nvSpPr>
+          <p:cNvPr id="16" name="TextBox 15"/>
+          <p:cNvSpPr txBox="1"/>
+          <p:nvPr/>
+        </p:nvSpPr>
+        <p:spPr>
+          <a:xfrm>
+            <a:off x="10584000" y="1782000"/>
+            <a:ext cx="1296000" cy="396000"/>
+          </a:xfrm>
+          <a:prstGeom prst="rect">
+            <a:avLst/>
+          </a:prstGeom>
+          <a:noFill/>
+        </p:spPr>
+        <p:txBody>
+          <a:bodyPr wrap="square" anchor="ctr" lIns="36000" rIns="36000" tIns="0" bIns="0">
+            <a:spAutoFit/>
+          </a:bodyPr>
+          <a:lstStyle/>
+          <a:p>
+            <a:pPr algn="ctr">
+              <a:spcAft>
+                <a:spcPts val="0"/>
+              </a:spcAft>
+            </a:pPr>
+            <a:r>
+              <a:rPr sz="1600" b="1">
                 <a:solidFill>
                   <a:srgbClr val="D55E00"/>
                 </a:solidFill>
                 <a:latin typeface="Pretendard"/>
               </a:rPr>
-              <a:t>-0.538 → -0.532</a:t>
-            </a:r>
-          </a:p>
-        </p:txBody>
-      </p:sp>
-      <p:sp>
-        <p:nvSpPr>
-          <p:cNvPr id="9" name="TextBox 8"/>
-          <p:cNvSpPr txBox="1"/>
-          <p:nvPr/>
-        </p:nvSpPr>
-        <p:spPr>
-          <a:xfrm>
-            <a:off x="8784000" y="1584000"/>
-            <a:ext cx="2664000" cy="504000"/>
-          </a:xfrm>
-          <a:prstGeom prst="rect">
-            <a:avLst/>
-          </a:prstGeom>
-          <a:noFill/>
-        </p:spPr>
-        <p:txBody>
-          <a:bodyPr wrap="square" anchor="ctr" lIns="36000" rIns="36000" tIns="0" bIns="0">
-            <a:spAutoFit/>
-          </a:bodyPr>
-          <a:lstStyle/>
-          <a:p>
-            <a:pPr algn="r">
-              <a:spcAft>
-                <a:spcPts val="0"/>
-              </a:spcAft>
-            </a:pPr>
-            <a:r>
-              <a:rPr sz="1500" b="0">
-                <a:solidFill>
-                  <a:srgbClr val="5A636B"/>
-                </a:solidFill>
-                <a:latin typeface="Pretendard"/>
-              </a:rPr>
-              <a:t>감쇠 1.2%</a:t>
-            </a:r>
-          </a:p>
-        </p:txBody>
-      </p:sp>
-      <p:sp>
-        <p:nvSpPr>
-          <p:cNvPr id="10" name="Rectangle 9"/>
+              <a:t>0%</a:t>
+            </a:r>
+          </a:p>
+        </p:txBody>
+      </p:sp>
+      <p:sp>
+        <p:nvSpPr>
+          <p:cNvPr id="17" name="Rectangle 16"/>
           <p:cNvSpPr/>
           <p:nvPr/>
         </p:nvSpPr>
         <p:spPr>
           <a:xfrm>
-            <a:off x="720000" y="2232000"/>
-            <a:ext cx="10753200" cy="648000"/>
+            <a:off x="720000" y="2268000"/>
+            <a:ext cx="10753200" cy="486000"/>
           </a:xfrm>
           <a:prstGeom prst="rect">
             <a:avLst/>
@@ -10024,14 +10987,14 @@
       </p:sp>
       <p:sp>
         <p:nvSpPr>
-          <p:cNvPr id="11" name="TextBox 10"/>
-          <p:cNvSpPr txBox="1"/>
-          <p:nvPr/>
-        </p:nvSpPr>
-        <p:spPr>
-          <a:xfrm>
-            <a:off x="900000" y="2304000"/>
-            <a:ext cx="4680000" cy="504000"/>
+          <p:cNvPr id="18" name="TextBox 17"/>
+          <p:cNvSpPr txBox="1"/>
+          <p:nvPr/>
+        </p:nvSpPr>
+        <p:spPr>
+          <a:xfrm>
+            <a:off x="864000" y="2322000"/>
+            <a:ext cx="5544000" cy="396000"/>
           </a:xfrm>
           <a:prstGeom prst="rect">
             <a:avLst/>
@@ -10050,27 +11013,27 @@
               </a:spcAft>
             </a:pPr>
             <a:r>
-              <a:rPr sz="1600" b="0">
+              <a:rPr sz="1500" b="0">
                 <a:solidFill>
                   <a:srgbClr val="1A1A1A"/>
                 </a:solidFill>
                 <a:latin typeface="Pretendard"/>
               </a:rPr>
-              <a:t>② 옛 데이터의 점수 vs Tanimoto</a:t>
-            </a:r>
-          </a:p>
-        </p:txBody>
-      </p:sp>
-      <p:sp>
-        <p:nvSpPr>
-          <p:cNvPr id="12" name="TextBox 11"/>
-          <p:cNvSpPr txBox="1"/>
-          <p:nvPr/>
-        </p:nvSpPr>
-        <p:spPr>
-          <a:xfrm>
-            <a:off x="5688000" y="2304000"/>
-            <a:ext cx="2952000" cy="504000"/>
+              <a:t>수용체 pH7.4 · 리간드 중성  (현행)</a:t>
+            </a:r>
+          </a:p>
+        </p:txBody>
+      </p:sp>
+      <p:sp>
+        <p:nvSpPr>
+          <p:cNvPr id="19" name="TextBox 18"/>
+          <p:cNvSpPr txBox="1"/>
+          <p:nvPr/>
+        </p:nvSpPr>
+        <p:spPr>
+          <a:xfrm>
+            <a:off x="6480000" y="2322000"/>
+            <a:ext cx="1296000" cy="396000"/>
           </a:xfrm>
           <a:prstGeom prst="rect">
             <a:avLst/>
@@ -10089,66 +11052,144 @@
               </a:spcAft>
             </a:pPr>
             <a:r>
-              <a:rPr sz="1800" b="1">
+              <a:rPr sz="1600" b="1">
+                <a:solidFill>
+                  <a:srgbClr val="1A1A1A"/>
+                </a:solidFill>
+                <a:latin typeface="Pretendard"/>
+              </a:rPr>
+              <a:t>1.07</a:t>
+            </a:r>
+          </a:p>
+        </p:txBody>
+      </p:sp>
+      <p:sp>
+        <p:nvSpPr>
+          <p:cNvPr id="20" name="TextBox 19"/>
+          <p:cNvSpPr txBox="1"/>
+          <p:nvPr/>
+        </p:nvSpPr>
+        <p:spPr>
+          <a:xfrm>
+            <a:off x="7848000" y="2322000"/>
+            <a:ext cx="1296000" cy="396000"/>
+          </a:xfrm>
+          <a:prstGeom prst="rect">
+            <a:avLst/>
+          </a:prstGeom>
+          <a:noFill/>
+        </p:spPr>
+        <p:txBody>
+          <a:bodyPr wrap="square" anchor="ctr" lIns="36000" rIns="36000" tIns="0" bIns="0">
+            <a:spAutoFit/>
+          </a:bodyPr>
+          <a:lstStyle/>
+          <a:p>
+            <a:pPr algn="ctr">
+              <a:spcAft>
+                <a:spcPts val="0"/>
+              </a:spcAft>
+            </a:pPr>
+            <a:r>
+              <a:rPr sz="1600" b="1">
+                <a:solidFill>
+                  <a:srgbClr val="1A1A1A"/>
+                </a:solidFill>
+                <a:latin typeface="Pretendard"/>
+              </a:rPr>
+              <a:t>8.36</a:t>
+            </a:r>
+          </a:p>
+        </p:txBody>
+      </p:sp>
+      <p:sp>
+        <p:nvSpPr>
+          <p:cNvPr id="21" name="TextBox 20"/>
+          <p:cNvSpPr txBox="1"/>
+          <p:nvPr/>
+        </p:nvSpPr>
+        <p:spPr>
+          <a:xfrm>
+            <a:off x="9216000" y="2322000"/>
+            <a:ext cx="1296000" cy="396000"/>
+          </a:xfrm>
+          <a:prstGeom prst="rect">
+            <a:avLst/>
+          </a:prstGeom>
+          <a:noFill/>
+        </p:spPr>
+        <p:txBody>
+          <a:bodyPr wrap="square" anchor="ctr" lIns="36000" rIns="36000" tIns="0" bIns="0">
+            <a:spAutoFit/>
+          </a:bodyPr>
+          <a:lstStyle/>
+          <a:p>
+            <a:pPr algn="ctr">
+              <a:spcAft>
+                <a:spcPts val="0"/>
+              </a:spcAft>
+            </a:pPr>
+            <a:r>
+              <a:rPr sz="1600" b="1">
+                <a:solidFill>
+                  <a:srgbClr val="1A1A1A"/>
+                </a:solidFill>
+                <a:latin typeface="Pretendard"/>
+              </a:rPr>
+              <a:t>-9.60</a:t>
+            </a:r>
+          </a:p>
+        </p:txBody>
+      </p:sp>
+      <p:sp>
+        <p:nvSpPr>
+          <p:cNvPr id="22" name="TextBox 21"/>
+          <p:cNvSpPr txBox="1"/>
+          <p:nvPr/>
+        </p:nvSpPr>
+        <p:spPr>
+          <a:xfrm>
+            <a:off x="10584000" y="2322000"/>
+            <a:ext cx="1296000" cy="396000"/>
+          </a:xfrm>
+          <a:prstGeom prst="rect">
+            <a:avLst/>
+          </a:prstGeom>
+          <a:noFill/>
+        </p:spPr>
+        <p:txBody>
+          <a:bodyPr wrap="square" anchor="ctr" lIns="36000" rIns="36000" tIns="0" bIns="0">
+            <a:spAutoFit/>
+          </a:bodyPr>
+          <a:lstStyle/>
+          <a:p>
+            <a:pPr algn="ctr">
+              <a:spcAft>
+                <a:spcPts val="0"/>
+              </a:spcAft>
+            </a:pPr>
+            <a:r>
+              <a:rPr sz="1600" b="1">
                 <a:solidFill>
                   <a:srgbClr val="D55E00"/>
                 </a:solidFill>
                 <a:latin typeface="Pretendard"/>
               </a:rPr>
-              <a:t>-0.131</a:t>
-            </a:r>
-          </a:p>
-        </p:txBody>
-      </p:sp>
-      <p:sp>
-        <p:nvSpPr>
-          <p:cNvPr id="13" name="TextBox 12"/>
-          <p:cNvSpPr txBox="1"/>
-          <p:nvPr/>
-        </p:nvSpPr>
-        <p:spPr>
-          <a:xfrm>
-            <a:off x="8784000" y="2304000"/>
-            <a:ext cx="2664000" cy="504000"/>
-          </a:xfrm>
-          <a:prstGeom prst="rect">
-            <a:avLst/>
-          </a:prstGeom>
-          <a:noFill/>
-        </p:spPr>
-        <p:txBody>
-          <a:bodyPr wrap="square" anchor="ctr" lIns="36000" rIns="36000" tIns="0" bIns="0">
-            <a:spAutoFit/>
-          </a:bodyPr>
-          <a:lstStyle/>
-          <a:p>
-            <a:pPr algn="r">
-              <a:spcAft>
-                <a:spcPts val="0"/>
-              </a:spcAft>
-            </a:pPr>
-            <a:r>
-              <a:rPr sz="1500" b="0">
-                <a:solidFill>
-                  <a:srgbClr val="5A636B"/>
-                </a:solidFill>
-                <a:latin typeface="Pretendard"/>
-              </a:rPr>
-              <a:t>p = 0.48923</a:t>
-            </a:r>
-          </a:p>
-        </p:txBody>
-      </p:sp>
-      <p:sp>
-        <p:nvSpPr>
-          <p:cNvPr id="14" name="Rectangle 13"/>
+              <a:t>0%</a:t>
+            </a:r>
+          </a:p>
+        </p:txBody>
+      </p:sp>
+      <p:sp>
+        <p:nvSpPr>
+          <p:cNvPr id="23" name="Rectangle 22"/>
           <p:cNvSpPr/>
           <p:nvPr/>
         </p:nvSpPr>
         <p:spPr>
           <a:xfrm>
-            <a:off x="720000" y="2952000"/>
-            <a:ext cx="10753200" cy="648000"/>
+            <a:off x="720000" y="2808000"/>
+            <a:ext cx="10753200" cy="486000"/>
           </a:xfrm>
           <a:prstGeom prst="rect">
             <a:avLst/>
@@ -10185,14 +11226,14 @@
       </p:sp>
       <p:sp>
         <p:nvSpPr>
-          <p:cNvPr id="15" name="TextBox 14"/>
-          <p:cNvSpPr txBox="1"/>
-          <p:nvPr/>
-        </p:nvSpPr>
-        <p:spPr>
-          <a:xfrm>
-            <a:off x="900000" y="3024000"/>
-            <a:ext cx="4680000" cy="504000"/>
+          <p:cNvPr id="24" name="TextBox 23"/>
+          <p:cNvSpPr txBox="1"/>
+          <p:nvPr/>
+        </p:nvSpPr>
+        <p:spPr>
+          <a:xfrm>
+            <a:off x="864000" y="2862000"/>
+            <a:ext cx="5544000" cy="396000"/>
           </a:xfrm>
           <a:prstGeom prst="rect">
             <a:avLst/>
@@ -10211,27 +11252,27 @@
               </a:spcAft>
             </a:pPr>
             <a:r>
-              <a:rPr sz="1600" b="0">
+              <a:rPr sz="1500" b="0">
                 <a:solidFill>
                   <a:srgbClr val="1A1A1A"/>
                 </a:solidFill>
                 <a:latin typeface="Pretendard"/>
               </a:rPr>
-              <a:t>③ 옛 설계를 새 데이터에 재현</a:t>
-            </a:r>
-          </a:p>
-        </p:txBody>
-      </p:sp>
-      <p:sp>
-        <p:nvSpPr>
-          <p:cNvPr id="16" name="TextBox 15"/>
-          <p:cNvSpPr txBox="1"/>
-          <p:nvPr/>
-        </p:nvSpPr>
-        <p:spPr>
-          <a:xfrm>
-            <a:off x="5688000" y="3024000"/>
-            <a:ext cx="2952000" cy="504000"/>
+              <a:t>수용체 중성 · 리간드 중성</a:t>
+            </a:r>
+          </a:p>
+        </p:txBody>
+      </p:sp>
+      <p:sp>
+        <p:nvSpPr>
+          <p:cNvPr id="25" name="TextBox 24"/>
+          <p:cNvSpPr txBox="1"/>
+          <p:nvPr/>
+        </p:nvSpPr>
+        <p:spPr>
+          <a:xfrm>
+            <a:off x="6480000" y="2862000"/>
+            <a:ext cx="1296000" cy="396000"/>
           </a:xfrm>
           <a:prstGeom prst="rect">
             <a:avLst/>
@@ -10250,66 +11291,144 @@
               </a:spcAft>
             </a:pPr>
             <a:r>
-              <a:rPr sz="1800" b="1">
+              <a:rPr sz="1600" b="1">
+                <a:solidFill>
+                  <a:srgbClr val="1A1A1A"/>
+                </a:solidFill>
+                <a:latin typeface="Pretendard"/>
+              </a:rPr>
+              <a:t>1.22</a:t>
+            </a:r>
+          </a:p>
+        </p:txBody>
+      </p:sp>
+      <p:sp>
+        <p:nvSpPr>
+          <p:cNvPr id="26" name="TextBox 25"/>
+          <p:cNvSpPr txBox="1"/>
+          <p:nvPr/>
+        </p:nvSpPr>
+        <p:spPr>
+          <a:xfrm>
+            <a:off x="7848000" y="2862000"/>
+            <a:ext cx="1296000" cy="396000"/>
+          </a:xfrm>
+          <a:prstGeom prst="rect">
+            <a:avLst/>
+          </a:prstGeom>
+          <a:noFill/>
+        </p:spPr>
+        <p:txBody>
+          <a:bodyPr wrap="square" anchor="ctr" lIns="36000" rIns="36000" tIns="0" bIns="0">
+            <a:spAutoFit/>
+          </a:bodyPr>
+          <a:lstStyle/>
+          <a:p>
+            <a:pPr algn="ctr">
+              <a:spcAft>
+                <a:spcPts val="0"/>
+              </a:spcAft>
+            </a:pPr>
+            <a:r>
+              <a:rPr sz="1600" b="1">
+                <a:solidFill>
+                  <a:srgbClr val="1A1A1A"/>
+                </a:solidFill>
+                <a:latin typeface="Pretendard"/>
+              </a:rPr>
+              <a:t>8.37</a:t>
+            </a:r>
+          </a:p>
+        </p:txBody>
+      </p:sp>
+      <p:sp>
+        <p:nvSpPr>
+          <p:cNvPr id="27" name="TextBox 26"/>
+          <p:cNvSpPr txBox="1"/>
+          <p:nvPr/>
+        </p:nvSpPr>
+        <p:spPr>
+          <a:xfrm>
+            <a:off x="9216000" y="2862000"/>
+            <a:ext cx="1296000" cy="396000"/>
+          </a:xfrm>
+          <a:prstGeom prst="rect">
+            <a:avLst/>
+          </a:prstGeom>
+          <a:noFill/>
+        </p:spPr>
+        <p:txBody>
+          <a:bodyPr wrap="square" anchor="ctr" lIns="36000" rIns="36000" tIns="0" bIns="0">
+            <a:spAutoFit/>
+          </a:bodyPr>
+          <a:lstStyle/>
+          <a:p>
+            <a:pPr algn="ctr">
+              <a:spcAft>
+                <a:spcPts val="0"/>
+              </a:spcAft>
+            </a:pPr>
+            <a:r>
+              <a:rPr sz="1600" b="1">
+                <a:solidFill>
+                  <a:srgbClr val="1A1A1A"/>
+                </a:solidFill>
+                <a:latin typeface="Pretendard"/>
+              </a:rPr>
+              <a:t>-9.60</a:t>
+            </a:r>
+          </a:p>
+        </p:txBody>
+      </p:sp>
+      <p:sp>
+        <p:nvSpPr>
+          <p:cNvPr id="28" name="TextBox 27"/>
+          <p:cNvSpPr txBox="1"/>
+          <p:nvPr/>
+        </p:nvSpPr>
+        <p:spPr>
+          <a:xfrm>
+            <a:off x="10584000" y="2862000"/>
+            <a:ext cx="1296000" cy="396000"/>
+          </a:xfrm>
+          <a:prstGeom prst="rect">
+            <a:avLst/>
+          </a:prstGeom>
+          <a:noFill/>
+        </p:spPr>
+        <p:txBody>
+          <a:bodyPr wrap="square" anchor="ctr" lIns="36000" rIns="36000" tIns="0" bIns="0">
+            <a:spAutoFit/>
+          </a:bodyPr>
+          <a:lstStyle/>
+          <a:p>
+            <a:pPr algn="ctr">
+              <a:spcAft>
+                <a:spcPts val="0"/>
+              </a:spcAft>
+            </a:pPr>
+            <a:r>
+              <a:rPr sz="1600" b="1">
                 <a:solidFill>
                   <a:srgbClr val="D55E00"/>
                 </a:solidFill>
                 <a:latin typeface="Pretendard"/>
               </a:rPr>
-              <a:t>중앙값 -0.148</a:t>
-            </a:r>
-          </a:p>
-        </p:txBody>
-      </p:sp>
-      <p:sp>
-        <p:nvSpPr>
-          <p:cNvPr id="17" name="TextBox 16"/>
-          <p:cNvSpPr txBox="1"/>
-          <p:nvPr/>
-        </p:nvSpPr>
-        <p:spPr>
-          <a:xfrm>
-            <a:off x="8784000" y="3024000"/>
-            <a:ext cx="2664000" cy="504000"/>
-          </a:xfrm>
-          <a:prstGeom prst="rect">
-            <a:avLst/>
-          </a:prstGeom>
-          <a:noFill/>
-        </p:spPr>
-        <p:txBody>
-          <a:bodyPr wrap="square" anchor="ctr" lIns="36000" rIns="36000" tIns="0" bIns="0">
-            <a:spAutoFit/>
-          </a:bodyPr>
-          <a:lstStyle/>
-          <a:p>
-            <a:pPr algn="r">
-              <a:spcAft>
-                <a:spcPts val="0"/>
-              </a:spcAft>
-            </a:pPr>
-            <a:r>
-              <a:rPr sz="1500" b="0">
-                <a:solidFill>
-                  <a:srgbClr val="5A636B"/>
-                </a:solidFill>
-                <a:latin typeface="Pretendard"/>
-              </a:rPr>
-              <a:t>−0.4 미만 4.7%</a:t>
-            </a:r>
-          </a:p>
-        </p:txBody>
-      </p:sp>
-      <p:sp>
-        <p:nvSpPr>
-          <p:cNvPr id="18" name="Rectangle 17"/>
+              <a:t>0%</a:t>
+            </a:r>
+          </a:p>
+        </p:txBody>
+      </p:sp>
+      <p:sp>
+        <p:nvSpPr>
+          <p:cNvPr id="29" name="Rectangle 28"/>
           <p:cNvSpPr/>
           <p:nvPr/>
         </p:nvSpPr>
         <p:spPr>
           <a:xfrm>
-            <a:off x="720000" y="3672000"/>
-            <a:ext cx="10753200" cy="648000"/>
+            <a:off x="720000" y="3348000"/>
+            <a:ext cx="10753200" cy="486000"/>
           </a:xfrm>
           <a:prstGeom prst="rect">
             <a:avLst/>
@@ -10346,14 +11465,14 @@
       </p:sp>
       <p:sp>
         <p:nvSpPr>
-          <p:cNvPr id="19" name="TextBox 18"/>
-          <p:cNvSpPr txBox="1"/>
-          <p:nvPr/>
-        </p:nvSpPr>
-        <p:spPr>
-          <a:xfrm>
-            <a:off x="900000" y="3744000"/>
-            <a:ext cx="4680000" cy="504000"/>
+          <p:cNvPr id="30" name="TextBox 29"/>
+          <p:cNvSpPr txBox="1"/>
+          <p:nvPr/>
+        </p:nvSpPr>
+        <p:spPr>
+          <a:xfrm>
+            <a:off x="864000" y="3402000"/>
+            <a:ext cx="5544000" cy="396000"/>
           </a:xfrm>
           <a:prstGeom prst="rect">
             <a:avLst/>
@@ -10372,27 +11491,27 @@
               </a:spcAft>
             </a:pPr>
             <a:r>
-              <a:rPr sz="1600" b="0">
+              <a:rPr sz="1500" b="0">
                 <a:solidFill>
                   <a:srgbClr val="1A1A1A"/>
                 </a:solidFill>
                 <a:latin typeface="Pretendard"/>
               </a:rPr>
-              <a:t>④ 옛 30건을 새 프로토콜로 재도킹</a:t>
-            </a:r>
-          </a:p>
-        </p:txBody>
-      </p:sp>
-      <p:sp>
-        <p:nvSpPr>
-          <p:cNvPr id="20" name="TextBox 19"/>
-          <p:cNvSpPr txBox="1"/>
-          <p:nvPr/>
-        </p:nvSpPr>
-        <p:spPr>
-          <a:xfrm>
-            <a:off x="5688000" y="3744000"/>
-            <a:ext cx="2952000" cy="504000"/>
+              <a:t>수용체 중성 · 리간드 pH7.4</a:t>
+            </a:r>
+          </a:p>
+        </p:txBody>
+      </p:sp>
+      <p:sp>
+        <p:nvSpPr>
+          <p:cNvPr id="31" name="TextBox 30"/>
+          <p:cNvSpPr txBox="1"/>
+          <p:nvPr/>
+        </p:nvSpPr>
+        <p:spPr>
+          <a:xfrm>
+            <a:off x="6480000" y="3402000"/>
+            <a:ext cx="1296000" cy="396000"/>
           </a:xfrm>
           <a:prstGeom prst="rect">
             <a:avLst/>
@@ -10411,91 +11530,270 @@
               </a:spcAft>
             </a:pPr>
             <a:r>
+              <a:rPr sz="1600" b="1">
+                <a:solidFill>
+                  <a:srgbClr val="1A1A1A"/>
+                </a:solidFill>
+                <a:latin typeface="Pretendard"/>
+              </a:rPr>
+              <a:t>1.22</a:t>
+            </a:r>
+          </a:p>
+        </p:txBody>
+      </p:sp>
+      <p:sp>
+        <p:nvSpPr>
+          <p:cNvPr id="32" name="TextBox 31"/>
+          <p:cNvSpPr txBox="1"/>
+          <p:nvPr/>
+        </p:nvSpPr>
+        <p:spPr>
+          <a:xfrm>
+            <a:off x="7848000" y="3402000"/>
+            <a:ext cx="1296000" cy="396000"/>
+          </a:xfrm>
+          <a:prstGeom prst="rect">
+            <a:avLst/>
+          </a:prstGeom>
+          <a:noFill/>
+        </p:spPr>
+        <p:txBody>
+          <a:bodyPr wrap="square" anchor="ctr" lIns="36000" rIns="36000" tIns="0" bIns="0">
+            <a:spAutoFit/>
+          </a:bodyPr>
+          <a:lstStyle/>
+          <a:p>
+            <a:pPr algn="ctr">
+              <a:spcAft>
+                <a:spcPts val="0"/>
+              </a:spcAft>
+            </a:pPr>
+            <a:r>
+              <a:rPr sz="1600" b="1">
+                <a:solidFill>
+                  <a:srgbClr val="1A1A1A"/>
+                </a:solidFill>
+                <a:latin typeface="Pretendard"/>
+              </a:rPr>
+              <a:t>8.37</a:t>
+            </a:r>
+          </a:p>
+        </p:txBody>
+      </p:sp>
+      <p:sp>
+        <p:nvSpPr>
+          <p:cNvPr id="33" name="TextBox 32"/>
+          <p:cNvSpPr txBox="1"/>
+          <p:nvPr/>
+        </p:nvSpPr>
+        <p:spPr>
+          <a:xfrm>
+            <a:off x="9216000" y="3402000"/>
+            <a:ext cx="1296000" cy="396000"/>
+          </a:xfrm>
+          <a:prstGeom prst="rect">
+            <a:avLst/>
+          </a:prstGeom>
+          <a:noFill/>
+        </p:spPr>
+        <p:txBody>
+          <a:bodyPr wrap="square" anchor="ctr" lIns="36000" rIns="36000" tIns="0" bIns="0">
+            <a:spAutoFit/>
+          </a:bodyPr>
+          <a:lstStyle/>
+          <a:p>
+            <a:pPr algn="ctr">
+              <a:spcAft>
+                <a:spcPts val="0"/>
+              </a:spcAft>
+            </a:pPr>
+            <a:r>
+              <a:rPr sz="1600" b="1">
+                <a:solidFill>
+                  <a:srgbClr val="1A1A1A"/>
+                </a:solidFill>
+                <a:latin typeface="Pretendard"/>
+              </a:rPr>
+              <a:t>-9.60</a:t>
+            </a:r>
+          </a:p>
+        </p:txBody>
+      </p:sp>
+      <p:sp>
+        <p:nvSpPr>
+          <p:cNvPr id="34" name="TextBox 33"/>
+          <p:cNvSpPr txBox="1"/>
+          <p:nvPr/>
+        </p:nvSpPr>
+        <p:spPr>
+          <a:xfrm>
+            <a:off x="10584000" y="3402000"/>
+            <a:ext cx="1296000" cy="396000"/>
+          </a:xfrm>
+          <a:prstGeom prst="rect">
+            <a:avLst/>
+          </a:prstGeom>
+          <a:noFill/>
+        </p:spPr>
+        <p:txBody>
+          <a:bodyPr wrap="square" anchor="ctr" lIns="36000" rIns="36000" tIns="0" bIns="0">
+            <a:spAutoFit/>
+          </a:bodyPr>
+          <a:lstStyle/>
+          <a:p>
+            <a:pPr algn="ctr">
+              <a:spcAft>
+                <a:spcPts val="0"/>
+              </a:spcAft>
+            </a:pPr>
+            <a:r>
+              <a:rPr sz="1600" b="1">
+                <a:solidFill>
+                  <a:srgbClr val="D55E00"/>
+                </a:solidFill>
+                <a:latin typeface="Pretendard"/>
+              </a:rPr>
+              <a:t>0%</a:t>
+            </a:r>
+          </a:p>
+        </p:txBody>
+      </p:sp>
+      <p:sp>
+        <p:nvSpPr>
+          <p:cNvPr id="35" name="Rounded Rectangle 34"/>
+          <p:cNvSpPr/>
+          <p:nvPr/>
+        </p:nvSpPr>
+        <p:spPr>
+          <a:xfrm>
+            <a:off x="720000" y="4104000"/>
+            <a:ext cx="10753200" cy="1080000"/>
+          </a:xfrm>
+          <a:prstGeom prst="roundRect">
+            <a:avLst/>
+          </a:prstGeom>
+          <a:solidFill>
+            <a:srgbClr val="FDF0E6"/>
+          </a:solidFill>
+          <a:ln w="17780">
+            <a:solidFill>
+              <a:srgbClr val="D55E00"/>
+            </a:solidFill>
+          </a:ln>
+          <a:effectLst/>
+        </p:spPr>
+        <p:style>
+          <a:lnRef idx="1">
+            <a:schemeClr val="accent1"/>
+          </a:lnRef>
+          <a:fillRef idx="3">
+            <a:schemeClr val="accent1"/>
+          </a:fillRef>
+          <a:effectRef idx="2">
+            <a:schemeClr val="accent1"/>
+          </a:effectRef>
+          <a:fontRef idx="minor">
+            <a:schemeClr val="lt1"/>
+          </a:fontRef>
+        </p:style>
+        <p:txBody>
+          <a:bodyPr rtlCol="0" anchor="ctr"/>
+          <a:lstStyle/>
+          <a:p>
+            <a:pPr algn="ctr"/>
+          </a:p>
+        </p:txBody>
+      </p:sp>
+      <p:sp>
+        <p:nvSpPr>
+          <p:cNvPr id="36" name="TextBox 35"/>
+          <p:cNvSpPr txBox="1"/>
+          <p:nvPr/>
+        </p:nvSpPr>
+        <p:spPr>
+          <a:xfrm>
+            <a:off x="936000" y="4248000"/>
+            <a:ext cx="10321200" cy="864000"/>
+          </a:xfrm>
+          <a:prstGeom prst="rect">
+            <a:avLst/>
+          </a:prstGeom>
+          <a:noFill/>
+        </p:spPr>
+        <p:txBody>
+          <a:bodyPr wrap="square" anchor="t" lIns="36000" rIns="36000" tIns="0" bIns="0">
+            <a:spAutoFit/>
+          </a:bodyPr>
+          <a:lstStyle/>
+          <a:p>
+            <a:pPr algn="l">
+              <a:spcAft>
+                <a:spcPts val="300"/>
+              </a:spcAft>
+            </a:pPr>
+            <a:r>
               <a:rPr sz="1800" b="1">
                 <a:solidFill>
                   <a:srgbClr val="D55E00"/>
                 </a:solidFill>
                 <a:latin typeface="Pretendard"/>
               </a:rPr>
-              <a:t>-0.538 → -0.527</a:t>
-            </a:r>
-          </a:p>
-        </p:txBody>
-      </p:sp>
-      <p:sp>
-        <p:nvSpPr>
-          <p:cNvPr id="21" name="TextBox 20"/>
-          <p:cNvSpPr txBox="1"/>
-          <p:nvPr/>
-        </p:nvSpPr>
-        <p:spPr>
-          <a:xfrm>
-            <a:off x="8784000" y="3744000"/>
-            <a:ext cx="2664000" cy="504000"/>
-          </a:xfrm>
-          <a:prstGeom prst="rect">
-            <a:avLst/>
-          </a:prstGeom>
-          <a:noFill/>
-        </p:spPr>
-        <p:txBody>
-          <a:bodyPr wrap="square" anchor="ctr" lIns="36000" rIns="36000" tIns="0" bIns="0">
-            <a:spAutoFit/>
-          </a:bodyPr>
-          <a:lstStyle/>
-          <a:p>
-            <a:pPr algn="r">
+              <a:t>기본 Vina 채점 함수에는 정전기 항이 없다.</a:t>
+            </a:r>
+          </a:p>
+          <a:p>
+            <a:pPr algn="l">
+              <a:spcAft>
+                <a:spcPts val="300"/>
+              </a:spcAft>
+            </a:pPr>
+            <a:r>
+              <a:rPr sz="1500" b="0">
+                <a:solidFill>
+                  <a:srgbClr val="1A1A1A"/>
+                </a:solidFill>
+                <a:latin typeface="Pretendard"/>
+              </a:rPr>
+              <a:t>형식전하는 점수에 닿지 못하고, 바뀐 수소결합 타이핑도 그 질소가 결합 거리 밖이라 항 값이 움직이지 않았다. 원리적으로 원인이 될 수 없다.</a:t>
+            </a:r>
+          </a:p>
+        </p:txBody>
+      </p:sp>
+      <p:sp>
+        <p:nvSpPr>
+          <p:cNvPr id="37" name="TextBox 36"/>
+          <p:cNvSpPr txBox="1"/>
+          <p:nvPr/>
+        </p:nvSpPr>
+        <p:spPr>
+          <a:xfrm>
+            <a:off x="720000" y="5400000"/>
+            <a:ext cx="10753200" cy="360000"/>
+          </a:xfrm>
+          <a:prstGeom prst="rect">
+            <a:avLst/>
+          </a:prstGeom>
+          <a:noFill/>
+        </p:spPr>
+        <p:txBody>
+          <a:bodyPr wrap="square" anchor="t" lIns="36000" rIns="36000" tIns="0" bIns="0">
+            <a:spAutoFit/>
+          </a:bodyPr>
+          <a:lstStyle/>
+          <a:p>
+            <a:pPr algn="ctr">
               <a:spcAft>
                 <a:spcPts val="0"/>
               </a:spcAft>
             </a:pPr>
             <a:r>
-              <a:rPr sz="1500" b="0">
-                <a:solidFill>
-                  <a:srgbClr val="5A636B"/>
-                </a:solidFill>
-                <a:latin typeface="Pretendard"/>
-              </a:rPr>
-              <a:t>점수 상관 +0.997</a:t>
-            </a:r>
-          </a:p>
-        </p:txBody>
-      </p:sp>
-      <p:sp>
-        <p:nvSpPr>
-          <p:cNvPr id="22" name="TextBox 21"/>
-          <p:cNvSpPr txBox="1"/>
-          <p:nvPr/>
-        </p:nvSpPr>
-        <p:spPr>
-          <a:xfrm>
-            <a:off x="720000" y="4608000"/>
-            <a:ext cx="10753200" cy="576000"/>
-          </a:xfrm>
-          <a:prstGeom prst="rect">
-            <a:avLst/>
-          </a:prstGeom>
-          <a:noFill/>
-        </p:spPr>
-        <p:txBody>
-          <a:bodyPr wrap="square" anchor="t" lIns="36000" rIns="36000" tIns="0" bIns="0">
-            <a:spAutoFit/>
-          </a:bodyPr>
-          <a:lstStyle/>
-          <a:p>
-            <a:pPr algn="ctr">
-              <a:spcAft>
-                <a:spcPts val="0"/>
-              </a:spcAft>
-            </a:pPr>
-            <a:r>
-              <a:rPr sz="1700" b="1">
+              <a:rPr sz="1400" b="1">
                 <a:solidFill>
                   <a:srgbClr val="0B2A4A"/>
                 </a:solidFill>
                 <a:latin typeface="Pretendard"/>
               </a:rPr>
-              <a:t>네 검정이 모두 후보를 배제한다. 원인은 그 화합물 집합 자체이며, 어떤 성질 때문인지는 이 데이터로 더 좁히지 못했다.</a:t>
+              <a:t>여기까지가 자세 갈래 — C2 실패의 두 후보를 지웠다. 이제 상관 갈래로 넘어간다.</a:t>
             </a:r>
           </a:p>
         </p:txBody>
@@ -10695,8 +11993,8 @@
         </p:blipFill>
         <p:spPr>
           <a:xfrm>
-            <a:off x="2225572" y="1224000"/>
-            <a:ext cx="7742055" cy="4248000"/>
+            <a:off x="1963129" y="1152000"/>
+            <a:ext cx="8266940" cy="4536000"/>
           </a:xfrm>
           <a:prstGeom prst="rect">
             <a:avLst/>
@@ -10711,7 +12009,7 @@
         </p:nvSpPr>
         <p:spPr>
           <a:xfrm>
-            <a:off x="720000" y="5616000"/>
+            <a:off x="720000" y="5832000"/>
             <a:ext cx="10753200" cy="432000"/>
           </a:xfrm>
           <a:prstGeom prst="rect">
@@ -10740,7 +12038,7 @@
               <a:t>전체 </a:t>
             </a:r>
             <a:r>
-              <a:rPr sz="1800" b="1">
+              <a:rPr sz="1900" b="1">
                 <a:solidFill>
                   <a:srgbClr val="D55E00"/>
                 </a:solidFill>
@@ -10755,10 +12053,10 @@
                 </a:solidFill>
                 <a:latin typeface="Pretendard"/>
               </a:rPr>
-              <a:t>    골격 통제 </a:t>
-            </a:r>
-            <a:r>
-              <a:rPr sz="1800" b="1">
+              <a:t>     골격 통제 </a:t>
+            </a:r>
+            <a:r>
+              <a:rPr sz="1900" b="1">
                 <a:solidFill>
                   <a:srgbClr val="D55E00"/>
                 </a:solidFill>
@@ -10773,10 +12071,10 @@
                 </a:solidFill>
                 <a:latin typeface="Pretendard"/>
               </a:rPr>
-              <a:t>    골격+크기 </a:t>
-            </a:r>
-            <a:r>
-              <a:rPr sz="1800" b="1">
+              <a:t>     골격+크기 </a:t>
+            </a:r>
+            <a:r>
+              <a:rPr sz="1900" b="1">
                 <a:solidFill>
                   <a:srgbClr val="D55E00"/>
                 </a:solidFill>

--- a/20260905/pde5_harness/sample_run/report/docs/talk_16x9.pptx
+++ b/20260905/pde5_harness/sample_run/report/docs/talk_16x9.pptx
@@ -5208,7 +5208,7 @@
                 </a:solidFill>
                 <a:latin typeface="Pretendard"/>
               </a:rPr>
-              <a:t>far 1.8%   ·   mid 31.4%   ·   near 25.0% 만 2 Å 기준 안에 있다</a:t>
+              <a:t>mid 31.4%   ·   near 25.0% 만 2 Å 기준 안에 있다</a:t>
             </a:r>
           </a:p>
           <a:p>
@@ -5224,7 +5224,7 @@
                 </a:solidFill>
                 <a:latin typeface="Pretendard"/>
               </a:rPr>
-              <a:t>이 지표는 “자세가 맞는가” 가 아니라 “공유 부분구조가 공결정 리간드 위에 겹치는가” 를 잰다. 골격이 다른 far 대역에서는 해석이 특히 약하다.</a:t>
+              <a:t>far 대역은 공유 부분구조가 평균 10.6원자(하한 8)라 이 지표 자체가 성립하지 않아 값을 내지 않았다. 이 지표는 “자세가 맞는가” 가 아니라 “공유 부분구조가 공결정 리간드 위에 겹치는가” 를 잰다.</a:t>
             </a:r>
           </a:p>
         </p:txBody>
@@ -6781,7 +6781,7 @@
                 </a:solidFill>
                 <a:latin typeface="Pretendard"/>
               </a:rPr>
-              <a:t>②  점수를 매긴 자세가 어디에 놓였는지 먼저 보고하라 — 이 연구에서는 19% 였다</a:t>
+              <a:t>②  점수를 매긴 자세가 어디에 놓였는지 먼저 보고하라 — 여기서는 28% 였다</a:t>
             </a:r>
           </a:p>
           <a:p>
@@ -9660,7 +9660,7 @@
                 </a:solidFill>
                 <a:latin typeface="Pretendard"/>
               </a:rPr>
-              <a:t>재도킹 대조를 쪼개니 채점이 실패했다 — 163개 중 81%가 같은 실패다</a:t>
+              <a:t>재도킹 대조를 쪼개니 채점이 실패했다 — 103개 중 72%가 같은 실패다</a:t>
             </a:r>
           </a:p>
         </p:txBody>
@@ -9990,7 +9990,7 @@
                 </a:solidFill>
                 <a:latin typeface="Pretendard"/>
               </a:rPr>
-              <a:t>163개 전체 1위 자세의 MCS-RMSD 중앙값 4.50 Å, 2 Å 기준 통과 19.0%</a:t>
+              <a:t>해석 가능한 대역 103건의 MCS-RMSD 중앙값 3.79 Å, 2 Å 기준 통과 28.2%</a:t>
             </a:r>
           </a:p>
           <a:p>
